--- a/Japan_Long_End_Repricing.pptx
+++ b/Japan_Long_End_Repricing.pptx
@@ -9924,7 +9924,7 @@
                 </a:solidFill>
                 <a:latin typeface="Arial"/>
               </a:rPr>
-              <a:t>Exhibit 1. QT is lifting the long end while the front end stays anchored</a:t>
+              <a:t>Exhibit 1. Quantitative tightening is lifting the long end; the front end remains anchored</a:t>
             </a:r>
           </a:p>
         </p:txBody>
@@ -10614,7 +10614,7 @@
                 </a:solidFill>
                 <a:latin typeface="Arial"/>
               </a:rPr>
-              <a:t>Exhibit 2. A ¥1,013.8tn market must clear with less official support</a:t>
+              <a:t>Exhibit 2. A ¥1,013.8tn market must now clear without its largest buyer</a:t>
             </a:r>
           </a:p>
         </p:txBody>
@@ -10758,7 +10758,7 @@
                 </a:solidFill>
                 <a:latin typeface="Arial"/>
               </a:rPr>
-              <a:t>still on the BoJ's balance sheet</a:t>
+              <a:t>held by the BoJ, and now shrinking</a:t>
             </a:r>
           </a:p>
         </p:txBody>
@@ -10842,7 +10842,7 @@
                 </a:solidFill>
                 <a:latin typeface="Arial"/>
               </a:rPr>
-              <a:t>FY26 issuance to be absorbed privately</a:t>
+              <a:t>FY26 issuance for private investors</a:t>
             </a:r>
           </a:p>
         </p:txBody>
@@ -11125,8 +11125,8 @@
         </p:nvSpPr>
         <p:spPr>
           <a:xfrm>
-            <a:off x="475488" y="4974336"/>
-            <a:ext cx="11247120" cy="914400"/>
+            <a:off x="475488" y="4937760"/>
+            <a:ext cx="11247120" cy="1024128"/>
           </a:xfrm>
           <a:prstGeom prst="rect">
             <a:avLst/>
@@ -11167,8 +11167,8 @@
         </p:nvSpPr>
         <p:spPr>
           <a:xfrm>
-            <a:off x="822960" y="5084064"/>
-            <a:ext cx="10552176" cy="731520"/>
+            <a:off x="786384" y="5029200"/>
+            <a:ext cx="10625328" cy="877824"/>
           </a:xfrm>
           <a:prstGeom prst="rect">
             <a:avLst/>
@@ -11183,20 +11183,20 @@
           <a:p>
             <a:pPr algn="ctr">
               <a:lnSpc>
-                <a:spcPct val="122000"/>
+                <a:spcPct val="120000"/>
               </a:lnSpc>
               <a:spcAft>
                 <a:spcPts val="0"/>
               </a:spcAft>
             </a:pPr>
             <a:r>
-              <a:rPr sz="1050" b="0" i="0">
+              <a:rPr sz="950" b="0" i="0">
                 <a:solidFill>
                   <a:srgbClr val="000000"/>
                 </a:solidFill>
                 <a:latin typeface="Arial"/>
               </a:rPr>
-              <a:t>Three regime changes at once. The BoJ is withdrawing after a quarter-century of suppression, a record stock of debt now has to clear through price-sensitive buyers, and the deflation equilibrium that justified zero yields has broken. Each raises the term premium the long end demands — and none of them moves the front end, which the Bank still controls and is moving slowly. That is a bear steepener.</a:t>
+              <a:t>Three structural changes are occurring at once: the Bank of Japan is withdrawing after twenty-five years of suppression, a record debt stock must now clear through price-sensitive investors, and the deflationary equilibrium that justified zero yields has ended. Describing this as a fiscal story is a misnomer. The stock accumulated over decades and the fiscal stance has not materially shifted; what changed is who absorbs the issuance. Each factor raises the term premium demanded at the long end, and none of them affects the front end, which the Bank continues to control and is normalising slowly. That combination is a bear steepener.</a:t>
             </a:r>
           </a:p>
         </p:txBody>
@@ -11209,7 +11209,7 @@
         </p:nvSpPr>
         <p:spPr>
           <a:xfrm>
-            <a:off x="475488" y="6053328"/>
+            <a:off x="475488" y="6089904"/>
             <a:ext cx="6949440" cy="201168"/>
           </a:xfrm>
           <a:prstGeom prst="rect">
@@ -11251,7 +11251,7 @@
         </p:nvSpPr>
         <p:spPr>
           <a:xfrm>
-            <a:off x="475488" y="6053328"/>
+            <a:off x="475488" y="6089904"/>
             <a:ext cx="11247120" cy="201168"/>
           </a:xfrm>
           <a:prstGeom prst="rect">

--- a/Japan_Long_End_Repricing.pptx
+++ b/Japan_Long_End_Repricing.pptx
@@ -5,9 +5,9 @@
     <p:sldMasterId id="2147483648" r:id="rId1"/>
   </p:sldMasterIdLst>
   <p:sldIdLst>
-    <p:sldId id="256" r:id="rId7"/>
+    <p:sldId id="256" r:id="rId2"/>
   </p:sldIdLst>
-  <p:sldSz cx="12191695" cy="6858000" type="screen4x3"/>
+  <p:sldSz cx="12192000" cy="6858000"/>
   <p:notesSz cx="6858000" cy="9144000"/>
   <p:defaultTextStyle>
     <a:defPPr>
@@ -104,15 +104,35 @@
       </a:defRPr>
     </a:lvl9pPr>
   </p:defaultTextStyle>
+  <p:extLst>
+    <p:ext uri="{EFAFB233-063F-42B5-8137-9DF3F51BA10A}">
+      <p15:sldGuideLst xmlns:p15="http://schemas.microsoft.com/office/powerpoint/2012/main">
+        <p15:guide id="1" orient="horz" pos="2160">
+          <p15:clr>
+            <a:srgbClr val="A4A3A4"/>
+          </p15:clr>
+        </p15:guide>
+        <p15:guide id="2" pos="2880">
+          <p15:clr>
+            <a:srgbClr val="A4A3A4"/>
+          </p15:clr>
+        </p15:guide>
+      </p15:sldGuideLst>
+    </p:ext>
+  </p:extLst>
 </p:presentation>
 </file>
 
 <file path=ppt/charts/chart1.xml><?xml version="1.0" encoding="utf-8"?>
-<c:chartSpace xmlns:c="http://schemas.openxmlformats.org/drawingml/2006/chart" xmlns:a="http://schemas.openxmlformats.org/drawingml/2006/main" xmlns:r="http://schemas.openxmlformats.org/officeDocument/2006/relationships">
+<c:chartSpace xmlns:c="http://schemas.openxmlformats.org/drawingml/2006/chart" xmlns:a="http://schemas.openxmlformats.org/drawingml/2006/main" xmlns:r="http://schemas.openxmlformats.org/officeDocument/2006/relationships" xmlns:c16r2="http://schemas.microsoft.com/office/drawing/2015/06/chart">
   <c:date1904 val="0"/>
+  <c:lang val="en-GB"/>
+  <c:roundedCorners val="1"/>
+  <c:style val="2"/>
   <c:chart>
     <c:autoTitleDeleted val="1"/>
     <c:plotArea>
+      <c:layout/>
       <c:lineChart>
         <c:grouping val="standard"/>
         <c:varyColors val="0"/>
@@ -145,1025 +165,26 @@
               <c:f>Sheet1!$A$2:$A$341</c:f>
               <c:strCache>
                 <c:ptCount val="340"/>
-                <c:pt idx="0">
-                  <c:v/>
-                </c:pt>
-                <c:pt idx="1">
-                  <c:v/>
-                </c:pt>
-                <c:pt idx="2">
-                  <c:v/>
-                </c:pt>
-                <c:pt idx="3">
-                  <c:v/>
-                </c:pt>
-                <c:pt idx="4">
-                  <c:v/>
-                </c:pt>
-                <c:pt idx="5">
-                  <c:v/>
-                </c:pt>
-                <c:pt idx="6">
-                  <c:v/>
-                </c:pt>
-                <c:pt idx="7">
-                  <c:v/>
-                </c:pt>
-                <c:pt idx="8">
-                  <c:v/>
-                </c:pt>
-                <c:pt idx="9">
-                  <c:v/>
-                </c:pt>
-                <c:pt idx="10">
-                  <c:v/>
-                </c:pt>
-                <c:pt idx="11">
-                  <c:v/>
-                </c:pt>
-                <c:pt idx="12">
-                  <c:v/>
-                </c:pt>
-                <c:pt idx="13">
-                  <c:v/>
-                </c:pt>
-                <c:pt idx="14">
-                  <c:v/>
-                </c:pt>
-                <c:pt idx="15">
-                  <c:v/>
-                </c:pt>
-                <c:pt idx="16">
-                  <c:v/>
-                </c:pt>
-                <c:pt idx="17">
-                  <c:v/>
-                </c:pt>
-                <c:pt idx="18">
-                  <c:v/>
-                </c:pt>
-                <c:pt idx="19">
-                  <c:v/>
-                </c:pt>
-                <c:pt idx="20">
-                  <c:v/>
-                </c:pt>
                 <c:pt idx="21">
                   <c:v>2000</c:v>
                 </c:pt>
-                <c:pt idx="22">
-                  <c:v/>
-                </c:pt>
-                <c:pt idx="23">
-                  <c:v/>
-                </c:pt>
-                <c:pt idx="24">
-                  <c:v/>
-                </c:pt>
-                <c:pt idx="25">
-                  <c:v/>
-                </c:pt>
-                <c:pt idx="26">
-                  <c:v/>
-                </c:pt>
-                <c:pt idx="27">
-                  <c:v/>
-                </c:pt>
-                <c:pt idx="28">
-                  <c:v/>
-                </c:pt>
-                <c:pt idx="29">
-                  <c:v/>
-                </c:pt>
-                <c:pt idx="30">
-                  <c:v/>
-                </c:pt>
-                <c:pt idx="31">
-                  <c:v/>
-                </c:pt>
-                <c:pt idx="32">
-                  <c:v/>
-                </c:pt>
-                <c:pt idx="33">
-                  <c:v/>
-                </c:pt>
-                <c:pt idx="34">
-                  <c:v/>
-                </c:pt>
-                <c:pt idx="35">
-                  <c:v/>
-                </c:pt>
-                <c:pt idx="36">
-                  <c:v/>
-                </c:pt>
-                <c:pt idx="37">
-                  <c:v/>
-                </c:pt>
-                <c:pt idx="38">
-                  <c:v/>
-                </c:pt>
-                <c:pt idx="39">
-                  <c:v/>
-                </c:pt>
-                <c:pt idx="40">
-                  <c:v/>
-                </c:pt>
-                <c:pt idx="41">
-                  <c:v/>
-                </c:pt>
-                <c:pt idx="42">
-                  <c:v/>
-                </c:pt>
-                <c:pt idx="43">
-                  <c:v/>
-                </c:pt>
-                <c:pt idx="44">
-                  <c:v/>
-                </c:pt>
-                <c:pt idx="45">
-                  <c:v/>
-                </c:pt>
-                <c:pt idx="46">
-                  <c:v/>
-                </c:pt>
-                <c:pt idx="47">
-                  <c:v/>
-                </c:pt>
-                <c:pt idx="48">
-                  <c:v/>
-                </c:pt>
-                <c:pt idx="49">
-                  <c:v/>
-                </c:pt>
-                <c:pt idx="50">
-                  <c:v/>
-                </c:pt>
-                <c:pt idx="51">
-                  <c:v/>
-                </c:pt>
-                <c:pt idx="52">
-                  <c:v/>
-                </c:pt>
-                <c:pt idx="53">
-                  <c:v/>
-                </c:pt>
-                <c:pt idx="54">
-                  <c:v/>
-                </c:pt>
-                <c:pt idx="55">
-                  <c:v/>
-                </c:pt>
-                <c:pt idx="56">
-                  <c:v/>
-                </c:pt>
-                <c:pt idx="57">
-                  <c:v/>
-                </c:pt>
-                <c:pt idx="58">
-                  <c:v/>
-                </c:pt>
-                <c:pt idx="59">
-                  <c:v/>
-                </c:pt>
-                <c:pt idx="60">
-                  <c:v/>
-                </c:pt>
-                <c:pt idx="61">
-                  <c:v/>
-                </c:pt>
-                <c:pt idx="62">
-                  <c:v/>
-                </c:pt>
-                <c:pt idx="63">
-                  <c:v/>
-                </c:pt>
-                <c:pt idx="64">
-                  <c:v/>
-                </c:pt>
-                <c:pt idx="65">
-                  <c:v/>
-                </c:pt>
-                <c:pt idx="66">
-                  <c:v/>
-                </c:pt>
-                <c:pt idx="67">
-                  <c:v/>
-                </c:pt>
-                <c:pt idx="68">
-                  <c:v/>
-                </c:pt>
                 <c:pt idx="69">
                   <c:v>2004</c:v>
                 </c:pt>
-                <c:pt idx="70">
-                  <c:v/>
-                </c:pt>
-                <c:pt idx="71">
-                  <c:v/>
-                </c:pt>
-                <c:pt idx="72">
-                  <c:v/>
-                </c:pt>
-                <c:pt idx="73">
-                  <c:v/>
-                </c:pt>
-                <c:pt idx="74">
-                  <c:v/>
-                </c:pt>
-                <c:pt idx="75">
-                  <c:v/>
-                </c:pt>
-                <c:pt idx="76">
-                  <c:v/>
-                </c:pt>
-                <c:pt idx="77">
-                  <c:v/>
-                </c:pt>
-                <c:pt idx="78">
-                  <c:v/>
-                </c:pt>
-                <c:pt idx="79">
-                  <c:v/>
-                </c:pt>
-                <c:pt idx="80">
-                  <c:v/>
-                </c:pt>
-                <c:pt idx="81">
-                  <c:v/>
-                </c:pt>
-                <c:pt idx="82">
-                  <c:v/>
-                </c:pt>
-                <c:pt idx="83">
-                  <c:v/>
-                </c:pt>
-                <c:pt idx="84">
-                  <c:v/>
-                </c:pt>
-                <c:pt idx="85">
-                  <c:v/>
-                </c:pt>
-                <c:pt idx="86">
-                  <c:v/>
-                </c:pt>
-                <c:pt idx="87">
-                  <c:v/>
-                </c:pt>
-                <c:pt idx="88">
-                  <c:v/>
-                </c:pt>
-                <c:pt idx="89">
-                  <c:v/>
-                </c:pt>
-                <c:pt idx="90">
-                  <c:v/>
-                </c:pt>
-                <c:pt idx="91">
-                  <c:v/>
-                </c:pt>
-                <c:pt idx="92">
-                  <c:v/>
-                </c:pt>
-                <c:pt idx="93">
-                  <c:v/>
-                </c:pt>
-                <c:pt idx="94">
-                  <c:v/>
-                </c:pt>
-                <c:pt idx="95">
-                  <c:v/>
-                </c:pt>
-                <c:pt idx="96">
-                  <c:v/>
-                </c:pt>
-                <c:pt idx="97">
-                  <c:v/>
-                </c:pt>
-                <c:pt idx="98">
-                  <c:v/>
-                </c:pt>
-                <c:pt idx="99">
-                  <c:v/>
-                </c:pt>
-                <c:pt idx="100">
-                  <c:v/>
-                </c:pt>
-                <c:pt idx="101">
-                  <c:v/>
-                </c:pt>
-                <c:pt idx="102">
-                  <c:v/>
-                </c:pt>
-                <c:pt idx="103">
-                  <c:v/>
-                </c:pt>
-                <c:pt idx="104">
-                  <c:v/>
-                </c:pt>
-                <c:pt idx="105">
-                  <c:v/>
-                </c:pt>
-                <c:pt idx="106">
-                  <c:v/>
-                </c:pt>
-                <c:pt idx="107">
-                  <c:v/>
-                </c:pt>
-                <c:pt idx="108">
-                  <c:v/>
-                </c:pt>
-                <c:pt idx="109">
-                  <c:v/>
-                </c:pt>
-                <c:pt idx="110">
-                  <c:v/>
-                </c:pt>
-                <c:pt idx="111">
-                  <c:v/>
-                </c:pt>
-                <c:pt idx="112">
-                  <c:v/>
-                </c:pt>
-                <c:pt idx="113">
-                  <c:v/>
-                </c:pt>
-                <c:pt idx="114">
-                  <c:v/>
-                </c:pt>
-                <c:pt idx="115">
-                  <c:v/>
-                </c:pt>
-                <c:pt idx="116">
-                  <c:v/>
-                </c:pt>
                 <c:pt idx="117">
                   <c:v>2008</c:v>
                 </c:pt>
-                <c:pt idx="118">
-                  <c:v/>
-                </c:pt>
-                <c:pt idx="119">
-                  <c:v/>
-                </c:pt>
-                <c:pt idx="120">
-                  <c:v/>
-                </c:pt>
-                <c:pt idx="121">
-                  <c:v/>
-                </c:pt>
-                <c:pt idx="122">
-                  <c:v/>
-                </c:pt>
-                <c:pt idx="123">
-                  <c:v/>
-                </c:pt>
-                <c:pt idx="124">
-                  <c:v/>
-                </c:pt>
-                <c:pt idx="125">
-                  <c:v/>
-                </c:pt>
-                <c:pt idx="126">
-                  <c:v/>
-                </c:pt>
-                <c:pt idx="127">
-                  <c:v/>
-                </c:pt>
-                <c:pt idx="128">
-                  <c:v/>
-                </c:pt>
-                <c:pt idx="129">
-                  <c:v/>
-                </c:pt>
-                <c:pt idx="130">
-                  <c:v/>
-                </c:pt>
-                <c:pt idx="131">
-                  <c:v/>
-                </c:pt>
-                <c:pt idx="132">
-                  <c:v/>
-                </c:pt>
-                <c:pt idx="133">
-                  <c:v/>
-                </c:pt>
-                <c:pt idx="134">
-                  <c:v/>
-                </c:pt>
-                <c:pt idx="135">
-                  <c:v/>
-                </c:pt>
-                <c:pt idx="136">
-                  <c:v/>
-                </c:pt>
-                <c:pt idx="137">
-                  <c:v/>
-                </c:pt>
-                <c:pt idx="138">
-                  <c:v/>
-                </c:pt>
-                <c:pt idx="139">
-                  <c:v/>
-                </c:pt>
-                <c:pt idx="140">
-                  <c:v/>
-                </c:pt>
-                <c:pt idx="141">
-                  <c:v/>
-                </c:pt>
-                <c:pt idx="142">
-                  <c:v/>
-                </c:pt>
-                <c:pt idx="143">
-                  <c:v/>
-                </c:pt>
-                <c:pt idx="144">
-                  <c:v/>
-                </c:pt>
-                <c:pt idx="145">
-                  <c:v/>
-                </c:pt>
-                <c:pt idx="146">
-                  <c:v/>
-                </c:pt>
-                <c:pt idx="147">
-                  <c:v/>
-                </c:pt>
-                <c:pt idx="148">
-                  <c:v/>
-                </c:pt>
-                <c:pt idx="149">
-                  <c:v/>
-                </c:pt>
-                <c:pt idx="150">
-                  <c:v/>
-                </c:pt>
-                <c:pt idx="151">
-                  <c:v/>
-                </c:pt>
-                <c:pt idx="152">
-                  <c:v/>
-                </c:pt>
-                <c:pt idx="153">
-                  <c:v/>
-                </c:pt>
-                <c:pt idx="154">
-                  <c:v/>
-                </c:pt>
-                <c:pt idx="155">
-                  <c:v/>
-                </c:pt>
-                <c:pt idx="156">
-                  <c:v/>
-                </c:pt>
-                <c:pt idx="157">
-                  <c:v/>
-                </c:pt>
-                <c:pt idx="158">
-                  <c:v/>
-                </c:pt>
-                <c:pt idx="159">
-                  <c:v/>
-                </c:pt>
-                <c:pt idx="160">
-                  <c:v/>
-                </c:pt>
-                <c:pt idx="161">
-                  <c:v/>
-                </c:pt>
-                <c:pt idx="162">
-                  <c:v/>
-                </c:pt>
-                <c:pt idx="163">
-                  <c:v/>
-                </c:pt>
-                <c:pt idx="164">
-                  <c:v/>
-                </c:pt>
                 <c:pt idx="165">
                   <c:v>2012</c:v>
                 </c:pt>
-                <c:pt idx="166">
-                  <c:v/>
-                </c:pt>
-                <c:pt idx="167">
-                  <c:v/>
-                </c:pt>
-                <c:pt idx="168">
-                  <c:v/>
-                </c:pt>
-                <c:pt idx="169">
-                  <c:v/>
-                </c:pt>
-                <c:pt idx="170">
-                  <c:v/>
-                </c:pt>
-                <c:pt idx="171">
-                  <c:v/>
-                </c:pt>
-                <c:pt idx="172">
-                  <c:v/>
-                </c:pt>
-                <c:pt idx="173">
-                  <c:v/>
-                </c:pt>
-                <c:pt idx="174">
-                  <c:v/>
-                </c:pt>
-                <c:pt idx="175">
-                  <c:v/>
-                </c:pt>
-                <c:pt idx="176">
-                  <c:v/>
-                </c:pt>
-                <c:pt idx="177">
-                  <c:v/>
-                </c:pt>
-                <c:pt idx="178">
-                  <c:v/>
-                </c:pt>
-                <c:pt idx="179">
-                  <c:v/>
-                </c:pt>
-                <c:pt idx="180">
-                  <c:v/>
-                </c:pt>
-                <c:pt idx="181">
-                  <c:v/>
-                </c:pt>
-                <c:pt idx="182">
-                  <c:v/>
-                </c:pt>
-                <c:pt idx="183">
-                  <c:v/>
-                </c:pt>
-                <c:pt idx="184">
-                  <c:v/>
-                </c:pt>
-                <c:pt idx="185">
-                  <c:v/>
-                </c:pt>
-                <c:pt idx="186">
-                  <c:v/>
-                </c:pt>
-                <c:pt idx="187">
-                  <c:v/>
-                </c:pt>
-                <c:pt idx="188">
-                  <c:v/>
-                </c:pt>
-                <c:pt idx="189">
-                  <c:v/>
-                </c:pt>
-                <c:pt idx="190">
-                  <c:v/>
-                </c:pt>
-                <c:pt idx="191">
-                  <c:v/>
-                </c:pt>
-                <c:pt idx="192">
-                  <c:v/>
-                </c:pt>
-                <c:pt idx="193">
-                  <c:v/>
-                </c:pt>
-                <c:pt idx="194">
-                  <c:v/>
-                </c:pt>
-                <c:pt idx="195">
-                  <c:v/>
-                </c:pt>
-                <c:pt idx="196">
-                  <c:v/>
-                </c:pt>
-                <c:pt idx="197">
-                  <c:v/>
-                </c:pt>
-                <c:pt idx="198">
-                  <c:v/>
-                </c:pt>
-                <c:pt idx="199">
-                  <c:v/>
-                </c:pt>
-                <c:pt idx="200">
-                  <c:v/>
-                </c:pt>
-                <c:pt idx="201">
-                  <c:v/>
-                </c:pt>
-                <c:pt idx="202">
-                  <c:v/>
-                </c:pt>
-                <c:pt idx="203">
-                  <c:v/>
-                </c:pt>
-                <c:pt idx="204">
-                  <c:v/>
-                </c:pt>
-                <c:pt idx="205">
-                  <c:v/>
-                </c:pt>
-                <c:pt idx="206">
-                  <c:v/>
-                </c:pt>
-                <c:pt idx="207">
-                  <c:v/>
-                </c:pt>
-                <c:pt idx="208">
-                  <c:v/>
-                </c:pt>
-                <c:pt idx="209">
-                  <c:v/>
-                </c:pt>
-                <c:pt idx="210">
-                  <c:v/>
-                </c:pt>
-                <c:pt idx="211">
-                  <c:v/>
-                </c:pt>
-                <c:pt idx="212">
-                  <c:v/>
-                </c:pt>
                 <c:pt idx="213">
                   <c:v>2016</c:v>
                 </c:pt>
-                <c:pt idx="214">
-                  <c:v/>
-                </c:pt>
-                <c:pt idx="215">
-                  <c:v/>
-                </c:pt>
-                <c:pt idx="216">
-                  <c:v/>
-                </c:pt>
-                <c:pt idx="217">
-                  <c:v/>
-                </c:pt>
-                <c:pt idx="218">
-                  <c:v/>
-                </c:pt>
-                <c:pt idx="219">
-                  <c:v/>
-                </c:pt>
-                <c:pt idx="220">
-                  <c:v/>
-                </c:pt>
-                <c:pt idx="221">
-                  <c:v/>
-                </c:pt>
-                <c:pt idx="222">
-                  <c:v/>
-                </c:pt>
-                <c:pt idx="223">
-                  <c:v/>
-                </c:pt>
-                <c:pt idx="224">
-                  <c:v/>
-                </c:pt>
-                <c:pt idx="225">
-                  <c:v/>
-                </c:pt>
-                <c:pt idx="226">
-                  <c:v/>
-                </c:pt>
-                <c:pt idx="227">
-                  <c:v/>
-                </c:pt>
-                <c:pt idx="228">
-                  <c:v/>
-                </c:pt>
-                <c:pt idx="229">
-                  <c:v/>
-                </c:pt>
-                <c:pt idx="230">
-                  <c:v/>
-                </c:pt>
-                <c:pt idx="231">
-                  <c:v/>
-                </c:pt>
-                <c:pt idx="232">
-                  <c:v/>
-                </c:pt>
-                <c:pt idx="233">
-                  <c:v/>
-                </c:pt>
-                <c:pt idx="234">
-                  <c:v/>
-                </c:pt>
-                <c:pt idx="235">
-                  <c:v/>
-                </c:pt>
-                <c:pt idx="236">
-                  <c:v/>
-                </c:pt>
-                <c:pt idx="237">
-                  <c:v/>
-                </c:pt>
-                <c:pt idx="238">
-                  <c:v/>
-                </c:pt>
-                <c:pt idx="239">
-                  <c:v/>
-                </c:pt>
-                <c:pt idx="240">
-                  <c:v/>
-                </c:pt>
-                <c:pt idx="241">
-                  <c:v/>
-                </c:pt>
-                <c:pt idx="242">
-                  <c:v/>
-                </c:pt>
-                <c:pt idx="243">
-                  <c:v/>
-                </c:pt>
-                <c:pt idx="244">
-                  <c:v/>
-                </c:pt>
-                <c:pt idx="245">
-                  <c:v/>
-                </c:pt>
-                <c:pt idx="246">
-                  <c:v/>
-                </c:pt>
-                <c:pt idx="247">
-                  <c:v/>
-                </c:pt>
-                <c:pt idx="248">
-                  <c:v/>
-                </c:pt>
-                <c:pt idx="249">
-                  <c:v/>
-                </c:pt>
-                <c:pt idx="250">
-                  <c:v/>
-                </c:pt>
-                <c:pt idx="251">
-                  <c:v/>
-                </c:pt>
-                <c:pt idx="252">
-                  <c:v/>
-                </c:pt>
-                <c:pt idx="253">
-                  <c:v/>
-                </c:pt>
-                <c:pt idx="254">
-                  <c:v/>
-                </c:pt>
-                <c:pt idx="255">
-                  <c:v/>
-                </c:pt>
-                <c:pt idx="256">
-                  <c:v/>
-                </c:pt>
-                <c:pt idx="257">
-                  <c:v/>
-                </c:pt>
-                <c:pt idx="258">
-                  <c:v/>
-                </c:pt>
-                <c:pt idx="259">
-                  <c:v/>
-                </c:pt>
-                <c:pt idx="260">
-                  <c:v/>
-                </c:pt>
                 <c:pt idx="261">
                   <c:v>2020</c:v>
                 </c:pt>
-                <c:pt idx="262">
-                  <c:v/>
-                </c:pt>
-                <c:pt idx="263">
-                  <c:v/>
-                </c:pt>
-                <c:pt idx="264">
-                  <c:v/>
-                </c:pt>
-                <c:pt idx="265">
-                  <c:v/>
-                </c:pt>
-                <c:pt idx="266">
-                  <c:v/>
-                </c:pt>
-                <c:pt idx="267">
-                  <c:v/>
-                </c:pt>
-                <c:pt idx="268">
-                  <c:v/>
-                </c:pt>
-                <c:pt idx="269">
-                  <c:v/>
-                </c:pt>
-                <c:pt idx="270">
-                  <c:v/>
-                </c:pt>
-                <c:pt idx="271">
-                  <c:v/>
-                </c:pt>
-                <c:pt idx="272">
-                  <c:v/>
-                </c:pt>
-                <c:pt idx="273">
-                  <c:v/>
-                </c:pt>
-                <c:pt idx="274">
-                  <c:v/>
-                </c:pt>
-                <c:pt idx="275">
-                  <c:v/>
-                </c:pt>
-                <c:pt idx="276">
-                  <c:v/>
-                </c:pt>
-                <c:pt idx="277">
-                  <c:v/>
-                </c:pt>
-                <c:pt idx="278">
-                  <c:v/>
-                </c:pt>
-                <c:pt idx="279">
-                  <c:v/>
-                </c:pt>
-                <c:pt idx="280">
-                  <c:v/>
-                </c:pt>
-                <c:pt idx="281">
-                  <c:v/>
-                </c:pt>
-                <c:pt idx="282">
-                  <c:v/>
-                </c:pt>
-                <c:pt idx="283">
-                  <c:v/>
-                </c:pt>
-                <c:pt idx="284">
-                  <c:v/>
-                </c:pt>
-                <c:pt idx="285">
-                  <c:v/>
-                </c:pt>
-                <c:pt idx="286">
-                  <c:v/>
-                </c:pt>
-                <c:pt idx="287">
-                  <c:v/>
-                </c:pt>
-                <c:pt idx="288">
-                  <c:v/>
-                </c:pt>
-                <c:pt idx="289">
-                  <c:v/>
-                </c:pt>
-                <c:pt idx="290">
-                  <c:v/>
-                </c:pt>
-                <c:pt idx="291">
-                  <c:v/>
-                </c:pt>
-                <c:pt idx="292">
-                  <c:v/>
-                </c:pt>
-                <c:pt idx="293">
-                  <c:v/>
-                </c:pt>
-                <c:pt idx="294">
-                  <c:v/>
-                </c:pt>
-                <c:pt idx="295">
-                  <c:v/>
-                </c:pt>
-                <c:pt idx="296">
-                  <c:v/>
-                </c:pt>
-                <c:pt idx="297">
-                  <c:v/>
-                </c:pt>
-                <c:pt idx="298">
-                  <c:v/>
-                </c:pt>
-                <c:pt idx="299">
-                  <c:v/>
-                </c:pt>
-                <c:pt idx="300">
-                  <c:v/>
-                </c:pt>
-                <c:pt idx="301">
-                  <c:v/>
-                </c:pt>
-                <c:pt idx="302">
-                  <c:v/>
-                </c:pt>
-                <c:pt idx="303">
-                  <c:v/>
-                </c:pt>
-                <c:pt idx="304">
-                  <c:v/>
-                </c:pt>
-                <c:pt idx="305">
-                  <c:v/>
-                </c:pt>
-                <c:pt idx="306">
-                  <c:v/>
-                </c:pt>
-                <c:pt idx="307">
-                  <c:v/>
-                </c:pt>
-                <c:pt idx="308">
-                  <c:v/>
-                </c:pt>
                 <c:pt idx="309">
                   <c:v>2024</c:v>
-                </c:pt>
-                <c:pt idx="310">
-                  <c:v/>
-                </c:pt>
-                <c:pt idx="311">
-                  <c:v/>
-                </c:pt>
-                <c:pt idx="312">
-                  <c:v/>
-                </c:pt>
-                <c:pt idx="313">
-                  <c:v/>
-                </c:pt>
-                <c:pt idx="314">
-                  <c:v/>
-                </c:pt>
-                <c:pt idx="315">
-                  <c:v/>
-                </c:pt>
-                <c:pt idx="316">
-                  <c:v/>
-                </c:pt>
-                <c:pt idx="317">
-                  <c:v/>
-                </c:pt>
-                <c:pt idx="318">
-                  <c:v/>
-                </c:pt>
-                <c:pt idx="319">
-                  <c:v/>
-                </c:pt>
-                <c:pt idx="320">
-                  <c:v/>
-                </c:pt>
-                <c:pt idx="321">
-                  <c:v/>
-                </c:pt>
-                <c:pt idx="322">
-                  <c:v/>
-                </c:pt>
-                <c:pt idx="323">
-                  <c:v/>
-                </c:pt>
-                <c:pt idx="324">
-                  <c:v/>
-                </c:pt>
-                <c:pt idx="325">
-                  <c:v/>
-                </c:pt>
-                <c:pt idx="326">
-                  <c:v/>
-                </c:pt>
-                <c:pt idx="327">
-                  <c:v/>
-                </c:pt>
-                <c:pt idx="328">
-                  <c:v/>
-                </c:pt>
-                <c:pt idx="329">
-                  <c:v/>
-                </c:pt>
-                <c:pt idx="330">
-                  <c:v/>
-                </c:pt>
-                <c:pt idx="331">
-                  <c:v/>
-                </c:pt>
-                <c:pt idx="332">
-                  <c:v/>
-                </c:pt>
-                <c:pt idx="333">
-                  <c:v/>
-                </c:pt>
-                <c:pt idx="334">
-                  <c:v/>
-                </c:pt>
-                <c:pt idx="335">
-                  <c:v/>
-                </c:pt>
-                <c:pt idx="336">
-                  <c:v/>
-                </c:pt>
-                <c:pt idx="337">
-                  <c:v/>
-                </c:pt>
-                <c:pt idx="338">
-                  <c:v/>
-                </c:pt>
-                <c:pt idx="339">
-                  <c:v/>
                 </c:pt>
               </c:strCache>
             </c:strRef>
@@ -1175,22 +196,22 @@
                 <c:formatCode>General</c:formatCode>
                 <c:ptCount val="340"/>
                 <c:pt idx="17">
-                  <c:v>2.643</c:v>
+                  <c:v>2.6429999999999998</c:v>
                 </c:pt>
                 <c:pt idx="18">
-                  <c:v>2.666</c:v>
+                  <c:v>2.6659999999999999</c:v>
                 </c:pt>
                 <c:pt idx="19">
                   <c:v>2.66</c:v>
                 </c:pt>
                 <c:pt idx="20">
-                  <c:v>2.481</c:v>
+                  <c:v>2.4809999999999999</c:v>
                 </c:pt>
                 <c:pt idx="21">
-                  <c:v>2.389</c:v>
+                  <c:v>2.3889999999999998</c:v>
                 </c:pt>
                 <c:pt idx="22">
-                  <c:v>2.421</c:v>
+                  <c:v>2.4209999999999998</c:v>
                 </c:pt>
                 <c:pt idx="23">
                   <c:v>2.25</c:v>
@@ -1199,16 +220,16 @@
                   <c:v>2.194</c:v>
                 </c:pt>
                 <c:pt idx="25">
-                  <c:v>2.199</c:v>
+                  <c:v>2.1989999999999998</c:v>
                 </c:pt>
                 <c:pt idx="26">
-                  <c:v>2.241</c:v>
+                  <c:v>2.2410000000000001</c:v>
                 </c:pt>
                 <c:pt idx="27">
-                  <c:v>2.314</c:v>
+                  <c:v>2.3140000000000001</c:v>
                 </c:pt>
                 <c:pt idx="28">
-                  <c:v>2.506</c:v>
+                  <c:v>2.5059999999999998</c:v>
                 </c:pt>
                 <c:pt idx="29">
                   <c:v>2.641</c:v>
@@ -1220,37 +241,37 @@
                   <c:v>2.536</c:v>
                 </c:pt>
                 <c:pt idx="32">
-                  <c:v>2.622</c:v>
+                  <c:v>2.6219999999999999</c:v>
                 </c:pt>
                 <c:pt idx="33">
-                  <c:v>2.314</c:v>
+                  <c:v>2.3140000000000001</c:v>
                 </c:pt>
                 <c:pt idx="34">
-                  <c:v>2.132</c:v>
+                  <c:v>2.1320000000000001</c:v>
                 </c:pt>
                 <c:pt idx="35">
-                  <c:v>2.092</c:v>
+                  <c:v>2.0920000000000001</c:v>
                 </c:pt>
                 <c:pt idx="36">
-                  <c:v>2.362</c:v>
+                  <c:v>2.3620000000000001</c:v>
                 </c:pt>
                 <c:pt idx="37">
                   <c:v>2.222</c:v>
                 </c:pt>
                 <c:pt idx="38">
-                  <c:v>2.189</c:v>
+                  <c:v>2.1890000000000001</c:v>
                 </c:pt>
                 <c:pt idx="39">
-                  <c:v>2.401</c:v>
+                  <c:v>2.4009999999999998</c:v>
                 </c:pt>
                 <c:pt idx="40">
-                  <c:v>2.366</c:v>
+                  <c:v>2.3660000000000001</c:v>
                 </c:pt>
                 <c:pt idx="41">
                   <c:v>2.395</c:v>
                 </c:pt>
                 <c:pt idx="42">
-                  <c:v>2.473</c:v>
+                  <c:v>2.4729999999999999</c:v>
                 </c:pt>
                 <c:pt idx="43">
                   <c:v>2.41</c:v>
@@ -1259,46 +280,46 @@
                   <c:v>2.484</c:v>
                 </c:pt>
                 <c:pt idx="45">
-                  <c:v>2.614</c:v>
+                  <c:v>2.6139999999999999</c:v>
                 </c:pt>
                 <c:pt idx="46">
-                  <c:v>2.566</c:v>
+                  <c:v>2.5659999999999998</c:v>
                 </c:pt>
                 <c:pt idx="47">
-                  <c:v>2.445</c:v>
+                  <c:v>2.4449999999999998</c:v>
                 </c:pt>
                 <c:pt idx="48">
-                  <c:v>2.381</c:v>
+                  <c:v>2.3809999999999998</c:v>
                 </c:pt>
                 <c:pt idx="49">
-                  <c:v>2.317</c:v>
+                  <c:v>2.3170000000000002</c:v>
                 </c:pt>
                 <c:pt idx="50">
-                  <c:v>2.205</c:v>
+                  <c:v>2.2050000000000001</c:v>
                 </c:pt>
                 <c:pt idx="51">
                   <c:v>2.169</c:v>
                 </c:pt>
                 <c:pt idx="52">
-                  <c:v>2.045</c:v>
+                  <c:v>2.0449999999999999</c:v>
                 </c:pt>
                 <c:pt idx="53">
-                  <c:v>2.011</c:v>
+                  <c:v>2.0110000000000001</c:v>
                 </c:pt>
                 <c:pt idx="54">
-                  <c:v>1.902</c:v>
+                  <c:v>1.9019999999999999</c:v>
                 </c:pt>
                 <c:pt idx="55">
-                  <c:v>1.815</c:v>
+                  <c:v>1.8149999999999999</c:v>
                 </c:pt>
                 <c:pt idx="56">
                   <c:v>1.738</c:v>
                 </c:pt>
                 <c:pt idx="57">
-                  <c:v>1.471</c:v>
+                  <c:v>1.4710000000000001</c:v>
                 </c:pt>
                 <c:pt idx="58">
-                  <c:v>1.433</c:v>
+                  <c:v>1.4330000000000001</c:v>
                 </c:pt>
                 <c:pt idx="59">
                   <c:v>1.268</c:v>
@@ -1313,163 +334,163 @@
                   <c:v>1.365</c:v>
                 </c:pt>
                 <c:pt idx="63">
-                  <c:v>1.721</c:v>
+                  <c:v>1.7210000000000001</c:v>
                 </c:pt>
                 <c:pt idx="64">
-                  <c:v>2.015</c:v>
+                  <c:v>2.0150000000000001</c:v>
                 </c:pt>
                 <c:pt idx="65">
-                  <c:v>2.019</c:v>
+                  <c:v>2.0190000000000001</c:v>
                 </c:pt>
                 <c:pt idx="66">
                   <c:v>2.218</c:v>
                 </c:pt>
                 <c:pt idx="67">
-                  <c:v>2.034</c:v>
+                  <c:v>2.0339999999999998</c:v>
                 </c:pt>
                 <c:pt idx="68">
-                  <c:v>2.088</c:v>
+                  <c:v>2.0880000000000001</c:v>
                 </c:pt>
                 <c:pt idx="69">
                   <c:v>2.097</c:v>
                 </c:pt>
                 <c:pt idx="70">
-                  <c:v>2.124</c:v>
+                  <c:v>2.1240000000000001</c:v>
                 </c:pt>
                 <c:pt idx="71">
-                  <c:v>2.245</c:v>
+                  <c:v>2.2450000000000001</c:v>
                 </c:pt>
                 <c:pt idx="72">
                   <c:v>2.411</c:v>
                 </c:pt>
                 <c:pt idx="73">
-                  <c:v>2.385</c:v>
+                  <c:v>2.3849999999999998</c:v>
                 </c:pt>
                 <c:pt idx="74">
-                  <c:v>2.626</c:v>
+                  <c:v>2.6259999999999999</c:v>
                 </c:pt>
                 <c:pt idx="75">
-                  <c:v>2.803</c:v>
+                  <c:v>2.8029999999999999</c:v>
                 </c:pt>
                 <c:pt idx="76">
-                  <c:v>2.507</c:v>
+                  <c:v>2.5070000000000001</c:v>
                 </c:pt>
                 <c:pt idx="77">
-                  <c:v>2.409</c:v>
+                  <c:v>2.4089999999999998</c:v>
                 </c:pt>
                 <c:pt idx="78">
-                  <c:v>2.495</c:v>
+                  <c:v>2.4950000000000001</c:v>
                 </c:pt>
                 <c:pt idx="79">
                   <c:v>2.46</c:v>
                 </c:pt>
                 <c:pt idx="80">
-                  <c:v>2.421</c:v>
+                  <c:v>2.4209999999999998</c:v>
                 </c:pt>
                 <c:pt idx="81">
                   <c:v>2.363</c:v>
                 </c:pt>
                 <c:pt idx="82">
-                  <c:v>2.449</c:v>
+                  <c:v>2.4489999999999998</c:v>
                 </c:pt>
                 <c:pt idx="83">
-                  <c:v>2.287</c:v>
+                  <c:v>2.2869999999999999</c:v>
                 </c:pt>
                 <c:pt idx="84">
                   <c:v>2.254</c:v>
                 </c:pt>
                 <c:pt idx="85">
-                  <c:v>2.295</c:v>
+                  <c:v>2.2949999999999999</c:v>
                 </c:pt>
                 <c:pt idx="86">
                   <c:v>2.218</c:v>
                 </c:pt>
                 <c:pt idx="87">
-                  <c:v>2.393</c:v>
+                  <c:v>2.3929999999999998</c:v>
                 </c:pt>
                 <c:pt idx="88">
                   <c:v>2.387</c:v>
                 </c:pt>
                 <c:pt idx="89">
-                  <c:v>2.408</c:v>
+                  <c:v>2.4079999999999999</c:v>
                 </c:pt>
                 <c:pt idx="90">
                   <c:v>2.42</c:v>
                 </c:pt>
                 <c:pt idx="91">
-                  <c:v>2.388</c:v>
+                  <c:v>2.3879999999999999</c:v>
                 </c:pt>
                 <c:pt idx="92">
                   <c:v>2.306</c:v>
                 </c:pt>
                 <c:pt idx="93">
-                  <c:v>2.381</c:v>
+                  <c:v>2.3809999999999998</c:v>
                 </c:pt>
                 <c:pt idx="94">
-                  <c:v>2.237</c:v>
+                  <c:v>2.2370000000000001</c:v>
                 </c:pt>
                 <c:pt idx="95">
-                  <c:v>2.247</c:v>
+                  <c:v>2.2469999999999999</c:v>
                 </c:pt>
                 <c:pt idx="96">
                   <c:v>2.452</c:v>
                 </c:pt>
                 <c:pt idx="97">
-                  <c:v>2.381</c:v>
+                  <c:v>2.3809999999999998</c:v>
                 </c:pt>
                 <c:pt idx="98">
                   <c:v>2.52</c:v>
                 </c:pt>
                 <c:pt idx="99">
-                  <c:v>2.565</c:v>
+                  <c:v>2.5649999999999999</c:v>
                 </c:pt>
                 <c:pt idx="100">
-                  <c:v>2.402</c:v>
+                  <c:v>2.4020000000000001</c:v>
                 </c:pt>
                 <c:pt idx="101">
-                  <c:v>2.445</c:v>
+                  <c:v>2.4449999999999998</c:v>
                 </c:pt>
                 <c:pt idx="102">
                   <c:v>2.444</c:v>
                 </c:pt>
                 <c:pt idx="103">
-                  <c:v>2.349</c:v>
+                  <c:v>2.3490000000000002</c:v>
                 </c:pt>
                 <c:pt idx="104">
-                  <c:v>2.299</c:v>
+                  <c:v>2.2989999999999999</c:v>
                 </c:pt>
                 <c:pt idx="105">
                   <c:v>2.391</c:v>
                 </c:pt>
                 <c:pt idx="106">
-                  <c:v>2.284</c:v>
+                  <c:v>2.2839999999999998</c:v>
                 </c:pt>
                 <c:pt idx="107">
-                  <c:v>2.338</c:v>
+                  <c:v>2.3380000000000001</c:v>
                 </c:pt>
                 <c:pt idx="108">
                   <c:v>2.298</c:v>
                 </c:pt>
                 <c:pt idx="109">
-                  <c:v>2.348</c:v>
+                  <c:v>2.3479999999999999</c:v>
                 </c:pt>
                 <c:pt idx="110">
-                  <c:v>2.463</c:v>
+                  <c:v>2.4630000000000001</c:v>
                 </c:pt>
                 <c:pt idx="111">
-                  <c:v>2.445</c:v>
+                  <c:v>2.4449999999999998</c:v>
                 </c:pt>
                 <c:pt idx="112">
-                  <c:v>2.361</c:v>
+                  <c:v>2.3610000000000002</c:v>
                 </c:pt>
                 <c:pt idx="113">
-                  <c:v>2.433</c:v>
+                  <c:v>2.4329999999999998</c:v>
                 </c:pt>
                 <c:pt idx="114">
-                  <c:v>2.449</c:v>
+                  <c:v>2.4489999999999998</c:v>
                 </c:pt>
                 <c:pt idx="115">
-                  <c:v>2.332</c:v>
+                  <c:v>2.3319999999999999</c:v>
                 </c:pt>
                 <c:pt idx="116">
                   <c:v>2.36</c:v>
@@ -1478,43 +499,43 @@
                   <c:v>2.375</c:v>
                 </c:pt>
                 <c:pt idx="118">
-                  <c:v>2.291</c:v>
+                  <c:v>2.2909999999999999</c:v>
                 </c:pt>
                 <c:pt idx="119">
                   <c:v>2.399</c:v>
                 </c:pt>
                 <c:pt idx="120">
-                  <c:v>2.462</c:v>
+                  <c:v>2.4620000000000002</c:v>
                 </c:pt>
                 <c:pt idx="121">
                   <c:v>2.488</c:v>
                 </c:pt>
                 <c:pt idx="122">
-                  <c:v>2.406</c:v>
+                  <c:v>2.4060000000000001</c:v>
                 </c:pt>
                 <c:pt idx="123">
-                  <c:v>2.428</c:v>
+                  <c:v>2.4279999999999999</c:v>
                 </c:pt>
                 <c:pt idx="124">
-                  <c:v>2.321</c:v>
+                  <c:v>2.3210000000000002</c:v>
                 </c:pt>
                 <c:pt idx="125">
-                  <c:v>2.318</c:v>
+                  <c:v>2.3180000000000001</c:v>
                 </c:pt>
                 <c:pt idx="126">
-                  <c:v>2.251</c:v>
+                  <c:v>2.2509999999999999</c:v>
                 </c:pt>
                 <c:pt idx="127">
-                  <c:v>2.212</c:v>
+                  <c:v>2.2120000000000002</c:v>
                 </c:pt>
                 <c:pt idx="128">
                   <c:v>1.825</c:v>
                 </c:pt>
                 <c:pt idx="129">
-                  <c:v>2.005</c:v>
+                  <c:v>2.0049999999999999</c:v>
                 </c:pt>
                 <c:pt idx="130">
-                  <c:v>2.026</c:v>
+                  <c:v>2.0259999999999998</c:v>
                 </c:pt>
                 <c:pt idx="131">
                   <c:v>2.085</c:v>
@@ -1523,13 +544,13 @@
                   <c:v>2.17</c:v>
                 </c:pt>
                 <c:pt idx="133">
-                  <c:v>2.253</c:v>
+                  <c:v>2.2530000000000001</c:v>
                 </c:pt>
                 <c:pt idx="134">
-                  <c:v>2.197</c:v>
+                  <c:v>2.1970000000000001</c:v>
                 </c:pt>
                 <c:pt idx="135">
-                  <c:v>2.32</c:v>
+                  <c:v>2.3199999999999998</c:v>
                 </c:pt>
                 <c:pt idx="136">
                   <c:v>2.238</c:v>
@@ -1538,70 +559,70 @@
                   <c:v>2.214</c:v>
                 </c:pt>
                 <c:pt idx="138">
-                  <c:v>2.257</c:v>
+                  <c:v>2.2570000000000001</c:v>
                 </c:pt>
                 <c:pt idx="139">
-                  <c:v>2.163</c:v>
+                  <c:v>2.1629999999999998</c:v>
                 </c:pt>
                 <c:pt idx="140">
-                  <c:v>2.255</c:v>
+                  <c:v>2.2549999999999999</c:v>
                 </c:pt>
                 <c:pt idx="141">
                   <c:v>2.274</c:v>
                 </c:pt>
                 <c:pt idx="142">
-                  <c:v>2.28</c:v>
+                  <c:v>2.2799999999999998</c:v>
                 </c:pt>
                 <c:pt idx="143">
-                  <c:v>2.292</c:v>
+                  <c:v>2.2919999999999998</c:v>
                 </c:pt>
                 <c:pt idx="144">
                   <c:v>2.15</c:v>
                 </c:pt>
                 <c:pt idx="145">
-                  <c:v>2.116</c:v>
+                  <c:v>2.1160000000000001</c:v>
                 </c:pt>
                 <c:pt idx="146">
                   <c:v>1.931</c:v>
                 </c:pt>
                 <c:pt idx="147">
-                  <c:v>1.852</c:v>
+                  <c:v>1.8520000000000001</c:v>
                 </c:pt>
                 <c:pt idx="148">
-                  <c:v>1.767</c:v>
+                  <c:v>1.7669999999999999</c:v>
                 </c:pt>
                 <c:pt idx="149">
-                  <c:v>1.838</c:v>
+                  <c:v>1.8380000000000001</c:v>
                 </c:pt>
                 <c:pt idx="150">
-                  <c:v>1.979</c:v>
+                  <c:v>1.9790000000000001</c:v>
                 </c:pt>
                 <c:pt idx="151">
-                  <c:v>2.082</c:v>
+                  <c:v>2.0819999999999999</c:v>
                 </c:pt>
                 <c:pt idx="152">
                   <c:v>1.994</c:v>
                 </c:pt>
                 <c:pt idx="153">
-                  <c:v>2.123</c:v>
+                  <c:v>2.1230000000000002</c:v>
                 </c:pt>
                 <c:pt idx="154">
-                  <c:v>2.124</c:v>
+                  <c:v>2.1240000000000001</c:v>
                 </c:pt>
                 <c:pt idx="155">
-                  <c:v>2.179</c:v>
+                  <c:v>2.1789999999999998</c:v>
                 </c:pt>
                 <c:pt idx="156">
                   <c:v>2.141</c:v>
                 </c:pt>
                 <c:pt idx="157">
-                  <c:v>2.071</c:v>
+                  <c:v>2.0710000000000002</c:v>
                 </c:pt>
                 <c:pt idx="158">
-                  <c:v>2.035</c:v>
+                  <c:v>2.0350000000000001</c:v>
                 </c:pt>
                 <c:pt idx="159">
-                  <c:v>2.031</c:v>
+                  <c:v>2.0310000000000001</c:v>
                 </c:pt>
                 <c:pt idx="160">
                   <c:v>2.02</c:v>
@@ -1610,7 +631,7 @@
                   <c:v>1.925</c:v>
                 </c:pt>
                 <c:pt idx="162">
-                  <c:v>1.985</c:v>
+                  <c:v>1.9850000000000001</c:v>
                 </c:pt>
                 <c:pt idx="163">
                   <c:v>1.986</c:v>
@@ -1619,13 +640,13 @@
                   <c:v>1.921</c:v>
                 </c:pt>
                 <c:pt idx="165">
-                  <c:v>1.922</c:v>
+                  <c:v>1.9219999999999999</c:v>
                 </c:pt>
                 <c:pt idx="166">
                   <c:v>1.948</c:v>
                 </c:pt>
                 <c:pt idx="167">
-                  <c:v>1.938</c:v>
+                  <c:v>1.9379999999999999</c:v>
                 </c:pt>
                 <c:pt idx="168">
                   <c:v>1.901</c:v>
@@ -1634,7 +655,7 @@
                   <c:v>1.81</c:v>
                 </c:pt>
                 <c:pt idx="170">
-                  <c:v>1.902</c:v>
+                  <c:v>1.9019999999999999</c:v>
                 </c:pt>
                 <c:pt idx="171">
                   <c:v>1.841</c:v>
@@ -1643,25 +664,25 @@
                   <c:v>1.909</c:v>
                 </c:pt>
                 <c:pt idx="173">
-                  <c:v>1.892</c:v>
+                  <c:v>1.8919999999999999</c:v>
                 </c:pt>
                 <c:pt idx="174">
-                  <c:v>1.943</c:v>
+                  <c:v>1.9430000000000001</c:v>
                 </c:pt>
                 <c:pt idx="175">
-                  <c:v>1.937</c:v>
+                  <c:v>1.9370000000000001</c:v>
                 </c:pt>
                 <c:pt idx="176">
-                  <c:v>1.967</c:v>
+                  <c:v>1.9670000000000001</c:v>
                 </c:pt>
                 <c:pt idx="177">
-                  <c:v>1.975</c:v>
+                  <c:v>1.9750000000000001</c:v>
                 </c:pt>
                 <c:pt idx="178">
                   <c:v>1.833</c:v>
                 </c:pt>
                 <c:pt idx="179">
-                  <c:v>1.555</c:v>
+                  <c:v>1.5549999999999999</c:v>
                 </c:pt>
                 <c:pt idx="180">
                   <c:v>1.623</c:v>
@@ -1676,7 +697,7 @@
                   <c:v>1.825</c:v>
                 </c:pt>
                 <c:pt idx="184">
-                  <c:v>1.779</c:v>
+                  <c:v>1.7789999999999999</c:v>
                 </c:pt>
                 <c:pt idx="185">
                   <c:v>1.716</c:v>
@@ -1691,22 +712,22 @@
                   <c:v>1.726</c:v>
                 </c:pt>
                 <c:pt idx="189">
-                  <c:v>1.646</c:v>
+                  <c:v>1.6459999999999999</c:v>
                 </c:pt>
                 <c:pt idx="190">
-                  <c:v>1.652</c:v>
+                  <c:v>1.6519999999999999</c:v>
                 </c:pt>
                 <c:pt idx="191">
-                  <c:v>1.707</c:v>
+                  <c:v>1.7070000000000001</c:v>
                 </c:pt>
                 <c:pt idx="192">
-                  <c:v>1.705</c:v>
+                  <c:v>1.7050000000000001</c:v>
                 </c:pt>
                 <c:pt idx="193">
-                  <c:v>1.685</c:v>
+                  <c:v>1.6850000000000001</c:v>
                 </c:pt>
                 <c:pt idx="194">
-                  <c:v>1.688</c:v>
+                  <c:v>1.6879999999999999</c:v>
                 </c:pt>
                 <c:pt idx="195">
                   <c:v>1.681</c:v>
@@ -1721,34 +742,34 @@
                   <c:v>1.591</c:v>
                 </c:pt>
                 <c:pt idx="199">
-                  <c:v>1.428</c:v>
+                  <c:v>1.4279999999999999</c:v>
                 </c:pt>
                 <c:pt idx="200">
-                  <c:v>1.269</c:v>
+                  <c:v>1.2689999999999999</c:v>
                 </c:pt>
                 <c:pt idx="201">
-                  <c:v>1.299</c:v>
+                  <c:v>1.2989999999999999</c:v>
                 </c:pt>
                 <c:pt idx="202">
-                  <c:v>1.434</c:v>
+                  <c:v>1.4339999999999999</c:v>
                 </c:pt>
                 <c:pt idx="203">
                   <c:v>1.357</c:v>
                 </c:pt>
                 <c:pt idx="204">
-                  <c:v>1.362</c:v>
+                  <c:v>1.3620000000000001</c:v>
                 </c:pt>
                 <c:pt idx="205">
-                  <c:v>1.473</c:v>
+                  <c:v>1.4730000000000001</c:v>
                 </c:pt>
                 <c:pt idx="206">
-                  <c:v>1.449</c:v>
+                  <c:v>1.4490000000000001</c:v>
                 </c:pt>
                 <c:pt idx="207">
-                  <c:v>1.433</c:v>
+                  <c:v>1.4330000000000001</c:v>
                 </c:pt>
                 <c:pt idx="208">
-                  <c:v>1.426</c:v>
+                  <c:v>1.4259999999999999</c:v>
                 </c:pt>
                 <c:pt idx="209">
                   <c:v>1.397</c:v>
@@ -1757,7 +778,7 @@
                   <c:v>1.35</c:v>
                 </c:pt>
                 <c:pt idx="211">
-                  <c:v>1.382</c:v>
+                  <c:v>1.3819999999999999</c:v>
                 </c:pt>
                 <c:pt idx="212">
                   <c:v>1.282</c:v>
@@ -1766,13 +787,13 @@
                   <c:v>1.103</c:v>
                 </c:pt>
                 <c:pt idx="214">
-                  <c:v>0.902</c:v>
+                  <c:v>0.90200000000000002</c:v>
                 </c:pt>
                 <c:pt idx="215">
-                  <c:v>0.547</c:v>
+                  <c:v>0.54700000000000004</c:v>
                 </c:pt>
                 <c:pt idx="216">
-                  <c:v>0.349</c:v>
+                  <c:v>0.34899999999999998</c:v>
                 </c:pt>
                 <c:pt idx="217">
                   <c:v>0.31</c:v>
@@ -1781,31 +802,31 @@
                   <c:v>0.128</c:v>
                 </c:pt>
                 <c:pt idx="219">
-                  <c:v>0.263</c:v>
+                  <c:v>0.26300000000000001</c:v>
                 </c:pt>
                 <c:pt idx="220">
                   <c:v>0.41</c:v>
                 </c:pt>
                 <c:pt idx="221">
-                  <c:v>0.457</c:v>
+                  <c:v>0.45700000000000002</c:v>
                 </c:pt>
                 <c:pt idx="222">
                   <c:v>0.505</c:v>
                 </c:pt>
                 <c:pt idx="223">
-                  <c:v>0.567</c:v>
+                  <c:v>0.56699999999999995</c:v>
                 </c:pt>
                 <c:pt idx="224">
-                  <c:v>0.701</c:v>
+                  <c:v>0.70099999999999996</c:v>
                 </c:pt>
                 <c:pt idx="225">
-                  <c:v>0.805</c:v>
+                  <c:v>0.80500000000000005</c:v>
                 </c:pt>
                 <c:pt idx="226">
-                  <c:v>0.783</c:v>
+                  <c:v>0.78300000000000003</c:v>
                 </c:pt>
                 <c:pt idx="227">
-                  <c:v>0.841</c:v>
+                  <c:v>0.84099999999999997</c:v>
                 </c:pt>
                 <c:pt idx="228">
                   <c:v>0.78</c:v>
@@ -1814,34 +835,34 @@
                   <c:v>0.8</c:v>
                 </c:pt>
                 <c:pt idx="230">
-                  <c:v>0.842</c:v>
+                  <c:v>0.84199999999999997</c:v>
                 </c:pt>
                 <c:pt idx="231">
-                  <c:v>0.867</c:v>
+                  <c:v>0.86699999999999999</c:v>
                 </c:pt>
                 <c:pt idx="232">
-                  <c:v>0.822</c:v>
+                  <c:v>0.82199999999999995</c:v>
                 </c:pt>
                 <c:pt idx="233">
-                  <c:v>0.855</c:v>
+                  <c:v>0.85499999999999998</c:v>
                 </c:pt>
                 <c:pt idx="234">
-                  <c:v>0.861</c:v>
+                  <c:v>0.86099999999999999</c:v>
                 </c:pt>
                 <c:pt idx="235">
-                  <c:v>0.823</c:v>
+                  <c:v>0.82299999999999995</c:v>
                 </c:pt>
                 <c:pt idx="236">
-                  <c:v>0.805</c:v>
+                  <c:v>0.80500000000000005</c:v>
                 </c:pt>
                 <c:pt idx="237">
-                  <c:v>0.811</c:v>
+                  <c:v>0.81100000000000005</c:v>
                 </c:pt>
                 <c:pt idx="238">
-                  <c:v>0.762</c:v>
+                  <c:v>0.76200000000000001</c:v>
                 </c:pt>
                 <c:pt idx="239">
-                  <c:v>0.741</c:v>
+                  <c:v>0.74099999999999999</c:v>
                 </c:pt>
                 <c:pt idx="240">
                   <c:v>0.747</c:v>
@@ -1850,13 +871,13 @@
                   <c:v>0.72</c:v>
                 </c:pt>
                 <c:pt idx="242">
-                  <c:v>0.718</c:v>
+                  <c:v>0.71799999999999997</c:v>
                 </c:pt>
                 <c:pt idx="243">
-                  <c:v>0.742</c:v>
+                  <c:v>0.74199999999999999</c:v>
                 </c:pt>
                 <c:pt idx="244">
-                  <c:v>0.834</c:v>
+                  <c:v>0.83399999999999996</c:v>
                 </c:pt>
                 <c:pt idx="245">
                   <c:v>0.89</c:v>
@@ -1865,82 +886,82 @@
                   <c:v>0.875</c:v>
                 </c:pt>
                 <c:pt idx="247">
-                  <c:v>0.821</c:v>
+                  <c:v>0.82099999999999995</c:v>
                 </c:pt>
                 <c:pt idx="248">
-                  <c:v>0.724</c:v>
+                  <c:v>0.72399999999999998</c:v>
                 </c:pt>
                 <c:pt idx="249">
-                  <c:v>0.651</c:v>
+                  <c:v>0.65100000000000002</c:v>
                 </c:pt>
                 <c:pt idx="250">
                   <c:v>0.61</c:v>
                 </c:pt>
                 <c:pt idx="251">
-                  <c:v>0.513</c:v>
+                  <c:v>0.51300000000000001</c:v>
                 </c:pt>
                 <c:pt idx="252">
-                  <c:v>0.557</c:v>
+                  <c:v>0.55700000000000005</c:v>
                 </c:pt>
                 <c:pt idx="253">
-                  <c:v>0.456</c:v>
+                  <c:v>0.45600000000000002</c:v>
                 </c:pt>
                 <c:pt idx="254">
-                  <c:v>0.363</c:v>
+                  <c:v>0.36299999999999999</c:v>
                 </c:pt>
                 <c:pt idx="255">
-                  <c:v>0.353</c:v>
+                  <c:v>0.35299999999999998</c:v>
                 </c:pt>
                 <c:pt idx="256">
-                  <c:v>0.146</c:v>
+                  <c:v>0.14599999999999999</c:v>
                 </c:pt>
                 <c:pt idx="257">
-                  <c:v>0.361</c:v>
+                  <c:v>0.36099999999999999</c:v>
                 </c:pt>
                 <c:pt idx="258">
-                  <c:v>0.386</c:v>
+                  <c:v>0.38600000000000001</c:v>
                 </c:pt>
                 <c:pt idx="259">
-                  <c:v>0.406</c:v>
+                  <c:v>0.40600000000000003</c:v>
                 </c:pt>
                 <c:pt idx="260">
                   <c:v>0.41</c:v>
                 </c:pt>
                 <c:pt idx="261">
-                  <c:v>0.368</c:v>
+                  <c:v>0.36799999999999999</c:v>
                 </c:pt>
                 <c:pt idx="262">
-                  <c:v>0.286</c:v>
+                  <c:v>0.28599999999999998</c:v>
                 </c:pt>
                 <c:pt idx="263">
-                  <c:v>0.418</c:v>
+                  <c:v>0.41799999999999998</c:v>
                 </c:pt>
                 <c:pt idx="264">
-                  <c:v>0.423</c:v>
+                  <c:v>0.42299999999999999</c:v>
                 </c:pt>
                 <c:pt idx="265">
                   <c:v>0.495</c:v>
                 </c:pt>
                 <c:pt idx="266">
-                  <c:v>0.589</c:v>
+                  <c:v>0.58899999999999997</c:v>
                 </c:pt>
                 <c:pt idx="267">
-                  <c:v>0.529</c:v>
+                  <c:v>0.52900000000000003</c:v>
                 </c:pt>
                 <c:pt idx="268">
-                  <c:v>0.606</c:v>
+                  <c:v>0.60599999999999998</c:v>
                 </c:pt>
                 <c:pt idx="269">
-                  <c:v>0.595</c:v>
+                  <c:v>0.59499999999999997</c:v>
                 </c:pt>
                 <c:pt idx="270">
                   <c:v>0.64</c:v>
                 </c:pt>
                 <c:pt idx="271">
-                  <c:v>0.646</c:v>
+                  <c:v>0.64600000000000002</c:v>
                 </c:pt>
                 <c:pt idx="272">
-                  <c:v>0.647</c:v>
+                  <c:v>0.64700000000000002</c:v>
                 </c:pt>
                 <c:pt idx="273">
                   <c:v>0.66</c:v>
@@ -1949,52 +970,52 @@
                   <c:v>0.751</c:v>
                 </c:pt>
                 <c:pt idx="275">
-                  <c:v>0.669</c:v>
+                  <c:v>0.66900000000000004</c:v>
                 </c:pt>
                 <c:pt idx="276">
                   <c:v>0.66</c:v>
                 </c:pt>
                 <c:pt idx="277">
-                  <c:v>0.675</c:v>
+                  <c:v>0.67500000000000004</c:v>
                 </c:pt>
                 <c:pt idx="278">
-                  <c:v>0.691</c:v>
+                  <c:v>0.69099999999999995</c:v>
                 </c:pt>
                 <c:pt idx="279">
-                  <c:v>0.642</c:v>
+                  <c:v>0.64200000000000002</c:v>
                 </c:pt>
                 <c:pt idx="280">
-                  <c:v>0.654</c:v>
+                  <c:v>0.65400000000000003</c:v>
                 </c:pt>
                 <c:pt idx="281">
-                  <c:v>0.677</c:v>
+                  <c:v>0.67700000000000005</c:v>
                 </c:pt>
                 <c:pt idx="282">
-                  <c:v>0.674</c:v>
+                  <c:v>0.67400000000000004</c:v>
                 </c:pt>
                 <c:pt idx="283">
-                  <c:v>0.671</c:v>
+                  <c:v>0.67100000000000004</c:v>
                 </c:pt>
                 <c:pt idx="284">
-                  <c:v>0.693</c:v>
+                  <c:v>0.69299999999999995</c:v>
                 </c:pt>
                 <c:pt idx="285">
-                  <c:v>0.768</c:v>
+                  <c:v>0.76800000000000002</c:v>
                 </c:pt>
                 <c:pt idx="286">
-                  <c:v>0.867</c:v>
+                  <c:v>0.86699999999999999</c:v>
                 </c:pt>
                 <c:pt idx="287">
-                  <c:v>0.906</c:v>
+                  <c:v>0.90600000000000003</c:v>
                 </c:pt>
                 <c:pt idx="288">
-                  <c:v>0.974</c:v>
+                  <c:v>0.97399999999999998</c:v>
                 </c:pt>
                 <c:pt idx="289">
-                  <c:v>1.021</c:v>
+                  <c:v>1.0209999999999999</c:v>
                 </c:pt>
                 <c:pt idx="290">
-                  <c:v>1.213</c:v>
+                  <c:v>1.2130000000000001</c:v>
                 </c:pt>
                 <c:pt idx="291">
                   <c:v>1.204</c:v>
@@ -2012,7 +1033,7 @@
                   <c:v>1.5</c:v>
                 </c:pt>
                 <c:pt idx="296">
-                  <c:v>1.578</c:v>
+                  <c:v>1.5780000000000001</c:v>
                 </c:pt>
                 <c:pt idx="297">
                   <c:v>1.6</c:v>
@@ -2024,10 +1045,10 @@
                   <c:v>1.274</c:v>
                 </c:pt>
                 <c:pt idx="300">
-                  <c:v>1.247</c:v>
+                  <c:v>1.2470000000000001</c:v>
                 </c:pt>
                 <c:pt idx="301">
-                  <c:v>1.273</c:v>
+                  <c:v>1.2729999999999999</c:v>
                 </c:pt>
                 <c:pt idx="302">
                   <c:v>1.262</c:v>
@@ -2036,19 +1057,19 @@
                   <c:v>1.458</c:v>
                 </c:pt>
                 <c:pt idx="304">
-                  <c:v>1.598</c:v>
+                  <c:v>1.5980000000000001</c:v>
                 </c:pt>
                 <c:pt idx="305">
                   <c:v>1.649</c:v>
                 </c:pt>
                 <c:pt idx="306">
-                  <c:v>1.864</c:v>
+                  <c:v>1.8640000000000001</c:v>
                 </c:pt>
                 <c:pt idx="307">
-                  <c:v>1.683</c:v>
+                  <c:v>1.6830000000000001</c:v>
                 </c:pt>
                 <c:pt idx="308">
-                  <c:v>1.662</c:v>
+                  <c:v>1.6619999999999999</c:v>
                 </c:pt>
                 <c:pt idx="309">
                   <c:v>1.79</c:v>
@@ -2057,34 +1078,34 @@
                   <c:v>1.734</c:v>
                 </c:pt>
                 <c:pt idx="311">
-                  <c:v>1.789</c:v>
+                  <c:v>1.7889999999999999</c:v>
                 </c:pt>
                 <c:pt idx="312">
                   <c:v>1.911</c:v>
                 </c:pt>
                 <c:pt idx="313">
-                  <c:v>2.155</c:v>
+                  <c:v>2.1549999999999998</c:v>
                 </c:pt>
                 <c:pt idx="314">
                   <c:v>2.153</c:v>
                 </c:pt>
                 <c:pt idx="315">
-                  <c:v>2.176</c:v>
+                  <c:v>2.1760000000000002</c:v>
                 </c:pt>
                 <c:pt idx="316">
-                  <c:v>2.111</c:v>
+                  <c:v>2.1110000000000002</c:v>
                 </c:pt>
                 <c:pt idx="317">
-                  <c:v>2.092</c:v>
+                  <c:v>2.0920000000000001</c:v>
                 </c:pt>
                 <c:pt idx="318">
-                  <c:v>2.189</c:v>
+                  <c:v>2.1890000000000001</c:v>
                 </c:pt>
                 <c:pt idx="319">
-                  <c:v>2.252</c:v>
+                  <c:v>2.2519999999999998</c:v>
                 </c:pt>
                 <c:pt idx="320">
-                  <c:v>2.252</c:v>
+                  <c:v>2.2519999999999998</c:v>
                 </c:pt>
                 <c:pt idx="321">
                   <c:v>2.29</c:v>
@@ -2099,54 +1120,59 @@
                   <c:v>2.645</c:v>
                 </c:pt>
                 <c:pt idx="325">
-                  <c:v>2.846</c:v>
+                  <c:v>2.8460000000000001</c:v>
                 </c:pt>
                 <c:pt idx="326">
-                  <c:v>2.803</c:v>
+                  <c:v>2.8029999999999999</c:v>
                 </c:pt>
                 <c:pt idx="327">
-                  <c:v>3.026</c:v>
+                  <c:v>3.0259999999999998</c:v>
                 </c:pt>
                 <c:pt idx="328">
-                  <c:v>3.096</c:v>
+                  <c:v>3.0960000000000001</c:v>
                 </c:pt>
                 <c:pt idx="329">
-                  <c:v>3.067</c:v>
+                  <c:v>3.0670000000000002</c:v>
                 </c:pt>
                 <c:pt idx="330">
-                  <c:v>3.068</c:v>
+                  <c:v>3.0680000000000001</c:v>
                 </c:pt>
                 <c:pt idx="331">
                   <c:v>3.3</c:v>
                 </c:pt>
                 <c:pt idx="332">
-                  <c:v>3.354</c:v>
+                  <c:v>3.3540000000000001</c:v>
                 </c:pt>
                 <c:pt idx="333">
                   <c:v>3.577</c:v>
                 </c:pt>
                 <c:pt idx="334">
-                  <c:v>3.342</c:v>
+                  <c:v>3.3420000000000001</c:v>
                 </c:pt>
                 <c:pt idx="335">
                   <c:v>3.64</c:v>
                 </c:pt>
                 <c:pt idx="336">
-                  <c:v>3.721</c:v>
+                  <c:v>3.7210000000000001</c:v>
                 </c:pt>
                 <c:pt idx="337">
                   <c:v>3.859</c:v>
                 </c:pt>
                 <c:pt idx="338">
-                  <c:v>3.873</c:v>
+                  <c:v>3.8730000000000002</c:v>
                 </c:pt>
                 <c:pt idx="339">
-                  <c:v>3.982</c:v>
+                  <c:v>3.9820000000000002</c:v>
                 </c:pt>
               </c:numCache>
             </c:numRef>
           </c:val>
           <c:smooth val="0"/>
+          <c:extLst>
+            <c:ext xmlns:c16="http://schemas.microsoft.com/office/drawing/2014/chart" uri="{C3380CC4-5D6E-409C-BE32-E72D297353CC}">
+              <c16:uniqueId val="{00000000-F378-454C-9F10-9F4400886F81}"/>
+            </c:ext>
+          </c:extLst>
         </c:ser>
         <c:ser>
           <c:idx val="1"/>
@@ -2177,1025 +1203,26 @@
               <c:f>Sheet1!$A$2:$A$341</c:f>
               <c:strCache>
                 <c:ptCount val="340"/>
-                <c:pt idx="0">
-                  <c:v/>
-                </c:pt>
-                <c:pt idx="1">
-                  <c:v/>
-                </c:pt>
-                <c:pt idx="2">
-                  <c:v/>
-                </c:pt>
-                <c:pt idx="3">
-                  <c:v/>
-                </c:pt>
-                <c:pt idx="4">
-                  <c:v/>
-                </c:pt>
-                <c:pt idx="5">
-                  <c:v/>
-                </c:pt>
-                <c:pt idx="6">
-                  <c:v/>
-                </c:pt>
-                <c:pt idx="7">
-                  <c:v/>
-                </c:pt>
-                <c:pt idx="8">
-                  <c:v/>
-                </c:pt>
-                <c:pt idx="9">
-                  <c:v/>
-                </c:pt>
-                <c:pt idx="10">
-                  <c:v/>
-                </c:pt>
-                <c:pt idx="11">
-                  <c:v/>
-                </c:pt>
-                <c:pt idx="12">
-                  <c:v/>
-                </c:pt>
-                <c:pt idx="13">
-                  <c:v/>
-                </c:pt>
-                <c:pt idx="14">
-                  <c:v/>
-                </c:pt>
-                <c:pt idx="15">
-                  <c:v/>
-                </c:pt>
-                <c:pt idx="16">
-                  <c:v/>
-                </c:pt>
-                <c:pt idx="17">
-                  <c:v/>
-                </c:pt>
-                <c:pt idx="18">
-                  <c:v/>
-                </c:pt>
-                <c:pt idx="19">
-                  <c:v/>
-                </c:pt>
-                <c:pt idx="20">
-                  <c:v/>
-                </c:pt>
                 <c:pt idx="21">
                   <c:v>2000</c:v>
                 </c:pt>
-                <c:pt idx="22">
-                  <c:v/>
-                </c:pt>
-                <c:pt idx="23">
-                  <c:v/>
-                </c:pt>
-                <c:pt idx="24">
-                  <c:v/>
-                </c:pt>
-                <c:pt idx="25">
-                  <c:v/>
-                </c:pt>
-                <c:pt idx="26">
-                  <c:v/>
-                </c:pt>
-                <c:pt idx="27">
-                  <c:v/>
-                </c:pt>
-                <c:pt idx="28">
-                  <c:v/>
-                </c:pt>
-                <c:pt idx="29">
-                  <c:v/>
-                </c:pt>
-                <c:pt idx="30">
-                  <c:v/>
-                </c:pt>
-                <c:pt idx="31">
-                  <c:v/>
-                </c:pt>
-                <c:pt idx="32">
-                  <c:v/>
-                </c:pt>
-                <c:pt idx="33">
-                  <c:v/>
-                </c:pt>
-                <c:pt idx="34">
-                  <c:v/>
-                </c:pt>
-                <c:pt idx="35">
-                  <c:v/>
-                </c:pt>
-                <c:pt idx="36">
-                  <c:v/>
-                </c:pt>
-                <c:pt idx="37">
-                  <c:v/>
-                </c:pt>
-                <c:pt idx="38">
-                  <c:v/>
-                </c:pt>
-                <c:pt idx="39">
-                  <c:v/>
-                </c:pt>
-                <c:pt idx="40">
-                  <c:v/>
-                </c:pt>
-                <c:pt idx="41">
-                  <c:v/>
-                </c:pt>
-                <c:pt idx="42">
-                  <c:v/>
-                </c:pt>
-                <c:pt idx="43">
-                  <c:v/>
-                </c:pt>
-                <c:pt idx="44">
-                  <c:v/>
-                </c:pt>
-                <c:pt idx="45">
-                  <c:v/>
-                </c:pt>
-                <c:pt idx="46">
-                  <c:v/>
-                </c:pt>
-                <c:pt idx="47">
-                  <c:v/>
-                </c:pt>
-                <c:pt idx="48">
-                  <c:v/>
-                </c:pt>
-                <c:pt idx="49">
-                  <c:v/>
-                </c:pt>
-                <c:pt idx="50">
-                  <c:v/>
-                </c:pt>
-                <c:pt idx="51">
-                  <c:v/>
-                </c:pt>
-                <c:pt idx="52">
-                  <c:v/>
-                </c:pt>
-                <c:pt idx="53">
-                  <c:v/>
-                </c:pt>
-                <c:pt idx="54">
-                  <c:v/>
-                </c:pt>
-                <c:pt idx="55">
-                  <c:v/>
-                </c:pt>
-                <c:pt idx="56">
-                  <c:v/>
-                </c:pt>
-                <c:pt idx="57">
-                  <c:v/>
-                </c:pt>
-                <c:pt idx="58">
-                  <c:v/>
-                </c:pt>
-                <c:pt idx="59">
-                  <c:v/>
-                </c:pt>
-                <c:pt idx="60">
-                  <c:v/>
-                </c:pt>
-                <c:pt idx="61">
-                  <c:v/>
-                </c:pt>
-                <c:pt idx="62">
-                  <c:v/>
-                </c:pt>
-                <c:pt idx="63">
-                  <c:v/>
-                </c:pt>
-                <c:pt idx="64">
-                  <c:v/>
-                </c:pt>
-                <c:pt idx="65">
-                  <c:v/>
-                </c:pt>
-                <c:pt idx="66">
-                  <c:v/>
-                </c:pt>
-                <c:pt idx="67">
-                  <c:v/>
-                </c:pt>
-                <c:pt idx="68">
-                  <c:v/>
-                </c:pt>
                 <c:pt idx="69">
                   <c:v>2004</c:v>
                 </c:pt>
-                <c:pt idx="70">
-                  <c:v/>
-                </c:pt>
-                <c:pt idx="71">
-                  <c:v/>
-                </c:pt>
-                <c:pt idx="72">
-                  <c:v/>
-                </c:pt>
-                <c:pt idx="73">
-                  <c:v/>
-                </c:pt>
-                <c:pt idx="74">
-                  <c:v/>
-                </c:pt>
-                <c:pt idx="75">
-                  <c:v/>
-                </c:pt>
-                <c:pt idx="76">
-                  <c:v/>
-                </c:pt>
-                <c:pt idx="77">
-                  <c:v/>
-                </c:pt>
-                <c:pt idx="78">
-                  <c:v/>
-                </c:pt>
-                <c:pt idx="79">
-                  <c:v/>
-                </c:pt>
-                <c:pt idx="80">
-                  <c:v/>
-                </c:pt>
-                <c:pt idx="81">
-                  <c:v/>
-                </c:pt>
-                <c:pt idx="82">
-                  <c:v/>
-                </c:pt>
-                <c:pt idx="83">
-                  <c:v/>
-                </c:pt>
-                <c:pt idx="84">
-                  <c:v/>
-                </c:pt>
-                <c:pt idx="85">
-                  <c:v/>
-                </c:pt>
-                <c:pt idx="86">
-                  <c:v/>
-                </c:pt>
-                <c:pt idx="87">
-                  <c:v/>
-                </c:pt>
-                <c:pt idx="88">
-                  <c:v/>
-                </c:pt>
-                <c:pt idx="89">
-                  <c:v/>
-                </c:pt>
-                <c:pt idx="90">
-                  <c:v/>
-                </c:pt>
-                <c:pt idx="91">
-                  <c:v/>
-                </c:pt>
-                <c:pt idx="92">
-                  <c:v/>
-                </c:pt>
-                <c:pt idx="93">
-                  <c:v/>
-                </c:pt>
-                <c:pt idx="94">
-                  <c:v/>
-                </c:pt>
-                <c:pt idx="95">
-                  <c:v/>
-                </c:pt>
-                <c:pt idx="96">
-                  <c:v/>
-                </c:pt>
-                <c:pt idx="97">
-                  <c:v/>
-                </c:pt>
-                <c:pt idx="98">
-                  <c:v/>
-                </c:pt>
-                <c:pt idx="99">
-                  <c:v/>
-                </c:pt>
-                <c:pt idx="100">
-                  <c:v/>
-                </c:pt>
-                <c:pt idx="101">
-                  <c:v/>
-                </c:pt>
-                <c:pt idx="102">
-                  <c:v/>
-                </c:pt>
-                <c:pt idx="103">
-                  <c:v/>
-                </c:pt>
-                <c:pt idx="104">
-                  <c:v/>
-                </c:pt>
-                <c:pt idx="105">
-                  <c:v/>
-                </c:pt>
-                <c:pt idx="106">
-                  <c:v/>
-                </c:pt>
-                <c:pt idx="107">
-                  <c:v/>
-                </c:pt>
-                <c:pt idx="108">
-                  <c:v/>
-                </c:pt>
-                <c:pt idx="109">
-                  <c:v/>
-                </c:pt>
-                <c:pt idx="110">
-                  <c:v/>
-                </c:pt>
-                <c:pt idx="111">
-                  <c:v/>
-                </c:pt>
-                <c:pt idx="112">
-                  <c:v/>
-                </c:pt>
-                <c:pt idx="113">
-                  <c:v/>
-                </c:pt>
-                <c:pt idx="114">
-                  <c:v/>
-                </c:pt>
-                <c:pt idx="115">
-                  <c:v/>
-                </c:pt>
-                <c:pt idx="116">
-                  <c:v/>
-                </c:pt>
                 <c:pt idx="117">
                   <c:v>2008</c:v>
                 </c:pt>
-                <c:pt idx="118">
-                  <c:v/>
-                </c:pt>
-                <c:pt idx="119">
-                  <c:v/>
-                </c:pt>
-                <c:pt idx="120">
-                  <c:v/>
-                </c:pt>
-                <c:pt idx="121">
-                  <c:v/>
-                </c:pt>
-                <c:pt idx="122">
-                  <c:v/>
-                </c:pt>
-                <c:pt idx="123">
-                  <c:v/>
-                </c:pt>
-                <c:pt idx="124">
-                  <c:v/>
-                </c:pt>
-                <c:pt idx="125">
-                  <c:v/>
-                </c:pt>
-                <c:pt idx="126">
-                  <c:v/>
-                </c:pt>
-                <c:pt idx="127">
-                  <c:v/>
-                </c:pt>
-                <c:pt idx="128">
-                  <c:v/>
-                </c:pt>
-                <c:pt idx="129">
-                  <c:v/>
-                </c:pt>
-                <c:pt idx="130">
-                  <c:v/>
-                </c:pt>
-                <c:pt idx="131">
-                  <c:v/>
-                </c:pt>
-                <c:pt idx="132">
-                  <c:v/>
-                </c:pt>
-                <c:pt idx="133">
-                  <c:v/>
-                </c:pt>
-                <c:pt idx="134">
-                  <c:v/>
-                </c:pt>
-                <c:pt idx="135">
-                  <c:v/>
-                </c:pt>
-                <c:pt idx="136">
-                  <c:v/>
-                </c:pt>
-                <c:pt idx="137">
-                  <c:v/>
-                </c:pt>
-                <c:pt idx="138">
-                  <c:v/>
-                </c:pt>
-                <c:pt idx="139">
-                  <c:v/>
-                </c:pt>
-                <c:pt idx="140">
-                  <c:v/>
-                </c:pt>
-                <c:pt idx="141">
-                  <c:v/>
-                </c:pt>
-                <c:pt idx="142">
-                  <c:v/>
-                </c:pt>
-                <c:pt idx="143">
-                  <c:v/>
-                </c:pt>
-                <c:pt idx="144">
-                  <c:v/>
-                </c:pt>
-                <c:pt idx="145">
-                  <c:v/>
-                </c:pt>
-                <c:pt idx="146">
-                  <c:v/>
-                </c:pt>
-                <c:pt idx="147">
-                  <c:v/>
-                </c:pt>
-                <c:pt idx="148">
-                  <c:v/>
-                </c:pt>
-                <c:pt idx="149">
-                  <c:v/>
-                </c:pt>
-                <c:pt idx="150">
-                  <c:v/>
-                </c:pt>
-                <c:pt idx="151">
-                  <c:v/>
-                </c:pt>
-                <c:pt idx="152">
-                  <c:v/>
-                </c:pt>
-                <c:pt idx="153">
-                  <c:v/>
-                </c:pt>
-                <c:pt idx="154">
-                  <c:v/>
-                </c:pt>
-                <c:pt idx="155">
-                  <c:v/>
-                </c:pt>
-                <c:pt idx="156">
-                  <c:v/>
-                </c:pt>
-                <c:pt idx="157">
-                  <c:v/>
-                </c:pt>
-                <c:pt idx="158">
-                  <c:v/>
-                </c:pt>
-                <c:pt idx="159">
-                  <c:v/>
-                </c:pt>
-                <c:pt idx="160">
-                  <c:v/>
-                </c:pt>
-                <c:pt idx="161">
-                  <c:v/>
-                </c:pt>
-                <c:pt idx="162">
-                  <c:v/>
-                </c:pt>
-                <c:pt idx="163">
-                  <c:v/>
-                </c:pt>
-                <c:pt idx="164">
-                  <c:v/>
-                </c:pt>
                 <c:pt idx="165">
                   <c:v>2012</c:v>
                 </c:pt>
-                <c:pt idx="166">
-                  <c:v/>
-                </c:pt>
-                <c:pt idx="167">
-                  <c:v/>
-                </c:pt>
-                <c:pt idx="168">
-                  <c:v/>
-                </c:pt>
-                <c:pt idx="169">
-                  <c:v/>
-                </c:pt>
-                <c:pt idx="170">
-                  <c:v/>
-                </c:pt>
-                <c:pt idx="171">
-                  <c:v/>
-                </c:pt>
-                <c:pt idx="172">
-                  <c:v/>
-                </c:pt>
-                <c:pt idx="173">
-                  <c:v/>
-                </c:pt>
-                <c:pt idx="174">
-                  <c:v/>
-                </c:pt>
-                <c:pt idx="175">
-                  <c:v/>
-                </c:pt>
-                <c:pt idx="176">
-                  <c:v/>
-                </c:pt>
-                <c:pt idx="177">
-                  <c:v/>
-                </c:pt>
-                <c:pt idx="178">
-                  <c:v/>
-                </c:pt>
-                <c:pt idx="179">
-                  <c:v/>
-                </c:pt>
-                <c:pt idx="180">
-                  <c:v/>
-                </c:pt>
-                <c:pt idx="181">
-                  <c:v/>
-                </c:pt>
-                <c:pt idx="182">
-                  <c:v/>
-                </c:pt>
-                <c:pt idx="183">
-                  <c:v/>
-                </c:pt>
-                <c:pt idx="184">
-                  <c:v/>
-                </c:pt>
-                <c:pt idx="185">
-                  <c:v/>
-                </c:pt>
-                <c:pt idx="186">
-                  <c:v/>
-                </c:pt>
-                <c:pt idx="187">
-                  <c:v/>
-                </c:pt>
-                <c:pt idx="188">
-                  <c:v/>
-                </c:pt>
-                <c:pt idx="189">
-                  <c:v/>
-                </c:pt>
-                <c:pt idx="190">
-                  <c:v/>
-                </c:pt>
-                <c:pt idx="191">
-                  <c:v/>
-                </c:pt>
-                <c:pt idx="192">
-                  <c:v/>
-                </c:pt>
-                <c:pt idx="193">
-                  <c:v/>
-                </c:pt>
-                <c:pt idx="194">
-                  <c:v/>
-                </c:pt>
-                <c:pt idx="195">
-                  <c:v/>
-                </c:pt>
-                <c:pt idx="196">
-                  <c:v/>
-                </c:pt>
-                <c:pt idx="197">
-                  <c:v/>
-                </c:pt>
-                <c:pt idx="198">
-                  <c:v/>
-                </c:pt>
-                <c:pt idx="199">
-                  <c:v/>
-                </c:pt>
-                <c:pt idx="200">
-                  <c:v/>
-                </c:pt>
-                <c:pt idx="201">
-                  <c:v/>
-                </c:pt>
-                <c:pt idx="202">
-                  <c:v/>
-                </c:pt>
-                <c:pt idx="203">
-                  <c:v/>
-                </c:pt>
-                <c:pt idx="204">
-                  <c:v/>
-                </c:pt>
-                <c:pt idx="205">
-                  <c:v/>
-                </c:pt>
-                <c:pt idx="206">
-                  <c:v/>
-                </c:pt>
-                <c:pt idx="207">
-                  <c:v/>
-                </c:pt>
-                <c:pt idx="208">
-                  <c:v/>
-                </c:pt>
-                <c:pt idx="209">
-                  <c:v/>
-                </c:pt>
-                <c:pt idx="210">
-                  <c:v/>
-                </c:pt>
-                <c:pt idx="211">
-                  <c:v/>
-                </c:pt>
-                <c:pt idx="212">
-                  <c:v/>
-                </c:pt>
                 <c:pt idx="213">
                   <c:v>2016</c:v>
                 </c:pt>
-                <c:pt idx="214">
-                  <c:v/>
-                </c:pt>
-                <c:pt idx="215">
-                  <c:v/>
-                </c:pt>
-                <c:pt idx="216">
-                  <c:v/>
-                </c:pt>
-                <c:pt idx="217">
-                  <c:v/>
-                </c:pt>
-                <c:pt idx="218">
-                  <c:v/>
-                </c:pt>
-                <c:pt idx="219">
-                  <c:v/>
-                </c:pt>
-                <c:pt idx="220">
-                  <c:v/>
-                </c:pt>
-                <c:pt idx="221">
-                  <c:v/>
-                </c:pt>
-                <c:pt idx="222">
-                  <c:v/>
-                </c:pt>
-                <c:pt idx="223">
-                  <c:v/>
-                </c:pt>
-                <c:pt idx="224">
-                  <c:v/>
-                </c:pt>
-                <c:pt idx="225">
-                  <c:v/>
-                </c:pt>
-                <c:pt idx="226">
-                  <c:v/>
-                </c:pt>
-                <c:pt idx="227">
-                  <c:v/>
-                </c:pt>
-                <c:pt idx="228">
-                  <c:v/>
-                </c:pt>
-                <c:pt idx="229">
-                  <c:v/>
-                </c:pt>
-                <c:pt idx="230">
-                  <c:v/>
-                </c:pt>
-                <c:pt idx="231">
-                  <c:v/>
-                </c:pt>
-                <c:pt idx="232">
-                  <c:v/>
-                </c:pt>
-                <c:pt idx="233">
-                  <c:v/>
-                </c:pt>
-                <c:pt idx="234">
-                  <c:v/>
-                </c:pt>
-                <c:pt idx="235">
-                  <c:v/>
-                </c:pt>
-                <c:pt idx="236">
-                  <c:v/>
-                </c:pt>
-                <c:pt idx="237">
-                  <c:v/>
-                </c:pt>
-                <c:pt idx="238">
-                  <c:v/>
-                </c:pt>
-                <c:pt idx="239">
-                  <c:v/>
-                </c:pt>
-                <c:pt idx="240">
-                  <c:v/>
-                </c:pt>
-                <c:pt idx="241">
-                  <c:v/>
-                </c:pt>
-                <c:pt idx="242">
-                  <c:v/>
-                </c:pt>
-                <c:pt idx="243">
-                  <c:v/>
-                </c:pt>
-                <c:pt idx="244">
-                  <c:v/>
-                </c:pt>
-                <c:pt idx="245">
-                  <c:v/>
-                </c:pt>
-                <c:pt idx="246">
-                  <c:v/>
-                </c:pt>
-                <c:pt idx="247">
-                  <c:v/>
-                </c:pt>
-                <c:pt idx="248">
-                  <c:v/>
-                </c:pt>
-                <c:pt idx="249">
-                  <c:v/>
-                </c:pt>
-                <c:pt idx="250">
-                  <c:v/>
-                </c:pt>
-                <c:pt idx="251">
-                  <c:v/>
-                </c:pt>
-                <c:pt idx="252">
-                  <c:v/>
-                </c:pt>
-                <c:pt idx="253">
-                  <c:v/>
-                </c:pt>
-                <c:pt idx="254">
-                  <c:v/>
-                </c:pt>
-                <c:pt idx="255">
-                  <c:v/>
-                </c:pt>
-                <c:pt idx="256">
-                  <c:v/>
-                </c:pt>
-                <c:pt idx="257">
-                  <c:v/>
-                </c:pt>
-                <c:pt idx="258">
-                  <c:v/>
-                </c:pt>
-                <c:pt idx="259">
-                  <c:v/>
-                </c:pt>
-                <c:pt idx="260">
-                  <c:v/>
-                </c:pt>
                 <c:pt idx="261">
                   <c:v>2020</c:v>
                 </c:pt>
-                <c:pt idx="262">
-                  <c:v/>
-                </c:pt>
-                <c:pt idx="263">
-                  <c:v/>
-                </c:pt>
-                <c:pt idx="264">
-                  <c:v/>
-                </c:pt>
-                <c:pt idx="265">
-                  <c:v/>
-                </c:pt>
-                <c:pt idx="266">
-                  <c:v/>
-                </c:pt>
-                <c:pt idx="267">
-                  <c:v/>
-                </c:pt>
-                <c:pt idx="268">
-                  <c:v/>
-                </c:pt>
-                <c:pt idx="269">
-                  <c:v/>
-                </c:pt>
-                <c:pt idx="270">
-                  <c:v/>
-                </c:pt>
-                <c:pt idx="271">
-                  <c:v/>
-                </c:pt>
-                <c:pt idx="272">
-                  <c:v/>
-                </c:pt>
-                <c:pt idx="273">
-                  <c:v/>
-                </c:pt>
-                <c:pt idx="274">
-                  <c:v/>
-                </c:pt>
-                <c:pt idx="275">
-                  <c:v/>
-                </c:pt>
-                <c:pt idx="276">
-                  <c:v/>
-                </c:pt>
-                <c:pt idx="277">
-                  <c:v/>
-                </c:pt>
-                <c:pt idx="278">
-                  <c:v/>
-                </c:pt>
-                <c:pt idx="279">
-                  <c:v/>
-                </c:pt>
-                <c:pt idx="280">
-                  <c:v/>
-                </c:pt>
-                <c:pt idx="281">
-                  <c:v/>
-                </c:pt>
-                <c:pt idx="282">
-                  <c:v/>
-                </c:pt>
-                <c:pt idx="283">
-                  <c:v/>
-                </c:pt>
-                <c:pt idx="284">
-                  <c:v/>
-                </c:pt>
-                <c:pt idx="285">
-                  <c:v/>
-                </c:pt>
-                <c:pt idx="286">
-                  <c:v/>
-                </c:pt>
-                <c:pt idx="287">
-                  <c:v/>
-                </c:pt>
-                <c:pt idx="288">
-                  <c:v/>
-                </c:pt>
-                <c:pt idx="289">
-                  <c:v/>
-                </c:pt>
-                <c:pt idx="290">
-                  <c:v/>
-                </c:pt>
-                <c:pt idx="291">
-                  <c:v/>
-                </c:pt>
-                <c:pt idx="292">
-                  <c:v/>
-                </c:pt>
-                <c:pt idx="293">
-                  <c:v/>
-                </c:pt>
-                <c:pt idx="294">
-                  <c:v/>
-                </c:pt>
-                <c:pt idx="295">
-                  <c:v/>
-                </c:pt>
-                <c:pt idx="296">
-                  <c:v/>
-                </c:pt>
-                <c:pt idx="297">
-                  <c:v/>
-                </c:pt>
-                <c:pt idx="298">
-                  <c:v/>
-                </c:pt>
-                <c:pt idx="299">
-                  <c:v/>
-                </c:pt>
-                <c:pt idx="300">
-                  <c:v/>
-                </c:pt>
-                <c:pt idx="301">
-                  <c:v/>
-                </c:pt>
-                <c:pt idx="302">
-                  <c:v/>
-                </c:pt>
-                <c:pt idx="303">
-                  <c:v/>
-                </c:pt>
-                <c:pt idx="304">
-                  <c:v/>
-                </c:pt>
-                <c:pt idx="305">
-                  <c:v/>
-                </c:pt>
-                <c:pt idx="306">
-                  <c:v/>
-                </c:pt>
-                <c:pt idx="307">
-                  <c:v/>
-                </c:pt>
-                <c:pt idx="308">
-                  <c:v/>
-                </c:pt>
                 <c:pt idx="309">
                   <c:v>2024</c:v>
-                </c:pt>
-                <c:pt idx="310">
-                  <c:v/>
-                </c:pt>
-                <c:pt idx="311">
-                  <c:v/>
-                </c:pt>
-                <c:pt idx="312">
-                  <c:v/>
-                </c:pt>
-                <c:pt idx="313">
-                  <c:v/>
-                </c:pt>
-                <c:pt idx="314">
-                  <c:v/>
-                </c:pt>
-                <c:pt idx="315">
-                  <c:v/>
-                </c:pt>
-                <c:pt idx="316">
-                  <c:v/>
-                </c:pt>
-                <c:pt idx="317">
-                  <c:v/>
-                </c:pt>
-                <c:pt idx="318">
-                  <c:v/>
-                </c:pt>
-                <c:pt idx="319">
-                  <c:v/>
-                </c:pt>
-                <c:pt idx="320">
-                  <c:v/>
-                </c:pt>
-                <c:pt idx="321">
-                  <c:v/>
-                </c:pt>
-                <c:pt idx="322">
-                  <c:v/>
-                </c:pt>
-                <c:pt idx="323">
-                  <c:v/>
-                </c:pt>
-                <c:pt idx="324">
-                  <c:v/>
-                </c:pt>
-                <c:pt idx="325">
-                  <c:v/>
-                </c:pt>
-                <c:pt idx="326">
-                  <c:v/>
-                </c:pt>
-                <c:pt idx="327">
-                  <c:v/>
-                </c:pt>
-                <c:pt idx="328">
-                  <c:v/>
-                </c:pt>
-                <c:pt idx="329">
-                  <c:v/>
-                </c:pt>
-                <c:pt idx="330">
-                  <c:v/>
-                </c:pt>
-                <c:pt idx="331">
-                  <c:v/>
-                </c:pt>
-                <c:pt idx="332">
-                  <c:v/>
-                </c:pt>
-                <c:pt idx="333">
-                  <c:v/>
-                </c:pt>
-                <c:pt idx="334">
-                  <c:v/>
-                </c:pt>
-                <c:pt idx="335">
-                  <c:v/>
-                </c:pt>
-                <c:pt idx="336">
-                  <c:v/>
-                </c:pt>
-                <c:pt idx="337">
-                  <c:v/>
-                </c:pt>
-                <c:pt idx="338">
-                  <c:v/>
-                </c:pt>
-                <c:pt idx="339">
-                  <c:v/>
                 </c:pt>
               </c:strCache>
             </c:strRef>
@@ -3207,37 +1234,37 @@
                 <c:formatCode>General</c:formatCode>
                 <c:ptCount val="340"/>
                 <c:pt idx="0">
-                  <c:v>1.759</c:v>
+                  <c:v>1.7589999999999999</c:v>
                 </c:pt>
                 <c:pt idx="1">
-                  <c:v>1.507</c:v>
+                  <c:v>1.5069999999999999</c:v>
                 </c:pt>
                 <c:pt idx="2">
                   <c:v>1.629</c:v>
                 </c:pt>
                 <c:pt idx="3">
-                  <c:v>1.572</c:v>
+                  <c:v>1.5720000000000001</c:v>
                 </c:pt>
                 <c:pt idx="4">
-                  <c:v>1.338</c:v>
+                  <c:v>1.3380000000000001</c:v>
                 </c:pt>
                 <c:pt idx="5">
-                  <c:v>0.827</c:v>
+                  <c:v>0.82699999999999996</c:v>
                 </c:pt>
                 <c:pt idx="6">
                   <c:v>0.879</c:v>
                 </c:pt>
                 <c:pt idx="7">
-                  <c:v>1.134</c:v>
+                  <c:v>1.1339999999999999</c:v>
                 </c:pt>
                 <c:pt idx="8">
                   <c:v>2.117</c:v>
                 </c:pt>
                 <c:pt idx="9">
-                  <c:v>2.07</c:v>
+                  <c:v>2.0699999999999998</c:v>
                 </c:pt>
                 <c:pt idx="10">
-                  <c:v>1.993</c:v>
+                  <c:v>1.9930000000000001</c:v>
                 </c:pt>
                 <c:pt idx="11">
                   <c:v>1.716</c:v>
@@ -3249,7 +1276,7 @@
                   <c:v>1.448</c:v>
                 </c:pt>
                 <c:pt idx="14">
-                  <c:v>1.868</c:v>
+                  <c:v>1.8680000000000001</c:v>
                 </c:pt>
                 <c:pt idx="15">
                   <c:v>1.74</c:v>
@@ -3261,10 +1288,10 @@
                   <c:v>1.619</c:v>
                 </c:pt>
                 <c:pt idx="18">
-                  <c:v>1.743</c:v>
+                  <c:v>1.7430000000000001</c:v>
                 </c:pt>
                 <c:pt idx="19">
-                  <c:v>1.808</c:v>
+                  <c:v>1.8080000000000001</c:v>
                 </c:pt>
                 <c:pt idx="20">
                   <c:v>1.68</c:v>
@@ -3279,10 +1306,10 @@
                   <c:v>1.776</c:v>
                 </c:pt>
                 <c:pt idx="24">
-                  <c:v>1.739</c:v>
+                  <c:v>1.7390000000000001</c:v>
                 </c:pt>
                 <c:pt idx="25">
-                  <c:v>1.648</c:v>
+                  <c:v>1.6479999999999999</c:v>
                 </c:pt>
                 <c:pt idx="26">
                   <c:v>1.712</c:v>
@@ -3294,10 +1321,10 @@
                   <c:v>1.863</c:v>
                 </c:pt>
                 <c:pt idx="29">
-                  <c:v>1.824</c:v>
+                  <c:v>1.8240000000000001</c:v>
                 </c:pt>
                 <c:pt idx="30">
-                  <c:v>1.799</c:v>
+                  <c:v>1.7989999999999999</c:v>
                 </c:pt>
                 <c:pt idx="31">
                   <c:v>1.61</c:v>
@@ -3306,7 +1333,7 @@
                   <c:v>1.65</c:v>
                 </c:pt>
                 <c:pt idx="33">
-                  <c:v>1.455</c:v>
+                  <c:v>1.4550000000000001</c:v>
                 </c:pt>
                 <c:pt idx="34">
                   <c:v>1.323</c:v>
@@ -3321,19 +1348,19 @@
                   <c:v>1.216</c:v>
                 </c:pt>
                 <c:pt idx="38">
-                  <c:v>1.183</c:v>
+                  <c:v>1.1830000000000001</c:v>
                 </c:pt>
                 <c:pt idx="39">
                   <c:v>1.333</c:v>
                 </c:pt>
                 <c:pt idx="40">
-                  <c:v>1.328</c:v>
+                  <c:v>1.3280000000000001</c:v>
                 </c:pt>
                 <c:pt idx="41">
                   <c:v>1.409</c:v>
                 </c:pt>
                 <c:pt idx="42">
-                  <c:v>1.326</c:v>
+                  <c:v>1.3260000000000001</c:v>
                 </c:pt>
                 <c:pt idx="43">
                   <c:v>1.355</c:v>
@@ -3345,7 +1372,7 @@
                   <c:v>1.486</c:v>
                 </c:pt>
                 <c:pt idx="46">
-                  <c:v>1.511</c:v>
+                  <c:v>1.5109999999999999</c:v>
                 </c:pt>
                 <c:pt idx="47">
                   <c:v>1.399</c:v>
@@ -3357,118 +1384,118 @@
                   <c:v>1.371</c:v>
                 </c:pt>
                 <c:pt idx="50">
-                  <c:v>1.305</c:v>
+                  <c:v>1.3049999999999999</c:v>
                 </c:pt>
                 <c:pt idx="51">
-                  <c:v>1.314</c:v>
+                  <c:v>1.3140000000000001</c:v>
                 </c:pt>
                 <c:pt idx="52">
-                  <c:v>1.144</c:v>
+                  <c:v>1.1439999999999999</c:v>
                 </c:pt>
                 <c:pt idx="53">
                   <c:v>1.165</c:v>
                 </c:pt>
                 <c:pt idx="54">
-                  <c:v>0.988</c:v>
+                  <c:v>0.98799999999999999</c:v>
                 </c:pt>
                 <c:pt idx="55">
-                  <c:v>0.973</c:v>
+                  <c:v>0.97299999999999998</c:v>
                 </c:pt>
                 <c:pt idx="56">
-                  <c:v>0.906</c:v>
+                  <c:v>0.90600000000000003</c:v>
                 </c:pt>
                 <c:pt idx="57">
                   <c:v>0.81</c:v>
                 </c:pt>
                 <c:pt idx="58">
-                  <c:v>0.786</c:v>
+                  <c:v>0.78600000000000003</c:v>
                 </c:pt>
                 <c:pt idx="59">
-                  <c:v>0.705</c:v>
+                  <c:v>0.70499999999999996</c:v>
                 </c:pt>
                 <c:pt idx="60">
-                  <c:v>0.612</c:v>
+                  <c:v>0.61199999999999999</c:v>
                 </c:pt>
                 <c:pt idx="61">
-                  <c:v>0.538</c:v>
+                  <c:v>0.53800000000000003</c:v>
                 </c:pt>
                 <c:pt idx="62">
-                  <c:v>0.821</c:v>
+                  <c:v>0.82099999999999995</c:v>
                 </c:pt>
                 <c:pt idx="63">
-                  <c:v>0.938</c:v>
+                  <c:v>0.93799999999999994</c:v>
                 </c:pt>
                 <c:pt idx="64">
-                  <c:v>1.432</c:v>
+                  <c:v>1.4319999999999999</c:v>
                 </c:pt>
                 <c:pt idx="65">
-                  <c:v>1.398</c:v>
+                  <c:v>1.3979999999999999</c:v>
                 </c:pt>
                 <c:pt idx="66">
-                  <c:v>1.463</c:v>
+                  <c:v>1.4630000000000001</c:v>
                 </c:pt>
                 <c:pt idx="67">
-                  <c:v>1.315</c:v>
+                  <c:v>1.3149999999999999</c:v>
                 </c:pt>
                 <c:pt idx="68">
                   <c:v>1.363</c:v>
                 </c:pt>
                 <c:pt idx="69">
-                  <c:v>1.322</c:v>
+                  <c:v>1.3220000000000001</c:v>
                 </c:pt>
                 <c:pt idx="70">
-                  <c:v>1.243</c:v>
+                  <c:v>1.2430000000000001</c:v>
                 </c:pt>
                 <c:pt idx="71">
-                  <c:v>1.434</c:v>
+                  <c:v>1.4339999999999999</c:v>
                 </c:pt>
                 <c:pt idx="72">
-                  <c:v>1.535</c:v>
+                  <c:v>1.5349999999999999</c:v>
                 </c:pt>
                 <c:pt idx="73">
-                  <c:v>1.535</c:v>
+                  <c:v>1.5349999999999999</c:v>
                 </c:pt>
                 <c:pt idx="74">
                   <c:v>1.766</c:v>
                 </c:pt>
                 <c:pt idx="75">
-                  <c:v>1.854</c:v>
+                  <c:v>1.8540000000000001</c:v>
                 </c:pt>
                 <c:pt idx="76">
-                  <c:v>1.568</c:v>
+                  <c:v>1.5680000000000001</c:v>
                 </c:pt>
                 <c:pt idx="77">
-                  <c:v>1.451</c:v>
+                  <c:v>1.4510000000000001</c:v>
                 </c:pt>
                 <c:pt idx="78">
-                  <c:v>1.499</c:v>
+                  <c:v>1.4990000000000001</c:v>
                 </c:pt>
                 <c:pt idx="79">
-                  <c:v>1.463</c:v>
+                  <c:v>1.4630000000000001</c:v>
                 </c:pt>
                 <c:pt idx="80">
-                  <c:v>1.437</c:v>
+                  <c:v>1.4370000000000001</c:v>
                 </c:pt>
                 <c:pt idx="81">
                   <c:v>1.333</c:v>
                 </c:pt>
                 <c:pt idx="82">
-                  <c:v>1.469</c:v>
+                  <c:v>1.4690000000000001</c:v>
                 </c:pt>
                 <c:pt idx="83">
                   <c:v>1.333</c:v>
                 </c:pt>
                 <c:pt idx="84">
-                  <c:v>1.247</c:v>
+                  <c:v>1.2470000000000001</c:v>
                 </c:pt>
                 <c:pt idx="85">
                   <c:v>1.262</c:v>
                 </c:pt>
                 <c:pt idx="86">
-                  <c:v>1.174</c:v>
+                  <c:v>1.1739999999999999</c:v>
                 </c:pt>
                 <c:pt idx="87">
-                  <c:v>1.307</c:v>
+                  <c:v>1.3069999999999999</c:v>
                 </c:pt>
                 <c:pt idx="88">
                   <c:v>1.347</c:v>
@@ -3477,19 +1504,19 @@
                   <c:v>1.472</c:v>
                 </c:pt>
                 <c:pt idx="90">
-                  <c:v>1.549</c:v>
+                  <c:v>1.5489999999999999</c:v>
                 </c:pt>
                 <c:pt idx="91">
-                  <c:v>1.445</c:v>
+                  <c:v>1.4450000000000001</c:v>
                 </c:pt>
                 <c:pt idx="92">
-                  <c:v>1.473</c:v>
+                  <c:v>1.4730000000000001</c:v>
                 </c:pt>
                 <c:pt idx="93">
-                  <c:v>1.555</c:v>
+                  <c:v>1.5549999999999999</c:v>
                 </c:pt>
                 <c:pt idx="94">
-                  <c:v>1.586</c:v>
+                  <c:v>1.5860000000000001</c:v>
                 </c:pt>
                 <c:pt idx="95">
                   <c:v>1.754</c:v>
@@ -3501,13 +1528,13 @@
                   <c:v>1.831</c:v>
                 </c:pt>
                 <c:pt idx="98">
-                  <c:v>1.914</c:v>
+                  <c:v>1.9139999999999999</c:v>
                 </c:pt>
                 <c:pt idx="99">
-                  <c:v>1.932</c:v>
+                  <c:v>1.9319999999999999</c:v>
                 </c:pt>
                 <c:pt idx="100">
-                  <c:v>1.644</c:v>
+                  <c:v>1.6439999999999999</c:v>
                 </c:pt>
                 <c:pt idx="101">
                   <c:v>1.671</c:v>
@@ -3519,13 +1546,13 @@
                   <c:v>1.67</c:v>
                 </c:pt>
                 <c:pt idx="104">
-                  <c:v>1.678</c:v>
+                  <c:v>1.6779999999999999</c:v>
                 </c:pt>
                 <c:pt idx="105">
                   <c:v>1.704</c:v>
                 </c:pt>
                 <c:pt idx="106">
-                  <c:v>1.644</c:v>
+                  <c:v>1.6439999999999999</c:v>
                 </c:pt>
                 <c:pt idx="107">
                   <c:v>1.655</c:v>
@@ -3534,16 +1561,16 @@
                   <c:v>1.631</c:v>
                 </c:pt>
                 <c:pt idx="109">
-                  <c:v>1.751</c:v>
+                  <c:v>1.7509999999999999</c:v>
                 </c:pt>
                 <c:pt idx="110">
-                  <c:v>1.866</c:v>
+                  <c:v>1.8660000000000001</c:v>
                 </c:pt>
                 <c:pt idx="111">
-                  <c:v>1.801</c:v>
+                  <c:v>1.8009999999999999</c:v>
                 </c:pt>
                 <c:pt idx="112">
-                  <c:v>1.616</c:v>
+                  <c:v>1.6160000000000001</c:v>
                 </c:pt>
                 <c:pt idx="113">
                   <c:v>1.679</c:v>
@@ -3552,40 +1579,40 @@
                   <c:v>1.615</c:v>
                 </c:pt>
                 <c:pt idx="115">
-                  <c:v>1.499</c:v>
+                  <c:v>1.4990000000000001</c:v>
                 </c:pt>
                 <c:pt idx="116">
                   <c:v>1.502</c:v>
                 </c:pt>
                 <c:pt idx="117">
-                  <c:v>1.443</c:v>
+                  <c:v>1.4430000000000001</c:v>
                 </c:pt>
                 <c:pt idx="118">
                   <c:v>1.373</c:v>
                 </c:pt>
                 <c:pt idx="119">
-                  <c:v>1.285</c:v>
+                  <c:v>1.2849999999999999</c:v>
                 </c:pt>
                 <c:pt idx="120">
-                  <c:v>1.564</c:v>
+                  <c:v>1.5640000000000001</c:v>
                 </c:pt>
                 <c:pt idx="121">
                   <c:v>1.758</c:v>
                 </c:pt>
                 <c:pt idx="122">
-                  <c:v>1.606</c:v>
+                  <c:v>1.6060000000000001</c:v>
                 </c:pt>
                 <c:pt idx="123">
-                  <c:v>1.545</c:v>
+                  <c:v>1.5449999999999999</c:v>
                 </c:pt>
                 <c:pt idx="124">
                   <c:v>1.421</c:v>
                 </c:pt>
                 <c:pt idx="125">
-                  <c:v>1.465</c:v>
+                  <c:v>1.4650000000000001</c:v>
                 </c:pt>
                 <c:pt idx="126">
-                  <c:v>1.473</c:v>
+                  <c:v>1.4730000000000001</c:v>
                 </c:pt>
                 <c:pt idx="127">
                   <c:v>1.419</c:v>
@@ -3594,22 +1621,22 @@
                   <c:v>1.177</c:v>
                 </c:pt>
                 <c:pt idx="129">
-                  <c:v>1.303</c:v>
+                  <c:v>1.3029999999999999</c:v>
                 </c:pt>
                 <c:pt idx="130">
-                  <c:v>1.295</c:v>
+                  <c:v>1.2949999999999999</c:v>
                 </c:pt>
                 <c:pt idx="131">
-                  <c:v>1.342</c:v>
+                  <c:v>1.3420000000000001</c:v>
                 </c:pt>
                 <c:pt idx="132">
-                  <c:v>1.422</c:v>
+                  <c:v>1.4219999999999999</c:v>
                 </c:pt>
                 <c:pt idx="133">
                   <c:v>1.496</c:v>
                 </c:pt>
                 <c:pt idx="134">
-                  <c:v>1.362</c:v>
+                  <c:v>1.3620000000000001</c:v>
                 </c:pt>
                 <c:pt idx="135">
                   <c:v>1.421</c:v>
@@ -3627,19 +1654,19 @@
                   <c:v>1.29</c:v>
                 </c:pt>
                 <c:pt idx="140">
-                  <c:v>1.289</c:v>
+                  <c:v>1.2889999999999999</c:v>
                 </c:pt>
                 <c:pt idx="141">
                   <c:v>1.33</c:v>
                 </c:pt>
                 <c:pt idx="142">
-                  <c:v>1.318</c:v>
+                  <c:v>1.3180000000000001</c:v>
                 </c:pt>
                 <c:pt idx="143">
                   <c:v>1.395</c:v>
                 </c:pt>
                 <c:pt idx="144">
-                  <c:v>1.301</c:v>
+                  <c:v>1.3009999999999999</c:v>
                 </c:pt>
                 <c:pt idx="145">
                   <c:v>1.284</c:v>
@@ -3651,13 +1678,13 @@
                   <c:v>1.081</c:v>
                 </c:pt>
                 <c:pt idx="148">
-                  <c:v>0.992</c:v>
+                  <c:v>0.99199999999999999</c:v>
                 </c:pt>
                 <c:pt idx="149">
-                  <c:v>0.937</c:v>
+                  <c:v>0.93700000000000006</c:v>
                 </c:pt>
                 <c:pt idx="150">
-                  <c:v>0.937</c:v>
+                  <c:v>0.93700000000000006</c:v>
                 </c:pt>
                 <c:pt idx="151">
                   <c:v>1.19</c:v>
@@ -3672,16 +1699,16 @@
                   <c:v>1.266</c:v>
                 </c:pt>
                 <c:pt idx="155">
-                  <c:v>1.255</c:v>
+                  <c:v>1.2549999999999999</c:v>
                 </c:pt>
                 <c:pt idx="156">
-                  <c:v>1.217</c:v>
+                  <c:v>1.2170000000000001</c:v>
                 </c:pt>
                 <c:pt idx="157">
                   <c:v>1.169</c:v>
                 </c:pt>
                 <c:pt idx="158">
-                  <c:v>1.138</c:v>
+                  <c:v>1.1379999999999999</c:v>
                 </c:pt>
                 <c:pt idx="159">
                   <c:v>1.095</c:v>
@@ -3696,241 +1723,241 @@
                   <c:v>1.056</c:v>
                 </c:pt>
                 <c:pt idx="163">
-                  <c:v>1.082</c:v>
+                  <c:v>1.0820000000000001</c:v>
                 </c:pt>
                 <c:pt idx="164">
-                  <c:v>0.987</c:v>
+                  <c:v>0.98699999999999999</c:v>
                 </c:pt>
                 <c:pt idx="165">
-                  <c:v>0.974</c:v>
+                  <c:v>0.97399999999999998</c:v>
                 </c:pt>
                 <c:pt idx="166">
-                  <c:v>0.977</c:v>
+                  <c:v>0.97699999999999998</c:v>
                 </c:pt>
                 <c:pt idx="167">
-                  <c:v>0.988</c:v>
+                  <c:v>0.98799999999999999</c:v>
                 </c:pt>
                 <c:pt idx="168">
-                  <c:v>0.902</c:v>
+                  <c:v>0.90200000000000002</c:v>
                 </c:pt>
                 <c:pt idx="169">
-                  <c:v>0.848</c:v>
+                  <c:v>0.84799999999999998</c:v>
                 </c:pt>
                 <c:pt idx="170">
-                  <c:v>0.839</c:v>
+                  <c:v>0.83899999999999997</c:v>
                 </c:pt>
                 <c:pt idx="171">
-                  <c:v>0.802</c:v>
+                  <c:v>0.80200000000000005</c:v>
                 </c:pt>
                 <c:pt idx="172">
-                  <c:v>0.817</c:v>
+                  <c:v>0.81699999999999995</c:v>
                 </c:pt>
                 <c:pt idx="173">
-                  <c:v>0.774</c:v>
+                  <c:v>0.77400000000000002</c:v>
                 </c:pt>
                 <c:pt idx="174">
-                  <c:v>0.784</c:v>
+                  <c:v>0.78400000000000003</c:v>
                 </c:pt>
                 <c:pt idx="175">
                   <c:v>0.73</c:v>
                 </c:pt>
                 <c:pt idx="176">
-                  <c:v>0.794</c:v>
+                  <c:v>0.79400000000000004</c:v>
                 </c:pt>
                 <c:pt idx="177">
-                  <c:v>0.763</c:v>
+                  <c:v>0.76300000000000001</c:v>
                 </c:pt>
                 <c:pt idx="178">
-                  <c:v>0.681</c:v>
+                  <c:v>0.68100000000000005</c:v>
                 </c:pt>
                 <c:pt idx="179">
-                  <c:v>0.564</c:v>
+                  <c:v>0.56399999999999995</c:v>
                 </c:pt>
                 <c:pt idx="180">
-                  <c:v>0.611</c:v>
+                  <c:v>0.61099999999999999</c:v>
                 </c:pt>
                 <c:pt idx="181">
-                  <c:v>0.865</c:v>
+                  <c:v>0.86499999999999999</c:v>
                 </c:pt>
                 <c:pt idx="182">
-                  <c:v>0.845</c:v>
+                  <c:v>0.84499999999999997</c:v>
                 </c:pt>
                 <c:pt idx="183">
-                  <c:v>0.797</c:v>
+                  <c:v>0.79700000000000004</c:v>
                 </c:pt>
                 <c:pt idx="184">
-                  <c:v>0.735</c:v>
+                  <c:v>0.73499999999999999</c:v>
                 </c:pt>
                 <c:pt idx="185">
-                  <c:v>0.685</c:v>
+                  <c:v>0.68500000000000005</c:v>
                 </c:pt>
                 <c:pt idx="186">
-                  <c:v>0.603</c:v>
+                  <c:v>0.60299999999999998</c:v>
                 </c:pt>
                 <c:pt idx="187">
-                  <c:v>0.611</c:v>
+                  <c:v>0.61099999999999999</c:v>
                 </c:pt>
                 <c:pt idx="188">
-                  <c:v>0.736</c:v>
+                  <c:v>0.73599999999999999</c:v>
                 </c:pt>
                 <c:pt idx="189">
                   <c:v>0.627</c:v>
                 </c:pt>
                 <c:pt idx="190">
-                  <c:v>0.594</c:v>
+                  <c:v>0.59399999999999997</c:v>
                 </c:pt>
                 <c:pt idx="191">
-                  <c:v>0.641</c:v>
+                  <c:v>0.64100000000000001</c:v>
                 </c:pt>
                 <c:pt idx="192">
                   <c:v>0.623</c:v>
                 </c:pt>
                 <c:pt idx="193">
-                  <c:v>0.589</c:v>
+                  <c:v>0.58899999999999997</c:v>
                 </c:pt>
                 <c:pt idx="194">
-                  <c:v>0.564</c:v>
+                  <c:v>0.56399999999999995</c:v>
                 </c:pt>
                 <c:pt idx="195">
-                  <c:v>0.542</c:v>
+                  <c:v>0.54200000000000004</c:v>
                 </c:pt>
                 <c:pt idx="196">
-                  <c:v>0.508</c:v>
+                  <c:v>0.50800000000000001</c:v>
                 </c:pt>
                 <c:pt idx="197">
-                  <c:v>0.522</c:v>
+                  <c:v>0.52200000000000002</c:v>
                 </c:pt>
                 <c:pt idx="198">
-                  <c:v>0.466</c:v>
+                  <c:v>0.46600000000000003</c:v>
                 </c:pt>
                 <c:pt idx="199">
-                  <c:v>0.431</c:v>
+                  <c:v>0.43099999999999999</c:v>
                 </c:pt>
                 <c:pt idx="200">
-                  <c:v>0.325</c:v>
+                  <c:v>0.32500000000000001</c:v>
                 </c:pt>
                 <c:pt idx="201">
-                  <c:v>0.288</c:v>
+                  <c:v>0.28799999999999998</c:v>
                 </c:pt>
                 <c:pt idx="202">
-                  <c:v>0.349</c:v>
+                  <c:v>0.34899999999999998</c:v>
                 </c:pt>
                 <c:pt idx="203">
-                  <c:v>0.398</c:v>
+                  <c:v>0.39800000000000002</c:v>
                 </c:pt>
                 <c:pt idx="204">
-                  <c:v>0.336</c:v>
+                  <c:v>0.33600000000000002</c:v>
                 </c:pt>
                 <c:pt idx="205">
-                  <c:v>0.406</c:v>
+                  <c:v>0.40600000000000003</c:v>
                 </c:pt>
                 <c:pt idx="206">
-                  <c:v>0.451</c:v>
+                  <c:v>0.45100000000000001</c:v>
                 </c:pt>
                 <c:pt idx="207">
-                  <c:v>0.414</c:v>
+                  <c:v>0.41399999999999998</c:v>
                 </c:pt>
                 <c:pt idx="208">
-                  <c:v>0.392</c:v>
+                  <c:v>0.39200000000000002</c:v>
                 </c:pt>
                 <c:pt idx="209">
-                  <c:v>0.348</c:v>
+                  <c:v>0.34799999999999998</c:v>
                 </c:pt>
                 <c:pt idx="210">
-                  <c:v>0.306</c:v>
+                  <c:v>0.30599999999999999</c:v>
                 </c:pt>
                 <c:pt idx="211">
                   <c:v>0.317</c:v>
                 </c:pt>
                 <c:pt idx="212">
-                  <c:v>0.267</c:v>
+                  <c:v>0.26700000000000002</c:v>
                 </c:pt>
                 <c:pt idx="213">
                   <c:v>0.104</c:v>
                 </c:pt>
                 <c:pt idx="214">
-                  <c:v>-0.055</c:v>
+                  <c:v>-5.5E-2</c:v>
                 </c:pt>
                 <c:pt idx="215">
-                  <c:v>-0.049</c:v>
+                  <c:v>-4.9000000000000002E-2</c:v>
                 </c:pt>
                 <c:pt idx="216">
-                  <c:v>-0.082</c:v>
+                  <c:v>-8.2000000000000003E-2</c:v>
                 </c:pt>
                 <c:pt idx="217">
                   <c:v>-0.112</c:v>
                 </c:pt>
                 <c:pt idx="218">
-                  <c:v>-0.237</c:v>
+                  <c:v>-0.23699999999999999</c:v>
                 </c:pt>
                 <c:pt idx="219">
-                  <c:v>-0.178</c:v>
+                  <c:v>-0.17799999999999999</c:v>
                 </c:pt>
                 <c:pt idx="220">
-                  <c:v>-0.058</c:v>
+                  <c:v>-5.8000000000000003E-2</c:v>
                 </c:pt>
                 <c:pt idx="221">
-                  <c:v>-0.084</c:v>
+                  <c:v>-8.4000000000000005E-2</c:v>
                 </c:pt>
                 <c:pt idx="222">
-                  <c:v>-0.049</c:v>
+                  <c:v>-4.9000000000000002E-2</c:v>
                 </c:pt>
                 <c:pt idx="223">
-                  <c:v>0.021</c:v>
+                  <c:v>2.1000000000000001E-2</c:v>
                 </c:pt>
                 <c:pt idx="224">
-                  <c:v>0.043</c:v>
+                  <c:v>4.2999999999999997E-2</c:v>
                 </c:pt>
                 <c:pt idx="225">
-                  <c:v>0.087</c:v>
+                  <c:v>8.6999999999999994E-2</c:v>
                 </c:pt>
                 <c:pt idx="226">
-                  <c:v>0.059</c:v>
+                  <c:v>5.8999999999999997E-2</c:v>
                 </c:pt>
                 <c:pt idx="227">
-                  <c:v>0.067</c:v>
+                  <c:v>6.7000000000000004E-2</c:v>
                 </c:pt>
                 <c:pt idx="228">
-                  <c:v>0.016</c:v>
+                  <c:v>1.6E-2</c:v>
                 </c:pt>
                 <c:pt idx="229">
                   <c:v>0.05</c:v>
                 </c:pt>
                 <c:pt idx="230">
-                  <c:v>0.086</c:v>
+                  <c:v>8.5999999999999993E-2</c:v>
                 </c:pt>
                 <c:pt idx="231">
-                  <c:v>0.078</c:v>
+                  <c:v>7.8E-2</c:v>
                 </c:pt>
                 <c:pt idx="232">
-                  <c:v>0.008</c:v>
+                  <c:v>8.0000000000000002E-3</c:v>
                 </c:pt>
                 <c:pt idx="233">
-                  <c:v>0.062</c:v>
+                  <c:v>6.2E-2</c:v>
                 </c:pt>
                 <c:pt idx="234">
-                  <c:v>0.071</c:v>
+                  <c:v>7.0999999999999994E-2</c:v>
                 </c:pt>
                 <c:pt idx="235">
                   <c:v>0.04</c:v>
                 </c:pt>
                 <c:pt idx="236">
-                  <c:v>0.047</c:v>
+                  <c:v>4.7E-2</c:v>
                 </c:pt>
                 <c:pt idx="237">
-                  <c:v>0.085</c:v>
+                  <c:v>8.5000000000000006E-2</c:v>
                 </c:pt>
                 <c:pt idx="238">
-                  <c:v>0.054</c:v>
+                  <c:v>5.3999999999999999E-2</c:v>
                 </c:pt>
                 <c:pt idx="239">
-                  <c:v>0.043</c:v>
+                  <c:v>4.2999999999999997E-2</c:v>
                 </c:pt>
                 <c:pt idx="240">
-                  <c:v>0.055</c:v>
+                  <c:v>5.5E-2</c:v>
                 </c:pt>
                 <c:pt idx="241">
-                  <c:v>0.039</c:v>
+                  <c:v>3.9E-2</c:v>
                 </c:pt>
                 <c:pt idx="242">
                   <c:v>0.04</c:v>
@@ -3942,31 +1969,31 @@
                   <c:v>0.11</c:v>
                 </c:pt>
                 <c:pt idx="245">
-                  <c:v>0.134</c:v>
+                  <c:v>0.13400000000000001</c:v>
                 </c:pt>
                 <c:pt idx="246">
                   <c:v>0.127</c:v>
                 </c:pt>
                 <c:pt idx="247">
-                  <c:v>0.097</c:v>
+                  <c:v>9.7000000000000003E-2</c:v>
                 </c:pt>
                 <c:pt idx="248">
-                  <c:v>0.013</c:v>
+                  <c:v>1.2999999999999999E-2</c:v>
                 </c:pt>
                 <c:pt idx="249">
-                  <c:v>0.006</c:v>
+                  <c:v>6.0000000000000001E-3</c:v>
                 </c:pt>
                 <c:pt idx="250">
-                  <c:v>-0.019</c:v>
+                  <c:v>-1.9E-2</c:v>
                 </c:pt>
                 <c:pt idx="251">
-                  <c:v>-0.082</c:v>
+                  <c:v>-8.2000000000000003E-2</c:v>
                 </c:pt>
                 <c:pt idx="252">
-                  <c:v>-0.045</c:v>
+                  <c:v>-4.4999999999999998E-2</c:v>
                 </c:pt>
                 <c:pt idx="253">
-                  <c:v>-0.092</c:v>
+                  <c:v>-9.1999999999999998E-2</c:v>
                 </c:pt>
                 <c:pt idx="254">
                   <c:v>-0.156</c:v>
@@ -3975,94 +2002,94 @@
                   <c:v>-0.157</c:v>
                 </c:pt>
                 <c:pt idx="256">
-                  <c:v>-0.275</c:v>
+                  <c:v>-0.27500000000000002</c:v>
                 </c:pt>
                 <c:pt idx="257">
-                  <c:v>-0.206</c:v>
+                  <c:v>-0.20599999999999999</c:v>
                 </c:pt>
                 <c:pt idx="258">
-                  <c:v>-0.139</c:v>
+                  <c:v>-0.13900000000000001</c:v>
                 </c:pt>
                 <c:pt idx="259">
-                  <c:v>-0.075</c:v>
+                  <c:v>-7.4999999999999997E-2</c:v>
                 </c:pt>
                 <c:pt idx="260">
-                  <c:v>-0.015</c:v>
+                  <c:v>-1.4999999999999999E-2</c:v>
                 </c:pt>
                 <c:pt idx="261">
-                  <c:v>-0.061</c:v>
+                  <c:v>-6.0999999999999999E-2</c:v>
                 </c:pt>
                 <c:pt idx="262">
                   <c:v>-0.153</c:v>
                 </c:pt>
                 <c:pt idx="263">
-                  <c:v>0.031</c:v>
+                  <c:v>3.1E-2</c:v>
                 </c:pt>
                 <c:pt idx="264">
-                  <c:v>-0.036</c:v>
+                  <c:v>-3.5999999999999997E-2</c:v>
                 </c:pt>
                 <c:pt idx="265">
-                  <c:v>0.009</c:v>
+                  <c:v>8.9999999999999993E-3</c:v>
                 </c:pt>
                 <c:pt idx="266">
-                  <c:v>0.042</c:v>
+                  <c:v>4.2000000000000003E-2</c:v>
                 </c:pt>
                 <c:pt idx="267">
-                  <c:v>0.018</c:v>
+                  <c:v>1.7999999999999999E-2</c:v>
                 </c:pt>
                 <c:pt idx="268">
-                  <c:v>0.056</c:v>
+                  <c:v>5.6000000000000001E-2</c:v>
                 </c:pt>
                 <c:pt idx="269">
-                  <c:v>0.027</c:v>
+                  <c:v>2.7E-2</c:v>
                 </c:pt>
                 <c:pt idx="270">
-                  <c:v>0.041</c:v>
+                  <c:v>4.1000000000000002E-2</c:v>
                 </c:pt>
                 <c:pt idx="271">
-                  <c:v>0.034</c:v>
+                  <c:v>3.4000000000000002E-2</c:v>
                 </c:pt>
                 <c:pt idx="272">
-                  <c:v>0.035</c:v>
+                  <c:v>3.5000000000000003E-2</c:v>
                 </c:pt>
                 <c:pt idx="273">
-                  <c:v>0.056</c:v>
+                  <c:v>5.6000000000000001E-2</c:v>
                 </c:pt>
                 <c:pt idx="274">
-                  <c:v>0.168</c:v>
+                  <c:v>0.16800000000000001</c:v>
                 </c:pt>
                 <c:pt idx="275">
                   <c:v>0.104</c:v>
                 </c:pt>
                 <c:pt idx="276">
-                  <c:v>0.095</c:v>
+                  <c:v>9.5000000000000001E-2</c:v>
                 </c:pt>
                 <c:pt idx="277">
-                  <c:v>0.084</c:v>
+                  <c:v>8.4000000000000005E-2</c:v>
                 </c:pt>
                 <c:pt idx="278">
-                  <c:v>0.07</c:v>
+                  <c:v>7.0000000000000007E-2</c:v>
                 </c:pt>
                 <c:pt idx="279">
-                  <c:v>0.022</c:v>
+                  <c:v>2.1999999999999999E-2</c:v>
                 </c:pt>
                 <c:pt idx="280">
                   <c:v>0.03</c:v>
                 </c:pt>
                 <c:pt idx="281">
-                  <c:v>0.081</c:v>
+                  <c:v>8.1000000000000003E-2</c:v>
                 </c:pt>
                 <c:pt idx="282">
-                  <c:v>0.101</c:v>
+                  <c:v>0.10100000000000001</c:v>
                 </c:pt>
                 <c:pt idx="283">
-                  <c:v>0.067</c:v>
+                  <c:v>6.7000000000000004E-2</c:v>
                 </c:pt>
                 <c:pt idx="284">
-                  <c:v>0.089</c:v>
+                  <c:v>8.8999999999999996E-2</c:v>
                 </c:pt>
                 <c:pt idx="285">
-                  <c:v>0.177</c:v>
+                  <c:v>0.17699999999999999</c:v>
                 </c:pt>
                 <c:pt idx="286">
                   <c:v>0.191</c:v>
@@ -4077,67 +2104,67 @@
                   <c:v>0.246</c:v>
                 </c:pt>
                 <c:pt idx="290">
-                  <c:v>0.242</c:v>
+                  <c:v>0.24199999999999999</c:v>
                 </c:pt>
                 <c:pt idx="291">
                   <c:v>0.185</c:v>
                 </c:pt>
                 <c:pt idx="292">
-                  <c:v>0.235</c:v>
+                  <c:v>0.23499999999999999</c:v>
                 </c:pt>
                 <c:pt idx="293">
-                  <c:v>0.277</c:v>
+                  <c:v>0.27700000000000002</c:v>
                 </c:pt>
                 <c:pt idx="294">
                   <c:v>0.253</c:v>
                 </c:pt>
                 <c:pt idx="295">
-                  <c:v>0.276</c:v>
+                  <c:v>0.27600000000000002</c:v>
                 </c:pt>
                 <c:pt idx="296">
-                  <c:v>0.454</c:v>
+                  <c:v>0.45400000000000001</c:v>
                 </c:pt>
                 <c:pt idx="297">
-                  <c:v>0.511</c:v>
+                  <c:v>0.51100000000000001</c:v>
                 </c:pt>
                 <c:pt idx="298">
-                  <c:v>0.524</c:v>
+                  <c:v>0.52400000000000002</c:v>
                 </c:pt>
                 <c:pt idx="299">
-                  <c:v>0.389</c:v>
+                  <c:v>0.38900000000000001</c:v>
                 </c:pt>
                 <c:pt idx="300">
-                  <c:v>0.403</c:v>
+                  <c:v>0.40300000000000002</c:v>
                 </c:pt>
                 <c:pt idx="301">
-                  <c:v>0.448</c:v>
+                  <c:v>0.44800000000000001</c:v>
                 </c:pt>
                 <c:pt idx="302">
-                  <c:v>0.426</c:v>
+                  <c:v>0.42599999999999999</c:v>
                 </c:pt>
                 <c:pt idx="303">
-                  <c:v>0.605</c:v>
+                  <c:v>0.60499999999999998</c:v>
                 </c:pt>
                 <c:pt idx="304">
-                  <c:v>0.657</c:v>
+                  <c:v>0.65700000000000003</c:v>
                 </c:pt>
                 <c:pt idx="305">
-                  <c:v>0.774</c:v>
+                  <c:v>0.77400000000000002</c:v>
                 </c:pt>
                 <c:pt idx="306">
-                  <c:v>0.952</c:v>
+                  <c:v>0.95199999999999996</c:v>
                 </c:pt>
                 <c:pt idx="307">
-                  <c:v>0.691</c:v>
+                  <c:v>0.69099999999999995</c:v>
                 </c:pt>
                 <c:pt idx="308">
-                  <c:v>0.647</c:v>
+                  <c:v>0.64700000000000002</c:v>
                 </c:pt>
                 <c:pt idx="309">
-                  <c:v>0.737</c:v>
+                  <c:v>0.73699999999999999</c:v>
                 </c:pt>
                 <c:pt idx="310">
-                  <c:v>0.724</c:v>
+                  <c:v>0.72399999999999998</c:v>
                 </c:pt>
                 <c:pt idx="311">
                   <c:v>0.75</c:v>
@@ -4149,22 +2176,22 @@
                   <c:v>1.08</c:v>
                 </c:pt>
                 <c:pt idx="314">
-                  <c:v>1.062</c:v>
+                  <c:v>1.0620000000000001</c:v>
                 </c:pt>
                 <c:pt idx="315">
                   <c:v>1.07</c:v>
                 </c:pt>
                 <c:pt idx="316">
-                  <c:v>0.922</c:v>
+                  <c:v>0.92200000000000004</c:v>
                 </c:pt>
                 <c:pt idx="317">
-                  <c:v>0.894</c:v>
+                  <c:v>0.89400000000000002</c:v>
                 </c:pt>
                 <c:pt idx="318">
-                  <c:v>0.947</c:v>
+                  <c:v>0.94699999999999995</c:v>
                 </c:pt>
                 <c:pt idx="319">
-                  <c:v>1.064</c:v>
+                  <c:v>1.0640000000000001</c:v>
                 </c:pt>
                 <c:pt idx="320">
                   <c:v>1.111</c:v>
@@ -4173,10 +2200,10 @@
                   <c:v>1.25</c:v>
                 </c:pt>
                 <c:pt idx="322">
-                  <c:v>1.378</c:v>
+                  <c:v>1.3779999999999999</c:v>
                 </c:pt>
                 <c:pt idx="323">
-                  <c:v>1.497</c:v>
+                  <c:v>1.4970000000000001</c:v>
                 </c:pt>
                 <c:pt idx="324">
                   <c:v>1.33</c:v>
@@ -4188,31 +2215,31 @@
                   <c:v>1.462</c:v>
                 </c:pt>
                 <c:pt idx="327">
-                  <c:v>1.559</c:v>
+                  <c:v>1.5589999999999999</c:v>
                 </c:pt>
                 <c:pt idx="328">
                   <c:v>1.613</c:v>
                 </c:pt>
                 <c:pt idx="329">
-                  <c:v>1.662</c:v>
+                  <c:v>1.6619999999999999</c:v>
                 </c:pt>
                 <c:pt idx="330">
                   <c:v>1.67</c:v>
                 </c:pt>
                 <c:pt idx="331">
-                  <c:v>1.812</c:v>
+                  <c:v>1.8120000000000001</c:v>
                 </c:pt>
                 <c:pt idx="332">
-                  <c:v>2.066</c:v>
+                  <c:v>2.0659999999999998</c:v>
                 </c:pt>
                 <c:pt idx="333">
-                  <c:v>2.247</c:v>
+                  <c:v>2.2469999999999999</c:v>
                 </c:pt>
                 <c:pt idx="334">
-                  <c:v>2.132</c:v>
+                  <c:v>2.1320000000000001</c:v>
                 </c:pt>
                 <c:pt idx="335">
-                  <c:v>2.366</c:v>
+                  <c:v>2.3660000000000001</c:v>
                 </c:pt>
                 <c:pt idx="336">
                   <c:v>2.52</c:v>
@@ -4224,12 +2251,17 @@
                   <c:v>2.69</c:v>
                 </c:pt>
                 <c:pt idx="339">
-                  <c:v>2.801</c:v>
+                  <c:v>2.8010000000000002</c:v>
                 </c:pt>
               </c:numCache>
             </c:numRef>
           </c:val>
           <c:smooth val="0"/>
+          <c:extLst>
+            <c:ext xmlns:c16="http://schemas.microsoft.com/office/drawing/2014/chart" uri="{C3380CC4-5D6E-409C-BE32-E72D297353CC}">
+              <c16:uniqueId val="{00000001-F378-454C-9F10-9F4400886F81}"/>
+            </c:ext>
+          </c:extLst>
         </c:ser>
         <c:ser>
           <c:idx val="2"/>
@@ -4260,1025 +2292,26 @@
               <c:f>Sheet1!$A$2:$A$341</c:f>
               <c:strCache>
                 <c:ptCount val="340"/>
-                <c:pt idx="0">
-                  <c:v/>
-                </c:pt>
-                <c:pt idx="1">
-                  <c:v/>
-                </c:pt>
-                <c:pt idx="2">
-                  <c:v/>
-                </c:pt>
-                <c:pt idx="3">
-                  <c:v/>
-                </c:pt>
-                <c:pt idx="4">
-                  <c:v/>
-                </c:pt>
-                <c:pt idx="5">
-                  <c:v/>
-                </c:pt>
-                <c:pt idx="6">
-                  <c:v/>
-                </c:pt>
-                <c:pt idx="7">
-                  <c:v/>
-                </c:pt>
-                <c:pt idx="8">
-                  <c:v/>
-                </c:pt>
-                <c:pt idx="9">
-                  <c:v/>
-                </c:pt>
-                <c:pt idx="10">
-                  <c:v/>
-                </c:pt>
-                <c:pt idx="11">
-                  <c:v/>
-                </c:pt>
-                <c:pt idx="12">
-                  <c:v/>
-                </c:pt>
-                <c:pt idx="13">
-                  <c:v/>
-                </c:pt>
-                <c:pt idx="14">
-                  <c:v/>
-                </c:pt>
-                <c:pt idx="15">
-                  <c:v/>
-                </c:pt>
-                <c:pt idx="16">
-                  <c:v/>
-                </c:pt>
-                <c:pt idx="17">
-                  <c:v/>
-                </c:pt>
-                <c:pt idx="18">
-                  <c:v/>
-                </c:pt>
-                <c:pt idx="19">
-                  <c:v/>
-                </c:pt>
-                <c:pt idx="20">
-                  <c:v/>
-                </c:pt>
                 <c:pt idx="21">
                   <c:v>2000</c:v>
                 </c:pt>
-                <c:pt idx="22">
-                  <c:v/>
-                </c:pt>
-                <c:pt idx="23">
-                  <c:v/>
-                </c:pt>
-                <c:pt idx="24">
-                  <c:v/>
-                </c:pt>
-                <c:pt idx="25">
-                  <c:v/>
-                </c:pt>
-                <c:pt idx="26">
-                  <c:v/>
-                </c:pt>
-                <c:pt idx="27">
-                  <c:v/>
-                </c:pt>
-                <c:pt idx="28">
-                  <c:v/>
-                </c:pt>
-                <c:pt idx="29">
-                  <c:v/>
-                </c:pt>
-                <c:pt idx="30">
-                  <c:v/>
-                </c:pt>
-                <c:pt idx="31">
-                  <c:v/>
-                </c:pt>
-                <c:pt idx="32">
-                  <c:v/>
-                </c:pt>
-                <c:pt idx="33">
-                  <c:v/>
-                </c:pt>
-                <c:pt idx="34">
-                  <c:v/>
-                </c:pt>
-                <c:pt idx="35">
-                  <c:v/>
-                </c:pt>
-                <c:pt idx="36">
-                  <c:v/>
-                </c:pt>
-                <c:pt idx="37">
-                  <c:v/>
-                </c:pt>
-                <c:pt idx="38">
-                  <c:v/>
-                </c:pt>
-                <c:pt idx="39">
-                  <c:v/>
-                </c:pt>
-                <c:pt idx="40">
-                  <c:v/>
-                </c:pt>
-                <c:pt idx="41">
-                  <c:v/>
-                </c:pt>
-                <c:pt idx="42">
-                  <c:v/>
-                </c:pt>
-                <c:pt idx="43">
-                  <c:v/>
-                </c:pt>
-                <c:pt idx="44">
-                  <c:v/>
-                </c:pt>
-                <c:pt idx="45">
-                  <c:v/>
-                </c:pt>
-                <c:pt idx="46">
-                  <c:v/>
-                </c:pt>
-                <c:pt idx="47">
-                  <c:v/>
-                </c:pt>
-                <c:pt idx="48">
-                  <c:v/>
-                </c:pt>
-                <c:pt idx="49">
-                  <c:v/>
-                </c:pt>
-                <c:pt idx="50">
-                  <c:v/>
-                </c:pt>
-                <c:pt idx="51">
-                  <c:v/>
-                </c:pt>
-                <c:pt idx="52">
-                  <c:v/>
-                </c:pt>
-                <c:pt idx="53">
-                  <c:v/>
-                </c:pt>
-                <c:pt idx="54">
-                  <c:v/>
-                </c:pt>
-                <c:pt idx="55">
-                  <c:v/>
-                </c:pt>
-                <c:pt idx="56">
-                  <c:v/>
-                </c:pt>
-                <c:pt idx="57">
-                  <c:v/>
-                </c:pt>
-                <c:pt idx="58">
-                  <c:v/>
-                </c:pt>
-                <c:pt idx="59">
-                  <c:v/>
-                </c:pt>
-                <c:pt idx="60">
-                  <c:v/>
-                </c:pt>
-                <c:pt idx="61">
-                  <c:v/>
-                </c:pt>
-                <c:pt idx="62">
-                  <c:v/>
-                </c:pt>
-                <c:pt idx="63">
-                  <c:v/>
-                </c:pt>
-                <c:pt idx="64">
-                  <c:v/>
-                </c:pt>
-                <c:pt idx="65">
-                  <c:v/>
-                </c:pt>
-                <c:pt idx="66">
-                  <c:v/>
-                </c:pt>
-                <c:pt idx="67">
-                  <c:v/>
-                </c:pt>
-                <c:pt idx="68">
-                  <c:v/>
-                </c:pt>
                 <c:pt idx="69">
                   <c:v>2004</c:v>
                 </c:pt>
-                <c:pt idx="70">
-                  <c:v/>
-                </c:pt>
-                <c:pt idx="71">
-                  <c:v/>
-                </c:pt>
-                <c:pt idx="72">
-                  <c:v/>
-                </c:pt>
-                <c:pt idx="73">
-                  <c:v/>
-                </c:pt>
-                <c:pt idx="74">
-                  <c:v/>
-                </c:pt>
-                <c:pt idx="75">
-                  <c:v/>
-                </c:pt>
-                <c:pt idx="76">
-                  <c:v/>
-                </c:pt>
-                <c:pt idx="77">
-                  <c:v/>
-                </c:pt>
-                <c:pt idx="78">
-                  <c:v/>
-                </c:pt>
-                <c:pt idx="79">
-                  <c:v/>
-                </c:pt>
-                <c:pt idx="80">
-                  <c:v/>
-                </c:pt>
-                <c:pt idx="81">
-                  <c:v/>
-                </c:pt>
-                <c:pt idx="82">
-                  <c:v/>
-                </c:pt>
-                <c:pt idx="83">
-                  <c:v/>
-                </c:pt>
-                <c:pt idx="84">
-                  <c:v/>
-                </c:pt>
-                <c:pt idx="85">
-                  <c:v/>
-                </c:pt>
-                <c:pt idx="86">
-                  <c:v/>
-                </c:pt>
-                <c:pt idx="87">
-                  <c:v/>
-                </c:pt>
-                <c:pt idx="88">
-                  <c:v/>
-                </c:pt>
-                <c:pt idx="89">
-                  <c:v/>
-                </c:pt>
-                <c:pt idx="90">
-                  <c:v/>
-                </c:pt>
-                <c:pt idx="91">
-                  <c:v/>
-                </c:pt>
-                <c:pt idx="92">
-                  <c:v/>
-                </c:pt>
-                <c:pt idx="93">
-                  <c:v/>
-                </c:pt>
-                <c:pt idx="94">
-                  <c:v/>
-                </c:pt>
-                <c:pt idx="95">
-                  <c:v/>
-                </c:pt>
-                <c:pt idx="96">
-                  <c:v/>
-                </c:pt>
-                <c:pt idx="97">
-                  <c:v/>
-                </c:pt>
-                <c:pt idx="98">
-                  <c:v/>
-                </c:pt>
-                <c:pt idx="99">
-                  <c:v/>
-                </c:pt>
-                <c:pt idx="100">
-                  <c:v/>
-                </c:pt>
-                <c:pt idx="101">
-                  <c:v/>
-                </c:pt>
-                <c:pt idx="102">
-                  <c:v/>
-                </c:pt>
-                <c:pt idx="103">
-                  <c:v/>
-                </c:pt>
-                <c:pt idx="104">
-                  <c:v/>
-                </c:pt>
-                <c:pt idx="105">
-                  <c:v/>
-                </c:pt>
-                <c:pt idx="106">
-                  <c:v/>
-                </c:pt>
-                <c:pt idx="107">
-                  <c:v/>
-                </c:pt>
-                <c:pt idx="108">
-                  <c:v/>
-                </c:pt>
-                <c:pt idx="109">
-                  <c:v/>
-                </c:pt>
-                <c:pt idx="110">
-                  <c:v/>
-                </c:pt>
-                <c:pt idx="111">
-                  <c:v/>
-                </c:pt>
-                <c:pt idx="112">
-                  <c:v/>
-                </c:pt>
-                <c:pt idx="113">
-                  <c:v/>
-                </c:pt>
-                <c:pt idx="114">
-                  <c:v/>
-                </c:pt>
-                <c:pt idx="115">
-                  <c:v/>
-                </c:pt>
-                <c:pt idx="116">
-                  <c:v/>
-                </c:pt>
                 <c:pt idx="117">
                   <c:v>2008</c:v>
                 </c:pt>
-                <c:pt idx="118">
-                  <c:v/>
-                </c:pt>
-                <c:pt idx="119">
-                  <c:v/>
-                </c:pt>
-                <c:pt idx="120">
-                  <c:v/>
-                </c:pt>
-                <c:pt idx="121">
-                  <c:v/>
-                </c:pt>
-                <c:pt idx="122">
-                  <c:v/>
-                </c:pt>
-                <c:pt idx="123">
-                  <c:v/>
-                </c:pt>
-                <c:pt idx="124">
-                  <c:v/>
-                </c:pt>
-                <c:pt idx="125">
-                  <c:v/>
-                </c:pt>
-                <c:pt idx="126">
-                  <c:v/>
-                </c:pt>
-                <c:pt idx="127">
-                  <c:v/>
-                </c:pt>
-                <c:pt idx="128">
-                  <c:v/>
-                </c:pt>
-                <c:pt idx="129">
-                  <c:v/>
-                </c:pt>
-                <c:pt idx="130">
-                  <c:v/>
-                </c:pt>
-                <c:pt idx="131">
-                  <c:v/>
-                </c:pt>
-                <c:pt idx="132">
-                  <c:v/>
-                </c:pt>
-                <c:pt idx="133">
-                  <c:v/>
-                </c:pt>
-                <c:pt idx="134">
-                  <c:v/>
-                </c:pt>
-                <c:pt idx="135">
-                  <c:v/>
-                </c:pt>
-                <c:pt idx="136">
-                  <c:v/>
-                </c:pt>
-                <c:pt idx="137">
-                  <c:v/>
-                </c:pt>
-                <c:pt idx="138">
-                  <c:v/>
-                </c:pt>
-                <c:pt idx="139">
-                  <c:v/>
-                </c:pt>
-                <c:pt idx="140">
-                  <c:v/>
-                </c:pt>
-                <c:pt idx="141">
-                  <c:v/>
-                </c:pt>
-                <c:pt idx="142">
-                  <c:v/>
-                </c:pt>
-                <c:pt idx="143">
-                  <c:v/>
-                </c:pt>
-                <c:pt idx="144">
-                  <c:v/>
-                </c:pt>
-                <c:pt idx="145">
-                  <c:v/>
-                </c:pt>
-                <c:pt idx="146">
-                  <c:v/>
-                </c:pt>
-                <c:pt idx="147">
-                  <c:v/>
-                </c:pt>
-                <c:pt idx="148">
-                  <c:v/>
-                </c:pt>
-                <c:pt idx="149">
-                  <c:v/>
-                </c:pt>
-                <c:pt idx="150">
-                  <c:v/>
-                </c:pt>
-                <c:pt idx="151">
-                  <c:v/>
-                </c:pt>
-                <c:pt idx="152">
-                  <c:v/>
-                </c:pt>
-                <c:pt idx="153">
-                  <c:v/>
-                </c:pt>
-                <c:pt idx="154">
-                  <c:v/>
-                </c:pt>
-                <c:pt idx="155">
-                  <c:v/>
-                </c:pt>
-                <c:pt idx="156">
-                  <c:v/>
-                </c:pt>
-                <c:pt idx="157">
-                  <c:v/>
-                </c:pt>
-                <c:pt idx="158">
-                  <c:v/>
-                </c:pt>
-                <c:pt idx="159">
-                  <c:v/>
-                </c:pt>
-                <c:pt idx="160">
-                  <c:v/>
-                </c:pt>
-                <c:pt idx="161">
-                  <c:v/>
-                </c:pt>
-                <c:pt idx="162">
-                  <c:v/>
-                </c:pt>
-                <c:pt idx="163">
-                  <c:v/>
-                </c:pt>
-                <c:pt idx="164">
-                  <c:v/>
-                </c:pt>
                 <c:pt idx="165">
                   <c:v>2012</c:v>
                 </c:pt>
-                <c:pt idx="166">
-                  <c:v/>
-                </c:pt>
-                <c:pt idx="167">
-                  <c:v/>
-                </c:pt>
-                <c:pt idx="168">
-                  <c:v/>
-                </c:pt>
-                <c:pt idx="169">
-                  <c:v/>
-                </c:pt>
-                <c:pt idx="170">
-                  <c:v/>
-                </c:pt>
-                <c:pt idx="171">
-                  <c:v/>
-                </c:pt>
-                <c:pt idx="172">
-                  <c:v/>
-                </c:pt>
-                <c:pt idx="173">
-                  <c:v/>
-                </c:pt>
-                <c:pt idx="174">
-                  <c:v/>
-                </c:pt>
-                <c:pt idx="175">
-                  <c:v/>
-                </c:pt>
-                <c:pt idx="176">
-                  <c:v/>
-                </c:pt>
-                <c:pt idx="177">
-                  <c:v/>
-                </c:pt>
-                <c:pt idx="178">
-                  <c:v/>
-                </c:pt>
-                <c:pt idx="179">
-                  <c:v/>
-                </c:pt>
-                <c:pt idx="180">
-                  <c:v/>
-                </c:pt>
-                <c:pt idx="181">
-                  <c:v/>
-                </c:pt>
-                <c:pt idx="182">
-                  <c:v/>
-                </c:pt>
-                <c:pt idx="183">
-                  <c:v/>
-                </c:pt>
-                <c:pt idx="184">
-                  <c:v/>
-                </c:pt>
-                <c:pt idx="185">
-                  <c:v/>
-                </c:pt>
-                <c:pt idx="186">
-                  <c:v/>
-                </c:pt>
-                <c:pt idx="187">
-                  <c:v/>
-                </c:pt>
-                <c:pt idx="188">
-                  <c:v/>
-                </c:pt>
-                <c:pt idx="189">
-                  <c:v/>
-                </c:pt>
-                <c:pt idx="190">
-                  <c:v/>
-                </c:pt>
-                <c:pt idx="191">
-                  <c:v/>
-                </c:pt>
-                <c:pt idx="192">
-                  <c:v/>
-                </c:pt>
-                <c:pt idx="193">
-                  <c:v/>
-                </c:pt>
-                <c:pt idx="194">
-                  <c:v/>
-                </c:pt>
-                <c:pt idx="195">
-                  <c:v/>
-                </c:pt>
-                <c:pt idx="196">
-                  <c:v/>
-                </c:pt>
-                <c:pt idx="197">
-                  <c:v/>
-                </c:pt>
-                <c:pt idx="198">
-                  <c:v/>
-                </c:pt>
-                <c:pt idx="199">
-                  <c:v/>
-                </c:pt>
-                <c:pt idx="200">
-                  <c:v/>
-                </c:pt>
-                <c:pt idx="201">
-                  <c:v/>
-                </c:pt>
-                <c:pt idx="202">
-                  <c:v/>
-                </c:pt>
-                <c:pt idx="203">
-                  <c:v/>
-                </c:pt>
-                <c:pt idx="204">
-                  <c:v/>
-                </c:pt>
-                <c:pt idx="205">
-                  <c:v/>
-                </c:pt>
-                <c:pt idx="206">
-                  <c:v/>
-                </c:pt>
-                <c:pt idx="207">
-                  <c:v/>
-                </c:pt>
-                <c:pt idx="208">
-                  <c:v/>
-                </c:pt>
-                <c:pt idx="209">
-                  <c:v/>
-                </c:pt>
-                <c:pt idx="210">
-                  <c:v/>
-                </c:pt>
-                <c:pt idx="211">
-                  <c:v/>
-                </c:pt>
-                <c:pt idx="212">
-                  <c:v/>
-                </c:pt>
                 <c:pt idx="213">
                   <c:v>2016</c:v>
                 </c:pt>
-                <c:pt idx="214">
-                  <c:v/>
-                </c:pt>
-                <c:pt idx="215">
-                  <c:v/>
-                </c:pt>
-                <c:pt idx="216">
-                  <c:v/>
-                </c:pt>
-                <c:pt idx="217">
-                  <c:v/>
-                </c:pt>
-                <c:pt idx="218">
-                  <c:v/>
-                </c:pt>
-                <c:pt idx="219">
-                  <c:v/>
-                </c:pt>
-                <c:pt idx="220">
-                  <c:v/>
-                </c:pt>
-                <c:pt idx="221">
-                  <c:v/>
-                </c:pt>
-                <c:pt idx="222">
-                  <c:v/>
-                </c:pt>
-                <c:pt idx="223">
-                  <c:v/>
-                </c:pt>
-                <c:pt idx="224">
-                  <c:v/>
-                </c:pt>
-                <c:pt idx="225">
-                  <c:v/>
-                </c:pt>
-                <c:pt idx="226">
-                  <c:v/>
-                </c:pt>
-                <c:pt idx="227">
-                  <c:v/>
-                </c:pt>
-                <c:pt idx="228">
-                  <c:v/>
-                </c:pt>
-                <c:pt idx="229">
-                  <c:v/>
-                </c:pt>
-                <c:pt idx="230">
-                  <c:v/>
-                </c:pt>
-                <c:pt idx="231">
-                  <c:v/>
-                </c:pt>
-                <c:pt idx="232">
-                  <c:v/>
-                </c:pt>
-                <c:pt idx="233">
-                  <c:v/>
-                </c:pt>
-                <c:pt idx="234">
-                  <c:v/>
-                </c:pt>
-                <c:pt idx="235">
-                  <c:v/>
-                </c:pt>
-                <c:pt idx="236">
-                  <c:v/>
-                </c:pt>
-                <c:pt idx="237">
-                  <c:v/>
-                </c:pt>
-                <c:pt idx="238">
-                  <c:v/>
-                </c:pt>
-                <c:pt idx="239">
-                  <c:v/>
-                </c:pt>
-                <c:pt idx="240">
-                  <c:v/>
-                </c:pt>
-                <c:pt idx="241">
-                  <c:v/>
-                </c:pt>
-                <c:pt idx="242">
-                  <c:v/>
-                </c:pt>
-                <c:pt idx="243">
-                  <c:v/>
-                </c:pt>
-                <c:pt idx="244">
-                  <c:v/>
-                </c:pt>
-                <c:pt idx="245">
-                  <c:v/>
-                </c:pt>
-                <c:pt idx="246">
-                  <c:v/>
-                </c:pt>
-                <c:pt idx="247">
-                  <c:v/>
-                </c:pt>
-                <c:pt idx="248">
-                  <c:v/>
-                </c:pt>
-                <c:pt idx="249">
-                  <c:v/>
-                </c:pt>
-                <c:pt idx="250">
-                  <c:v/>
-                </c:pt>
-                <c:pt idx="251">
-                  <c:v/>
-                </c:pt>
-                <c:pt idx="252">
-                  <c:v/>
-                </c:pt>
-                <c:pt idx="253">
-                  <c:v/>
-                </c:pt>
-                <c:pt idx="254">
-                  <c:v/>
-                </c:pt>
-                <c:pt idx="255">
-                  <c:v/>
-                </c:pt>
-                <c:pt idx="256">
-                  <c:v/>
-                </c:pt>
-                <c:pt idx="257">
-                  <c:v/>
-                </c:pt>
-                <c:pt idx="258">
-                  <c:v/>
-                </c:pt>
-                <c:pt idx="259">
-                  <c:v/>
-                </c:pt>
-                <c:pt idx="260">
-                  <c:v/>
-                </c:pt>
                 <c:pt idx="261">
                   <c:v>2020</c:v>
                 </c:pt>
-                <c:pt idx="262">
-                  <c:v/>
-                </c:pt>
-                <c:pt idx="263">
-                  <c:v/>
-                </c:pt>
-                <c:pt idx="264">
-                  <c:v/>
-                </c:pt>
-                <c:pt idx="265">
-                  <c:v/>
-                </c:pt>
-                <c:pt idx="266">
-                  <c:v/>
-                </c:pt>
-                <c:pt idx="267">
-                  <c:v/>
-                </c:pt>
-                <c:pt idx="268">
-                  <c:v/>
-                </c:pt>
-                <c:pt idx="269">
-                  <c:v/>
-                </c:pt>
-                <c:pt idx="270">
-                  <c:v/>
-                </c:pt>
-                <c:pt idx="271">
-                  <c:v/>
-                </c:pt>
-                <c:pt idx="272">
-                  <c:v/>
-                </c:pt>
-                <c:pt idx="273">
-                  <c:v/>
-                </c:pt>
-                <c:pt idx="274">
-                  <c:v/>
-                </c:pt>
-                <c:pt idx="275">
-                  <c:v/>
-                </c:pt>
-                <c:pt idx="276">
-                  <c:v/>
-                </c:pt>
-                <c:pt idx="277">
-                  <c:v/>
-                </c:pt>
-                <c:pt idx="278">
-                  <c:v/>
-                </c:pt>
-                <c:pt idx="279">
-                  <c:v/>
-                </c:pt>
-                <c:pt idx="280">
-                  <c:v/>
-                </c:pt>
-                <c:pt idx="281">
-                  <c:v/>
-                </c:pt>
-                <c:pt idx="282">
-                  <c:v/>
-                </c:pt>
-                <c:pt idx="283">
-                  <c:v/>
-                </c:pt>
-                <c:pt idx="284">
-                  <c:v/>
-                </c:pt>
-                <c:pt idx="285">
-                  <c:v/>
-                </c:pt>
-                <c:pt idx="286">
-                  <c:v/>
-                </c:pt>
-                <c:pt idx="287">
-                  <c:v/>
-                </c:pt>
-                <c:pt idx="288">
-                  <c:v/>
-                </c:pt>
-                <c:pt idx="289">
-                  <c:v/>
-                </c:pt>
-                <c:pt idx="290">
-                  <c:v/>
-                </c:pt>
-                <c:pt idx="291">
-                  <c:v/>
-                </c:pt>
-                <c:pt idx="292">
-                  <c:v/>
-                </c:pt>
-                <c:pt idx="293">
-                  <c:v/>
-                </c:pt>
-                <c:pt idx="294">
-                  <c:v/>
-                </c:pt>
-                <c:pt idx="295">
-                  <c:v/>
-                </c:pt>
-                <c:pt idx="296">
-                  <c:v/>
-                </c:pt>
-                <c:pt idx="297">
-                  <c:v/>
-                </c:pt>
-                <c:pt idx="298">
-                  <c:v/>
-                </c:pt>
-                <c:pt idx="299">
-                  <c:v/>
-                </c:pt>
-                <c:pt idx="300">
-                  <c:v/>
-                </c:pt>
-                <c:pt idx="301">
-                  <c:v/>
-                </c:pt>
-                <c:pt idx="302">
-                  <c:v/>
-                </c:pt>
-                <c:pt idx="303">
-                  <c:v/>
-                </c:pt>
-                <c:pt idx="304">
-                  <c:v/>
-                </c:pt>
-                <c:pt idx="305">
-                  <c:v/>
-                </c:pt>
-                <c:pt idx="306">
-                  <c:v/>
-                </c:pt>
-                <c:pt idx="307">
-                  <c:v/>
-                </c:pt>
-                <c:pt idx="308">
-                  <c:v/>
-                </c:pt>
                 <c:pt idx="309">
                   <c:v>2024</c:v>
-                </c:pt>
-                <c:pt idx="310">
-                  <c:v/>
-                </c:pt>
-                <c:pt idx="311">
-                  <c:v/>
-                </c:pt>
-                <c:pt idx="312">
-                  <c:v/>
-                </c:pt>
-                <c:pt idx="313">
-                  <c:v/>
-                </c:pt>
-                <c:pt idx="314">
-                  <c:v/>
-                </c:pt>
-                <c:pt idx="315">
-                  <c:v/>
-                </c:pt>
-                <c:pt idx="316">
-                  <c:v/>
-                </c:pt>
-                <c:pt idx="317">
-                  <c:v/>
-                </c:pt>
-                <c:pt idx="318">
-                  <c:v/>
-                </c:pt>
-                <c:pt idx="319">
-                  <c:v/>
-                </c:pt>
-                <c:pt idx="320">
-                  <c:v/>
-                </c:pt>
-                <c:pt idx="321">
-                  <c:v/>
-                </c:pt>
-                <c:pt idx="322">
-                  <c:v/>
-                </c:pt>
-                <c:pt idx="323">
-                  <c:v/>
-                </c:pt>
-                <c:pt idx="324">
-                  <c:v/>
-                </c:pt>
-                <c:pt idx="325">
-                  <c:v/>
-                </c:pt>
-                <c:pt idx="326">
-                  <c:v/>
-                </c:pt>
-                <c:pt idx="327">
-                  <c:v/>
-                </c:pt>
-                <c:pt idx="328">
-                  <c:v/>
-                </c:pt>
-                <c:pt idx="329">
-                  <c:v/>
-                </c:pt>
-                <c:pt idx="330">
-                  <c:v/>
-                </c:pt>
-                <c:pt idx="331">
-                  <c:v/>
-                </c:pt>
-                <c:pt idx="332">
-                  <c:v/>
-                </c:pt>
-                <c:pt idx="333">
-                  <c:v/>
-                </c:pt>
-                <c:pt idx="334">
-                  <c:v/>
-                </c:pt>
-                <c:pt idx="335">
-                  <c:v/>
-                </c:pt>
-                <c:pt idx="336">
-                  <c:v/>
-                </c:pt>
-                <c:pt idx="337">
-                  <c:v/>
-                </c:pt>
-                <c:pt idx="338">
-                  <c:v/>
-                </c:pt>
-                <c:pt idx="339">
-                  <c:v/>
                 </c:pt>
               </c:strCache>
             </c:strRef>
@@ -5290,16 +2323,16 @@
                 <c:formatCode>General</c:formatCode>
                 <c:ptCount val="340"/>
                 <c:pt idx="0">
-                  <c:v>0.527</c:v>
+                  <c:v>0.52700000000000002</c:v>
                 </c:pt>
                 <c:pt idx="1">
                   <c:v>0.438</c:v>
                 </c:pt>
                 <c:pt idx="2">
-                  <c:v>0.588</c:v>
+                  <c:v>0.58799999999999997</c:v>
                 </c:pt>
                 <c:pt idx="3">
-                  <c:v>0.541</c:v>
+                  <c:v>0.54100000000000004</c:v>
                 </c:pt>
                 <c:pt idx="4">
                   <c:v>0.432</c:v>
@@ -5311,133 +2344,133 @@
                   <c:v>0.32</c:v>
                 </c:pt>
                 <c:pt idx="7">
-                  <c:v>0.334</c:v>
+                  <c:v>0.33400000000000002</c:v>
                 </c:pt>
                 <c:pt idx="8">
-                  <c:v>0.802</c:v>
+                  <c:v>0.80200000000000005</c:v>
                 </c:pt>
                 <c:pt idx="9">
-                  <c:v>0.682</c:v>
+                  <c:v>0.68200000000000005</c:v>
                 </c:pt>
                 <c:pt idx="10">
                   <c:v>0.4</c:v>
                 </c:pt>
                 <c:pt idx="11">
-                  <c:v>0.348</c:v>
+                  <c:v>0.34799999999999998</c:v>
                 </c:pt>
                 <c:pt idx="12">
-                  <c:v>0.204</c:v>
+                  <c:v>0.20399999999999999</c:v>
                 </c:pt>
                 <c:pt idx="13">
                   <c:v>0.12</c:v>
                 </c:pt>
                 <c:pt idx="14">
-                  <c:v>0.476</c:v>
+                  <c:v>0.47599999999999998</c:v>
                 </c:pt>
                 <c:pt idx="15">
-                  <c:v>0.407</c:v>
+                  <c:v>0.40699999999999997</c:v>
                 </c:pt>
                 <c:pt idx="16">
                   <c:v>0.375</c:v>
                 </c:pt>
                 <c:pt idx="17">
-                  <c:v>0.293</c:v>
+                  <c:v>0.29299999999999998</c:v>
                 </c:pt>
                 <c:pt idx="18">
-                  <c:v>0.286</c:v>
+                  <c:v>0.28599999999999998</c:v>
                 </c:pt>
                 <c:pt idx="19">
-                  <c:v>0.411</c:v>
+                  <c:v>0.41099999999999998</c:v>
                 </c:pt>
                 <c:pt idx="20">
                   <c:v>0.36</c:v>
                 </c:pt>
                 <c:pt idx="21">
-                  <c:v>0.403</c:v>
+                  <c:v>0.40300000000000002</c:v>
                 </c:pt>
                 <c:pt idx="22">
-                  <c:v>0.409</c:v>
+                  <c:v>0.40899999999999997</c:v>
                 </c:pt>
                 <c:pt idx="23">
-                  <c:v>0.493</c:v>
+                  <c:v>0.49299999999999999</c:v>
                 </c:pt>
                 <c:pt idx="24">
                   <c:v>0.437</c:v>
                 </c:pt>
                 <c:pt idx="25">
-                  <c:v>0.403</c:v>
+                  <c:v>0.40300000000000002</c:v>
                 </c:pt>
                 <c:pt idx="26">
-                  <c:v>0.524</c:v>
+                  <c:v>0.52400000000000002</c:v>
                 </c:pt>
                 <c:pt idx="27">
-                  <c:v>0.448</c:v>
+                  <c:v>0.44800000000000001</c:v>
                 </c:pt>
                 <c:pt idx="28">
-                  <c:v>0.645</c:v>
+                  <c:v>0.64500000000000002</c:v>
                 </c:pt>
                 <c:pt idx="29">
-                  <c:v>0.646</c:v>
+                  <c:v>0.64600000000000002</c:v>
                 </c:pt>
                 <c:pt idx="30">
-                  <c:v>0.571</c:v>
+                  <c:v>0.57099999999999995</c:v>
                 </c:pt>
                 <c:pt idx="31">
-                  <c:v>0.545</c:v>
+                  <c:v>0.54500000000000004</c:v>
                 </c:pt>
                 <c:pt idx="32">
-                  <c:v>0.515</c:v>
+                  <c:v>0.51500000000000001</c:v>
                 </c:pt>
                 <c:pt idx="33">
                   <c:v>0.39</c:v>
                 </c:pt>
                 <c:pt idx="34">
-                  <c:v>0.242</c:v>
+                  <c:v>0.24199999999999999</c:v>
                 </c:pt>
                 <c:pt idx="35">
-                  <c:v>0.133</c:v>
+                  <c:v>0.13300000000000001</c:v>
                 </c:pt>
                 <c:pt idx="36">
-                  <c:v>0.097</c:v>
+                  <c:v>9.7000000000000003E-2</c:v>
                 </c:pt>
                 <c:pt idx="37">
-                  <c:v>0.052</c:v>
+                  <c:v>5.1999999999999998E-2</c:v>
                 </c:pt>
                 <c:pt idx="38">
-                  <c:v>0.073</c:v>
+                  <c:v>7.2999999999999995E-2</c:v>
                 </c:pt>
                 <c:pt idx="39">
-                  <c:v>0.091</c:v>
+                  <c:v>9.0999999999999998E-2</c:v>
                 </c:pt>
                 <c:pt idx="40">
-                  <c:v>0.086</c:v>
+                  <c:v>8.5999999999999993E-2</c:v>
                 </c:pt>
                 <c:pt idx="41">
-                  <c:v>0.085</c:v>
+                  <c:v>8.5000000000000006E-2</c:v>
                 </c:pt>
                 <c:pt idx="42">
-                  <c:v>0.087</c:v>
+                  <c:v>8.6999999999999994E-2</c:v>
                 </c:pt>
                 <c:pt idx="43">
                   <c:v>0.105</c:v>
                 </c:pt>
                 <c:pt idx="44">
-                  <c:v>0.076</c:v>
+                  <c:v>7.5999999999999998E-2</c:v>
                 </c:pt>
                 <c:pt idx="45">
-                  <c:v>0.065</c:v>
+                  <c:v>6.5000000000000002E-2</c:v>
                 </c:pt>
                 <c:pt idx="46">
-                  <c:v>0.081</c:v>
+                  <c:v>8.1000000000000003E-2</c:v>
                 </c:pt>
                 <c:pt idx="47">
-                  <c:v>0.051</c:v>
+                  <c:v>5.0999999999999997E-2</c:v>
                 </c:pt>
                 <c:pt idx="48">
-                  <c:v>0.055</c:v>
+                  <c:v>5.5E-2</c:v>
                 </c:pt>
                 <c:pt idx="49">
-                  <c:v>0.067</c:v>
+                  <c:v>6.7000000000000004E-2</c:v>
                 </c:pt>
                 <c:pt idx="50">
                   <c:v>0.06</c:v>
@@ -5449,19 +2482,19 @@
                   <c:v>0.02</c:v>
                 </c:pt>
                 <c:pt idx="53">
-                  <c:v>0.056</c:v>
+                  <c:v>5.6000000000000001E-2</c:v>
                 </c:pt>
                 <c:pt idx="54">
-                  <c:v>0.038</c:v>
+                  <c:v>3.7999999999999999E-2</c:v>
                 </c:pt>
                 <c:pt idx="55">
-                  <c:v>0.055</c:v>
+                  <c:v>5.5E-2</c:v>
                 </c:pt>
                 <c:pt idx="56">
                   <c:v>0.05</c:v>
                 </c:pt>
                 <c:pt idx="57">
-                  <c:v>0.043</c:v>
+                  <c:v>4.2999999999999997E-2</c:v>
                 </c:pt>
                 <c:pt idx="58">
                   <c:v>0.05</c:v>
@@ -5476,46 +2509,46 @@
                   <c:v>0.04</c:v>
                 </c:pt>
                 <c:pt idx="62">
-                  <c:v>0.075</c:v>
+                  <c:v>7.4999999999999997E-2</c:v>
                 </c:pt>
                 <c:pt idx="63">
-                  <c:v>0.07</c:v>
+                  <c:v>7.0000000000000007E-2</c:v>
                 </c:pt>
                 <c:pt idx="64">
                   <c:v>0.187</c:v>
                 </c:pt>
                 <c:pt idx="65">
-                  <c:v>0.176</c:v>
+                  <c:v>0.17599999999999999</c:v>
                 </c:pt>
                 <c:pt idx="66">
-                  <c:v>0.137</c:v>
+                  <c:v>0.13700000000000001</c:v>
                 </c:pt>
                 <c:pt idx="67">
-                  <c:v>0.132</c:v>
+                  <c:v>0.13200000000000001</c:v>
                 </c:pt>
                 <c:pt idx="68">
                   <c:v>0.11</c:v>
                 </c:pt>
                 <c:pt idx="69">
-                  <c:v>0.068</c:v>
+                  <c:v>6.8000000000000005E-2</c:v>
                 </c:pt>
                 <c:pt idx="70">
-                  <c:v>0.056</c:v>
+                  <c:v>5.6000000000000001E-2</c:v>
                 </c:pt>
                 <c:pt idx="71">
-                  <c:v>0.118</c:v>
+                  <c:v>0.11799999999999999</c:v>
                 </c:pt>
                 <c:pt idx="72">
-                  <c:v>0.135</c:v>
+                  <c:v>0.13500000000000001</c:v>
                 </c:pt>
                 <c:pt idx="73">
-                  <c:v>0.135</c:v>
+                  <c:v>0.13500000000000001</c:v>
                 </c:pt>
                 <c:pt idx="74">
                   <c:v>0.161</c:v>
                 </c:pt>
                 <c:pt idx="75">
-                  <c:v>0.205</c:v>
+                  <c:v>0.20499999999999999</c:v>
                 </c:pt>
                 <c:pt idx="76">
                   <c:v>0.15</c:v>
@@ -5524,31 +2557,31 @@
                   <c:v>0.127</c:v>
                 </c:pt>
                 <c:pt idx="78">
-                  <c:v>0.118</c:v>
+                  <c:v>0.11799999999999999</c:v>
                 </c:pt>
                 <c:pt idx="79">
-                  <c:v>0.103</c:v>
+                  <c:v>0.10299999999999999</c:v>
                 </c:pt>
                 <c:pt idx="80">
-                  <c:v>0.103</c:v>
+                  <c:v>0.10299999999999999</c:v>
                 </c:pt>
                 <c:pt idx="81">
-                  <c:v>0.087</c:v>
+                  <c:v>8.6999999999999994E-2</c:v>
                 </c:pt>
                 <c:pt idx="82">
                   <c:v>0.123</c:v>
                 </c:pt>
                 <c:pt idx="83">
-                  <c:v>0.097</c:v>
+                  <c:v>9.7000000000000003E-2</c:v>
                 </c:pt>
                 <c:pt idx="84">
-                  <c:v>0.076</c:v>
+                  <c:v>7.5999999999999998E-2</c:v>
                 </c:pt>
                 <c:pt idx="85">
-                  <c:v>0.077</c:v>
+                  <c:v>7.6999999999999999E-2</c:v>
                 </c:pt>
                 <c:pt idx="86">
-                  <c:v>0.07</c:v>
+                  <c:v>7.0000000000000007E-2</c:v>
                 </c:pt>
                 <c:pt idx="87">
                   <c:v>0.104</c:v>
@@ -5560,64 +2593,64 @@
                   <c:v>0.221</c:v>
                 </c:pt>
                 <c:pt idx="90">
-                  <c:v>0.273</c:v>
+                  <c:v>0.27300000000000002</c:v>
                 </c:pt>
                 <c:pt idx="91">
-                  <c:v>0.229</c:v>
+                  <c:v>0.22900000000000001</c:v>
                 </c:pt>
                 <c:pt idx="92">
-                  <c:v>0.281</c:v>
+                  <c:v>0.28100000000000003</c:v>
                 </c:pt>
                 <c:pt idx="93">
-                  <c:v>0.302</c:v>
+                  <c:v>0.30199999999999999</c:v>
                 </c:pt>
                 <c:pt idx="94">
-                  <c:v>0.479</c:v>
+                  <c:v>0.47899999999999998</c:v>
                 </c:pt>
                 <c:pt idx="95">
-                  <c:v>0.667</c:v>
+                  <c:v>0.66700000000000004</c:v>
                 </c:pt>
                 <c:pt idx="96">
-                  <c:v>0.649</c:v>
+                  <c:v>0.64900000000000002</c:v>
                 </c:pt>
                 <c:pt idx="97">
-                  <c:v>0.813</c:v>
+                  <c:v>0.81299999999999994</c:v>
                 </c:pt>
                 <c:pt idx="98">
-                  <c:v>0.825</c:v>
+                  <c:v>0.82499999999999996</c:v>
                 </c:pt>
                 <c:pt idx="99">
-                  <c:v>0.817</c:v>
+                  <c:v>0.81699999999999995</c:v>
                 </c:pt>
                 <c:pt idx="100">
                   <c:v>0.625</c:v>
                 </c:pt>
                 <c:pt idx="101">
-                  <c:v>0.635</c:v>
+                  <c:v>0.63500000000000001</c:v>
                 </c:pt>
                 <c:pt idx="102">
-                  <c:v>0.717</c:v>
+                  <c:v>0.71699999999999997</c:v>
                 </c:pt>
                 <c:pt idx="103">
-                  <c:v>0.802</c:v>
+                  <c:v>0.80200000000000005</c:v>
                 </c:pt>
                 <c:pt idx="104">
                   <c:v>0.78</c:v>
                 </c:pt>
                 <c:pt idx="105">
-                  <c:v>0.708</c:v>
+                  <c:v>0.70799999999999996</c:v>
                 </c:pt>
                 <c:pt idx="106">
-                  <c:v>0.818</c:v>
+                  <c:v>0.81799999999999995</c:v>
                 </c:pt>
                 <c:pt idx="107">
-                  <c:v>0.807</c:v>
+                  <c:v>0.80700000000000005</c:v>
                 </c:pt>
                 <c:pt idx="108">
-                  <c:v>0.847</c:v>
+                  <c:v>0.84699999999999998</c:v>
                 </c:pt>
                 <c:pt idx="109">
-                  <c:v>0.972</c:v>
+                  <c:v>0.97199999999999998</c:v>
                 </c:pt>
                 <c:pt idx="110">
                   <c:v>1.01</c:v>
@@ -5629,88 +2662,88 @@
                   <c:v>0.87</c:v>
                 </c:pt>
                 <c:pt idx="113">
-                  <c:v>0.856</c:v>
+                  <c:v>0.85599999999999998</c:v>
                 </c:pt>
                 <c:pt idx="114">
-                  <c:v>0.775</c:v>
+                  <c:v>0.77500000000000002</c:v>
                 </c:pt>
                 <c:pt idx="115">
-                  <c:v>0.757</c:v>
+                  <c:v>0.75700000000000001</c:v>
                 </c:pt>
                 <c:pt idx="116">
-                  <c:v>0.705</c:v>
+                  <c:v>0.70499999999999996</c:v>
                 </c:pt>
                 <c:pt idx="117">
-                  <c:v>0.549</c:v>
+                  <c:v>0.54900000000000004</c:v>
                 </c:pt>
                 <c:pt idx="118">
-                  <c:v>0.553</c:v>
+                  <c:v>0.55300000000000005</c:v>
                 </c:pt>
                 <c:pt idx="119">
-                  <c:v>0.564</c:v>
+                  <c:v>0.56399999999999995</c:v>
                 </c:pt>
                 <c:pt idx="120">
-                  <c:v>0.775</c:v>
+                  <c:v>0.77500000000000002</c:v>
                 </c:pt>
                 <c:pt idx="121">
                   <c:v>0.9</c:v>
                 </c:pt>
                 <c:pt idx="122">
-                  <c:v>0.781</c:v>
+                  <c:v>0.78100000000000003</c:v>
                 </c:pt>
                 <c:pt idx="123">
-                  <c:v>0.771</c:v>
+                  <c:v>0.77100000000000002</c:v>
                 </c:pt>
                 <c:pt idx="124">
-                  <c:v>0.709</c:v>
+                  <c:v>0.70899999999999996</c:v>
                 </c:pt>
                 <c:pt idx="125">
                   <c:v>0.748</c:v>
                 </c:pt>
                 <c:pt idx="126">
-                  <c:v>0.539</c:v>
+                  <c:v>0.53900000000000003</c:v>
                 </c:pt>
                 <c:pt idx="127">
-                  <c:v>0.586</c:v>
+                  <c:v>0.58599999999999997</c:v>
                 </c:pt>
                 <c:pt idx="128">
                   <c:v>0.37</c:v>
                 </c:pt>
                 <c:pt idx="129">
-                  <c:v>0.403</c:v>
+                  <c:v>0.40300000000000002</c:v>
                 </c:pt>
                 <c:pt idx="130">
-                  <c:v>0.392</c:v>
+                  <c:v>0.39200000000000002</c:v>
                 </c:pt>
                 <c:pt idx="131">
-                  <c:v>0.408</c:v>
+                  <c:v>0.40799999999999997</c:v>
                 </c:pt>
                 <c:pt idx="132">
                   <c:v>0.375</c:v>
                 </c:pt>
                 <c:pt idx="133">
-                  <c:v>0.344</c:v>
+                  <c:v>0.34399999999999997</c:v>
                 </c:pt>
                 <c:pt idx="134">
                   <c:v>0.307</c:v>
                 </c:pt>
                 <c:pt idx="135">
-                  <c:v>0.275</c:v>
+                  <c:v>0.27500000000000002</c:v>
                 </c:pt>
                 <c:pt idx="136">
                   <c:v>0.24</c:v>
                 </c:pt>
                 <c:pt idx="137">
-                  <c:v>0.239</c:v>
+                  <c:v>0.23899999999999999</c:v>
                 </c:pt>
                 <c:pt idx="138">
                   <c:v>0.25</c:v>
                 </c:pt>
                 <c:pt idx="139">
-                  <c:v>0.225</c:v>
+                  <c:v>0.22500000000000001</c:v>
                 </c:pt>
                 <c:pt idx="140">
-                  <c:v>0.136</c:v>
+                  <c:v>0.13600000000000001</c:v>
                 </c:pt>
                 <c:pt idx="141">
                   <c:v>0.155</c:v>
@@ -5719,7 +2752,7 @@
                   <c:v>0.155</c:v>
                 </c:pt>
                 <c:pt idx="143">
-                  <c:v>0.167</c:v>
+                  <c:v>0.16700000000000001</c:v>
                 </c:pt>
                 <c:pt idx="144">
                   <c:v>0.16</c:v>
@@ -5728,61 +2761,61 @@
                   <c:v>0.16</c:v>
                 </c:pt>
                 <c:pt idx="146">
-                  <c:v>0.145</c:v>
+                  <c:v>0.14499999999999999</c:v>
                 </c:pt>
                 <c:pt idx="147">
-                  <c:v>0.145</c:v>
+                  <c:v>0.14499999999999999</c:v>
                 </c:pt>
                 <c:pt idx="148">
-                  <c:v>0.119</c:v>
+                  <c:v>0.11899999999999999</c:v>
                 </c:pt>
                 <c:pt idx="149">
-                  <c:v>0.132</c:v>
+                  <c:v>0.13200000000000001</c:v>
                 </c:pt>
                 <c:pt idx="150">
-                  <c:v>0.137</c:v>
+                  <c:v>0.13700000000000001</c:v>
                 </c:pt>
                 <c:pt idx="151">
                   <c:v>0.188</c:v>
                 </c:pt>
                 <c:pt idx="152">
-                  <c:v>0.167</c:v>
+                  <c:v>0.16700000000000001</c:v>
                 </c:pt>
                 <c:pt idx="153">
-                  <c:v>0.195</c:v>
+                  <c:v>0.19500000000000001</c:v>
                 </c:pt>
                 <c:pt idx="154">
-                  <c:v>0.237</c:v>
+                  <c:v>0.23699999999999999</c:v>
                 </c:pt>
                 <c:pt idx="155">
-                  <c:v>0.208</c:v>
+                  <c:v>0.20799999999999999</c:v>
                 </c:pt>
                 <c:pt idx="156">
                   <c:v>0.189</c:v>
                 </c:pt>
                 <c:pt idx="157">
-                  <c:v>0.175</c:v>
+                  <c:v>0.17499999999999999</c:v>
                 </c:pt>
                 <c:pt idx="158">
-                  <c:v>0.167</c:v>
+                  <c:v>0.16700000000000001</c:v>
                 </c:pt>
                 <c:pt idx="159">
                   <c:v>0.155</c:v>
                 </c:pt>
                 <c:pt idx="160">
-                  <c:v>0.136</c:v>
+                  <c:v>0.13600000000000001</c:v>
                 </c:pt>
                 <c:pt idx="161">
-                  <c:v>0.137</c:v>
+                  <c:v>0.13700000000000001</c:v>
                 </c:pt>
                 <c:pt idx="162">
-                  <c:v>0.143</c:v>
+                  <c:v>0.14299999999999999</c:v>
                 </c:pt>
                 <c:pt idx="163">
-                  <c:v>0.14</c:v>
+                  <c:v>0.14000000000000001</c:v>
                 </c:pt>
                 <c:pt idx="164">
-                  <c:v>0.131</c:v>
+                  <c:v>0.13100000000000001</c:v>
                 </c:pt>
                 <c:pt idx="165">
                   <c:v>0.127</c:v>
@@ -5803,43 +2836,43 @@
                   <c:v>0.1</c:v>
                 </c:pt>
                 <c:pt idx="171">
-                  <c:v>0.097</c:v>
+                  <c:v>9.7000000000000003E-2</c:v>
                 </c:pt>
                 <c:pt idx="172">
-                  <c:v>0.097</c:v>
+                  <c:v>9.7000000000000003E-2</c:v>
                 </c:pt>
                 <c:pt idx="173">
                   <c:v>0.1</c:v>
                 </c:pt>
                 <c:pt idx="174">
-                  <c:v>0.097</c:v>
+                  <c:v>9.7000000000000003E-2</c:v>
                 </c:pt>
                 <c:pt idx="175">
-                  <c:v>0.097</c:v>
+                  <c:v>9.7000000000000003E-2</c:v>
                 </c:pt>
                 <c:pt idx="176">
-                  <c:v>0.098</c:v>
+                  <c:v>9.8000000000000004E-2</c:v>
                 </c:pt>
                 <c:pt idx="177">
-                  <c:v>0.067</c:v>
+                  <c:v>6.7000000000000004E-2</c:v>
                 </c:pt>
                 <c:pt idx="178">
-                  <c:v>0.045</c:v>
+                  <c:v>4.4999999999999998E-2</c:v>
                 </c:pt>
                 <c:pt idx="179">
-                  <c:v>0.057</c:v>
+                  <c:v>5.7000000000000002E-2</c:v>
                 </c:pt>
                 <c:pt idx="180">
                   <c:v>0.122</c:v>
                 </c:pt>
                 <c:pt idx="181">
-                  <c:v>0.139</c:v>
+                  <c:v>0.13900000000000001</c:v>
                 </c:pt>
                 <c:pt idx="182">
-                  <c:v>0.137</c:v>
+                  <c:v>0.13700000000000001</c:v>
                 </c:pt>
                 <c:pt idx="183">
-                  <c:v>0.119</c:v>
+                  <c:v>0.11899999999999999</c:v>
                 </c:pt>
                 <c:pt idx="184">
                   <c:v>0.115</c:v>
@@ -5848,40 +2881,40 @@
                   <c:v>0.107</c:v>
                 </c:pt>
                 <c:pt idx="186">
-                  <c:v>0.097</c:v>
+                  <c:v>9.7000000000000003E-2</c:v>
                 </c:pt>
                 <c:pt idx="187">
-                  <c:v>0.083</c:v>
+                  <c:v>8.3000000000000004E-2</c:v>
                 </c:pt>
                 <c:pt idx="188">
-                  <c:v>0.098</c:v>
+                  <c:v>9.8000000000000004E-2</c:v>
                 </c:pt>
                 <c:pt idx="189">
-                  <c:v>0.085</c:v>
+                  <c:v>8.5000000000000006E-2</c:v>
                 </c:pt>
                 <c:pt idx="190">
-                  <c:v>0.073</c:v>
+                  <c:v>7.2999999999999995E-2</c:v>
                 </c:pt>
                 <c:pt idx="191">
-                  <c:v>0.087</c:v>
+                  <c:v>8.6999999999999994E-2</c:v>
                 </c:pt>
                 <c:pt idx="192">
-                  <c:v>0.088</c:v>
+                  <c:v>8.7999999999999995E-2</c:v>
                 </c:pt>
                 <c:pt idx="193">
-                  <c:v>0.088</c:v>
+                  <c:v>8.7999999999999995E-2</c:v>
                 </c:pt>
                 <c:pt idx="194">
-                  <c:v>0.073</c:v>
+                  <c:v>7.2999999999999995E-2</c:v>
                 </c:pt>
                 <c:pt idx="195">
-                  <c:v>0.067</c:v>
+                  <c:v>6.7000000000000004E-2</c:v>
                 </c:pt>
                 <c:pt idx="196">
-                  <c:v>0.073</c:v>
+                  <c:v>7.2999999999999995E-2</c:v>
                 </c:pt>
                 <c:pt idx="197">
-                  <c:v>0.078</c:v>
+                  <c:v>7.8E-2</c:v>
                 </c:pt>
                 <c:pt idx="198">
                   <c:v>0.03</c:v>
@@ -5890,103 +2923,103 @@
                   <c:v>0.01</c:v>
                 </c:pt>
                 <c:pt idx="200">
-                  <c:v>-0.028</c:v>
+                  <c:v>-2.8000000000000001E-2</c:v>
                 </c:pt>
                 <c:pt idx="201">
                   <c:v>0.01</c:v>
                 </c:pt>
                 <c:pt idx="202">
-                  <c:v>0.015</c:v>
+                  <c:v>1.4999999999999999E-2</c:v>
                 </c:pt>
                 <c:pt idx="203">
-                  <c:v>0.037</c:v>
+                  <c:v>3.6999999999999998E-2</c:v>
                 </c:pt>
                 <c:pt idx="204">
-                  <c:v>0.0</c:v>
+                  <c:v>0</c:v>
                 </c:pt>
                 <c:pt idx="205">
-                  <c:v>-0.008</c:v>
+                  <c:v>-8.0000000000000002E-3</c:v>
                 </c:pt>
                 <c:pt idx="206">
-                  <c:v>-0.003</c:v>
+                  <c:v>-3.0000000000000001E-3</c:v>
                 </c:pt>
                 <c:pt idx="207">
-                  <c:v>0.005</c:v>
+                  <c:v>5.0000000000000001E-3</c:v>
                 </c:pt>
                 <c:pt idx="208">
-                  <c:v>0.007</c:v>
+                  <c:v>7.0000000000000001E-3</c:v>
                 </c:pt>
                 <c:pt idx="209">
-                  <c:v>0.015</c:v>
+                  <c:v>1.4999999999999999E-2</c:v>
                 </c:pt>
                 <c:pt idx="210">
-                  <c:v>0.002</c:v>
+                  <c:v>2E-3</c:v>
                 </c:pt>
                 <c:pt idx="211">
-                  <c:v>-0.008</c:v>
+                  <c:v>-8.0000000000000002E-3</c:v>
                 </c:pt>
                 <c:pt idx="212">
-                  <c:v>-0.033</c:v>
+                  <c:v>-3.3000000000000002E-2</c:v>
                 </c:pt>
                 <c:pt idx="213">
-                  <c:v>-0.083</c:v>
+                  <c:v>-8.3000000000000004E-2</c:v>
                 </c:pt>
                 <c:pt idx="214">
                   <c:v>-0.245</c:v>
                 </c:pt>
                 <c:pt idx="215">
-                  <c:v>-0.206</c:v>
+                  <c:v>-0.20599999999999999</c:v>
                 </c:pt>
                 <c:pt idx="216">
-                  <c:v>-0.244</c:v>
+                  <c:v>-0.24399999999999999</c:v>
                 </c:pt>
                 <c:pt idx="217">
-                  <c:v>-0.239</c:v>
+                  <c:v>-0.23899999999999999</c:v>
                 </c:pt>
                 <c:pt idx="218">
-                  <c:v>-0.299</c:v>
+                  <c:v>-0.29899999999999999</c:v>
                 </c:pt>
                 <c:pt idx="219">
                   <c:v>-0.251</c:v>
                 </c:pt>
                 <c:pt idx="220">
-                  <c:v>-0.197</c:v>
+                  <c:v>-0.19700000000000001</c:v>
                 </c:pt>
                 <c:pt idx="221">
-                  <c:v>-0.289</c:v>
+                  <c:v>-0.28899999999999998</c:v>
                 </c:pt>
                 <c:pt idx="222">
                   <c:v>-0.247</c:v>
                 </c:pt>
                 <c:pt idx="223">
-                  <c:v>-0.167</c:v>
+                  <c:v>-0.16700000000000001</c:v>
                 </c:pt>
                 <c:pt idx="224">
                   <c:v>-0.187</c:v>
                 </c:pt>
                 <c:pt idx="225">
-                  <c:v>-0.209</c:v>
+                  <c:v>-0.20899999999999999</c:v>
                 </c:pt>
                 <c:pt idx="226">
-                  <c:v>-0.262</c:v>
+                  <c:v>-0.26200000000000001</c:v>
                 </c:pt>
                 <c:pt idx="227">
-                  <c:v>-0.204</c:v>
+                  <c:v>-0.20399999999999999</c:v>
                 </c:pt>
                 <c:pt idx="228">
-                  <c:v>-0.207</c:v>
+                  <c:v>-0.20699999999999999</c:v>
                 </c:pt>
                 <c:pt idx="229">
-                  <c:v>-0.162</c:v>
+                  <c:v>-0.16200000000000001</c:v>
                 </c:pt>
                 <c:pt idx="230">
                   <c:v>-0.115</c:v>
                 </c:pt>
                 <c:pt idx="231">
-                  <c:v>-0.117</c:v>
+                  <c:v>-0.11700000000000001</c:v>
                 </c:pt>
                 <c:pt idx="232">
-                  <c:v>-0.162</c:v>
+                  <c:v>-0.16200000000000001</c:v>
                 </c:pt>
                 <c:pt idx="233">
                   <c:v>-0.12</c:v>
@@ -5998,31 +3031,31 @@
                   <c:v>-0.16</c:v>
                 </c:pt>
                 <c:pt idx="236">
-                  <c:v>-0.14</c:v>
+                  <c:v>-0.14000000000000001</c:v>
                 </c:pt>
                 <c:pt idx="237">
-                  <c:v>-0.137</c:v>
+                  <c:v>-0.13700000000000001</c:v>
                 </c:pt>
                 <c:pt idx="238">
                   <c:v>-0.16</c:v>
                 </c:pt>
                 <c:pt idx="239">
-                  <c:v>-0.137</c:v>
+                  <c:v>-0.13700000000000001</c:v>
                 </c:pt>
                 <c:pt idx="240">
-                  <c:v>-0.137</c:v>
+                  <c:v>-0.13700000000000001</c:v>
                 </c:pt>
                 <c:pt idx="241">
-                  <c:v>-0.144</c:v>
+                  <c:v>-0.14399999999999999</c:v>
                 </c:pt>
                 <c:pt idx="242">
                   <c:v>-0.129</c:v>
                 </c:pt>
                 <c:pt idx="243">
-                  <c:v>-0.119</c:v>
+                  <c:v>-0.11899999999999999</c:v>
                 </c:pt>
                 <c:pt idx="244">
-                  <c:v>-0.119</c:v>
+                  <c:v>-0.11899999999999999</c:v>
                 </c:pt>
                 <c:pt idx="245">
                   <c:v>-0.114</c:v>
@@ -6031,13 +3064,13 @@
                   <c:v>-0.125</c:v>
                 </c:pt>
                 <c:pt idx="247">
-                  <c:v>-0.135</c:v>
+                  <c:v>-0.13500000000000001</c:v>
                 </c:pt>
                 <c:pt idx="248">
-                  <c:v>-0.139</c:v>
+                  <c:v>-0.13900000000000001</c:v>
                 </c:pt>
                 <c:pt idx="249">
-                  <c:v>-0.169</c:v>
+                  <c:v>-0.16900000000000001</c:v>
                 </c:pt>
                 <c:pt idx="250">
                   <c:v>-0.154</c:v>
@@ -6049,34 +3082,34 @@
                   <c:v>-0.153</c:v>
                 </c:pt>
                 <c:pt idx="253">
-                  <c:v>-0.179</c:v>
+                  <c:v>-0.17899999999999999</c:v>
                 </c:pt>
                 <c:pt idx="254">
                   <c:v>-0.222</c:v>
                 </c:pt>
                 <c:pt idx="255">
-                  <c:v>-0.209</c:v>
+                  <c:v>-0.20899999999999999</c:v>
                 </c:pt>
                 <c:pt idx="256">
                   <c:v>-0.307</c:v>
                 </c:pt>
                 <c:pt idx="257">
-                  <c:v>-0.323</c:v>
+                  <c:v>-0.32300000000000001</c:v>
                 </c:pt>
                 <c:pt idx="258">
-                  <c:v>-0.239</c:v>
+                  <c:v>-0.23899999999999999</c:v>
                 </c:pt>
                 <c:pt idx="259">
-                  <c:v>-0.179</c:v>
+                  <c:v>-0.17899999999999999</c:v>
                 </c:pt>
                 <c:pt idx="260">
-                  <c:v>-0.134</c:v>
+                  <c:v>-0.13400000000000001</c:v>
                 </c:pt>
                 <c:pt idx="261">
                   <c:v>-0.159</c:v>
                 </c:pt>
                 <c:pt idx="262">
-                  <c:v>-0.258</c:v>
+                  <c:v>-0.25800000000000001</c:v>
                 </c:pt>
                 <c:pt idx="263">
                   <c:v>-0.13</c:v>
@@ -6085,19 +3118,19 @@
                   <c:v>-0.184</c:v>
                 </c:pt>
                 <c:pt idx="265">
-                  <c:v>-0.164</c:v>
+                  <c:v>-0.16400000000000001</c:v>
                 </c:pt>
                 <c:pt idx="266">
-                  <c:v>-0.14</c:v>
+                  <c:v>-0.14000000000000001</c:v>
                 </c:pt>
                 <c:pt idx="267">
-                  <c:v>-0.144</c:v>
+                  <c:v>-0.14399999999999999</c:v>
                 </c:pt>
                 <c:pt idx="268">
                   <c:v>-0.115</c:v>
                 </c:pt>
                 <c:pt idx="269">
-                  <c:v>-0.14</c:v>
+                  <c:v>-0.14000000000000001</c:v>
                 </c:pt>
                 <c:pt idx="270">
                   <c:v>-0.125</c:v>
@@ -6142,13 +3175,13 @@
                   <c:v>-0.12</c:v>
                 </c:pt>
                 <c:pt idx="284">
-                  <c:v>-0.095</c:v>
+                  <c:v>-9.5000000000000001E-2</c:v>
                 </c:pt>
                 <c:pt idx="285">
-                  <c:v>-0.055</c:v>
+                  <c:v>-5.5E-2</c:v>
                 </c:pt>
                 <c:pt idx="286">
-                  <c:v>-0.035</c:v>
+                  <c:v>-3.5000000000000003E-2</c:v>
                 </c:pt>
                 <c:pt idx="287">
                   <c:v>-0.03</c:v>
@@ -6157,22 +3190,22 @@
                   <c:v>-0.06</c:v>
                 </c:pt>
                 <c:pt idx="289">
-                  <c:v>-0.07</c:v>
+                  <c:v>-7.0000000000000007E-2</c:v>
                 </c:pt>
                 <c:pt idx="290">
-                  <c:v>-0.065</c:v>
+                  <c:v>-6.5000000000000002E-2</c:v>
                 </c:pt>
                 <c:pt idx="291">
                   <c:v>-0.09</c:v>
                 </c:pt>
                 <c:pt idx="292">
-                  <c:v>-0.085</c:v>
+                  <c:v>-8.5000000000000006E-2</c:v>
                 </c:pt>
                 <c:pt idx="293">
                   <c:v>-0.05</c:v>
                 </c:pt>
                 <c:pt idx="294">
-                  <c:v>-0.045</c:v>
+                  <c:v>-4.4999999999999998E-2</c:v>
                 </c:pt>
                 <c:pt idx="295">
                   <c:v>-0.03</c:v>
@@ -6184,40 +3217,40 @@
                   <c:v>-0.01</c:v>
                 </c:pt>
                 <c:pt idx="298">
-                  <c:v>-0.026</c:v>
+                  <c:v>-2.5999999999999999E-2</c:v>
                 </c:pt>
                 <c:pt idx="299">
-                  <c:v>-0.061</c:v>
+                  <c:v>-6.0999999999999999E-2</c:v>
                 </c:pt>
                 <c:pt idx="300">
-                  <c:v>-0.045</c:v>
+                  <c:v>-4.4999999999999998E-2</c:v>
                 </c:pt>
                 <c:pt idx="301">
                   <c:v>-0.06</c:v>
                 </c:pt>
                 <c:pt idx="302">
-                  <c:v>-0.075</c:v>
+                  <c:v>-7.4999999999999997E-2</c:v>
                 </c:pt>
                 <c:pt idx="303">
-                  <c:v>0.0</c:v>
+                  <c:v>0</c:v>
                 </c:pt>
                 <c:pt idx="304">
-                  <c:v>0.025</c:v>
+                  <c:v>2.5000000000000001E-2</c:v>
                 </c:pt>
                 <c:pt idx="305">
-                  <c:v>0.044</c:v>
+                  <c:v>4.3999999999999997E-2</c:v>
                 </c:pt>
                 <c:pt idx="306">
-                  <c:v>0.149</c:v>
+                  <c:v>0.14899999999999999</c:v>
                 </c:pt>
                 <c:pt idx="307">
-                  <c:v>0.049</c:v>
+                  <c:v>4.9000000000000002E-2</c:v>
                 </c:pt>
                 <c:pt idx="308">
-                  <c:v>0.048</c:v>
+                  <c:v>4.8000000000000001E-2</c:v>
                 </c:pt>
                 <c:pt idx="309">
-                  <c:v>0.094</c:v>
+                  <c:v>9.4E-2</c:v>
                 </c:pt>
                 <c:pt idx="310">
                   <c:v>0.19</c:v>
@@ -6226,43 +3259,43 @@
                   <c:v>0.189</c:v>
                 </c:pt>
                 <c:pt idx="312">
-                  <c:v>0.275</c:v>
+                  <c:v>0.27500000000000002</c:v>
                 </c:pt>
                 <c:pt idx="313">
-                  <c:v>0.399</c:v>
+                  <c:v>0.39900000000000002</c:v>
                 </c:pt>
                 <c:pt idx="314">
-                  <c:v>0.353</c:v>
+                  <c:v>0.35299999999999998</c:v>
                 </c:pt>
                 <c:pt idx="315">
                   <c:v>0.45</c:v>
                 </c:pt>
                 <c:pt idx="316">
-                  <c:v>0.363</c:v>
+                  <c:v>0.36299999999999999</c:v>
                 </c:pt>
                 <c:pt idx="317">
-                  <c:v>0.394</c:v>
+                  <c:v>0.39400000000000002</c:v>
                 </c:pt>
                 <c:pt idx="318">
                   <c:v>0.434</c:v>
                 </c:pt>
                 <c:pt idx="319">
-                  <c:v>0.599</c:v>
+                  <c:v>0.59899999999999998</c:v>
                 </c:pt>
                 <c:pt idx="320">
-                  <c:v>0.599</c:v>
+                  <c:v>0.59899999999999998</c:v>
                 </c:pt>
                 <c:pt idx="321">
-                  <c:v>0.729</c:v>
+                  <c:v>0.72899999999999998</c:v>
                 </c:pt>
                 <c:pt idx="322">
-                  <c:v>0.806</c:v>
+                  <c:v>0.80600000000000005</c:v>
                 </c:pt>
                 <c:pt idx="323">
-                  <c:v>0.854</c:v>
+                  <c:v>0.85399999999999998</c:v>
                 </c:pt>
                 <c:pt idx="324">
-                  <c:v>0.676</c:v>
+                  <c:v>0.67600000000000005</c:v>
                 </c:pt>
                 <c:pt idx="325">
                   <c:v>0.75</c:v>
@@ -6271,25 +3304,25 @@
                   <c:v>0.746</c:v>
                 </c:pt>
                 <c:pt idx="327">
-                  <c:v>0.826</c:v>
+                  <c:v>0.82599999999999996</c:v>
                 </c:pt>
                 <c:pt idx="328">
                   <c:v>0.871</c:v>
                 </c:pt>
                 <c:pt idx="329">
-                  <c:v>0.958</c:v>
+                  <c:v>0.95799999999999996</c:v>
                 </c:pt>
                 <c:pt idx="330">
-                  <c:v>0.928</c:v>
+                  <c:v>0.92800000000000005</c:v>
                 </c:pt>
                 <c:pt idx="331">
-                  <c:v>0.992</c:v>
+                  <c:v>0.99199999999999999</c:v>
                 </c:pt>
                 <c:pt idx="332">
                   <c:v>1.167</c:v>
                 </c:pt>
                 <c:pt idx="333">
-                  <c:v>1.251</c:v>
+                  <c:v>1.2509999999999999</c:v>
                 </c:pt>
                 <c:pt idx="334">
                   <c:v>1.25</c:v>
@@ -6298,34 +3331,47 @@
                   <c:v>1.375</c:v>
                 </c:pt>
                 <c:pt idx="336">
-                  <c:v>1.402</c:v>
+                  <c:v>1.4019999999999999</c:v>
                 </c:pt>
                 <c:pt idx="337">
                   <c:v>1.393</c:v>
                 </c:pt>
                 <c:pt idx="338">
-                  <c:v>1.382</c:v>
+                  <c:v>1.3819999999999999</c:v>
                 </c:pt>
                 <c:pt idx="339">
-                  <c:v>1.507</c:v>
+                  <c:v>1.5069999999999999</c:v>
                 </c:pt>
               </c:numCache>
             </c:numRef>
           </c:val>
           <c:smooth val="0"/>
+          <c:extLst>
+            <c:ext xmlns:c16="http://schemas.microsoft.com/office/drawing/2014/chart" uri="{C3380CC4-5D6E-409C-BE32-E72D297353CC}">
+              <c16:uniqueId val="{00000002-F378-454C-9F10-9F4400886F81}"/>
+            </c:ext>
+          </c:extLst>
         </c:ser>
-        <c:marker val="1"/>
+        <c:dLbls>
+          <c:showLegendKey val="0"/>
+          <c:showVal val="0"/>
+          <c:showCatName val="0"/>
+          <c:showSerName val="0"/>
+          <c:showPercent val="0"/>
+          <c:showBubbleSize val="0"/>
+        </c:dLbls>
         <c:smooth val="0"/>
         <c:axId val="2118791784"/>
         <c:axId val="2140495176"/>
       </c:lineChart>
-      <c:catAx>
+      <c:dateAx>
         <c:axId val="2118791784"/>
         <c:scaling>
           <c:orientation val="minMax"/>
         </c:scaling>
         <c:delete val="0"/>
         <c:axPos val="b"/>
+        <c:numFmt formatCode="yy" sourceLinked="0"/>
         <c:majorTickMark val="none"/>
         <c:minorTickMark val="none"/>
         <c:tickLblPos val="nextTo"/>
@@ -6348,23 +3394,27 @@
                 <a:latin typeface="Arial"/>
               </a:defRPr>
             </a:pPr>
+            <a:endParaRPr lang="en-US"/>
           </a:p>
         </c:txPr>
         <c:crossAx val="2140495176"/>
         <c:crosses val="autoZero"/>
-        <c:auto val="1"/>
-        <c:lblAlgn val="ctr"/>
+        <c:auto val="0"/>
         <c:lblOffset val="100"/>
-        <c:noMultiLvlLbl val="0"/>
-      </c:catAx>
+        <c:baseTimeUnit val="days"/>
+        <c:majorUnit val="2"/>
+        <c:minorUnit val="10"/>
+      </c:dateAx>
       <c:valAx>
         <c:axId val="2140495176"/>
         <c:scaling>
-          <c:max val="4.4"/>
+          <c:orientation val="minMax"/>
+          <c:max val="4.4000000000000004"/>
           <c:min val="-0.5"/>
         </c:scaling>
         <c:delete val="0"/>
         <c:axPos val="l"/>
+        <c:numFmt formatCode="General" sourceLinked="1"/>
         <c:majorTickMark val="out"/>
         <c:minorTickMark val="none"/>
         <c:tickLblPos val="nextTo"/>
@@ -6387,15 +3437,17 @@
                 <a:latin typeface="Arial"/>
               </a:defRPr>
             </a:pPr>
+            <a:endParaRPr lang="en-US"/>
           </a:p>
         </c:txPr>
         <c:crossAx val="2118791784"/>
         <c:crosses val="autoZero"/>
+        <c:crossBetween val="between"/>
+        <c:majorUnit val="1"/>
       </c:valAx>
     </c:plotArea>
     <c:legend>
       <c:legendPos val="b"/>
-      <c:layout/>
       <c:overlay val="0"/>
       <c:txPr>
         <a:bodyPr/>
@@ -6406,6 +3458,7 @@
               <a:latin typeface="Arial"/>
             </a:defRPr>
           </a:pPr>
+          <a:endParaRPr lang="en-US"/>
         </a:p>
       </c:txPr>
     </c:legend>
@@ -6430,14 +3483,19 @@
 </file>
 
 <file path=ppt/charts/chart2.xml><?xml version="1.0" encoding="utf-8"?>
-<c:chartSpace xmlns:c="http://schemas.openxmlformats.org/drawingml/2006/chart" xmlns:a="http://schemas.openxmlformats.org/drawingml/2006/main" xmlns:r="http://schemas.openxmlformats.org/officeDocument/2006/relationships">
+<c:chartSpace xmlns:c="http://schemas.openxmlformats.org/drawingml/2006/chart" xmlns:a="http://schemas.openxmlformats.org/drawingml/2006/main" xmlns:r="http://schemas.openxmlformats.org/officeDocument/2006/relationships" xmlns:c16r2="http://schemas.microsoft.com/office/drawing/2015/06/chart">
   <c:date1904 val="0"/>
+  <c:lang val="en-GB"/>
+  <c:roundedCorners val="1"/>
+  <c:style val="2"/>
   <c:chart>
     <c:autoTitleDeleted val="1"/>
     <c:plotArea>
+      <c:layout/>
       <c:barChart>
         <c:barDir val="bar"/>
         <c:grouping val="clustered"/>
+        <c:varyColors val="1"/>
         <c:ser>
           <c:idx val="0"/>
           <c:order val="0"/>
@@ -6457,54 +3515,135 @@
               <a:noFill/>
             </a:ln>
           </c:spPr>
+          <c:invertIfNegative val="1"/>
           <c:dPt>
             <c:idx val="0"/>
+            <c:invertIfNegative val="1"/>
+            <c:bubble3D val="0"/>
             <c:spPr>
               <a:solidFill>
                 <a:srgbClr val="D7D8D6"/>
               </a:solidFill>
             </c:spPr>
+            <c:extLst>
+              <c:ext xmlns:c16="http://schemas.microsoft.com/office/drawing/2014/chart" uri="{C3380CC4-5D6E-409C-BE32-E72D297353CC}">
+                <c16:uniqueId val="{00000001-FAAE-CF4B-BED2-A5A35363A5F8}"/>
+              </c:ext>
+            </c:extLst>
           </c:dPt>
           <c:dPt>
             <c:idx val="1"/>
+            <c:invertIfNegative val="1"/>
+            <c:bubble3D val="0"/>
             <c:spPr>
               <a:solidFill>
                 <a:srgbClr val="D7D8D6"/>
               </a:solidFill>
             </c:spPr>
+            <c:extLst>
+              <c:ext xmlns:c16="http://schemas.microsoft.com/office/drawing/2014/chart" uri="{C3380CC4-5D6E-409C-BE32-E72D297353CC}">
+                <c16:uniqueId val="{00000003-FAAE-CF4B-BED2-A5A35363A5F8}"/>
+              </c:ext>
+            </c:extLst>
           </c:dPt>
           <c:dPt>
             <c:idx val="2"/>
+            <c:invertIfNegative val="1"/>
+            <c:bubble3D val="0"/>
             <c:spPr>
               <a:solidFill>
                 <a:srgbClr val="D7D8D6"/>
               </a:solidFill>
             </c:spPr>
+            <c:extLst>
+              <c:ext xmlns:c16="http://schemas.microsoft.com/office/drawing/2014/chart" uri="{C3380CC4-5D6E-409C-BE32-E72D297353CC}">
+                <c16:uniqueId val="{00000005-FAAE-CF4B-BED2-A5A35363A5F8}"/>
+              </c:ext>
+            </c:extLst>
           </c:dPt>
           <c:dPt>
             <c:idx val="3"/>
+            <c:invertIfNegative val="1"/>
+            <c:bubble3D val="0"/>
             <c:spPr>
               <a:solidFill>
                 <a:srgbClr val="D7D8D6"/>
               </a:solidFill>
             </c:spPr>
+            <c:extLst>
+              <c:ext xmlns:c16="http://schemas.microsoft.com/office/drawing/2014/chart" uri="{C3380CC4-5D6E-409C-BE32-E72D297353CC}">
+                <c16:uniqueId val="{00000007-FAAE-CF4B-BED2-A5A35363A5F8}"/>
+              </c:ext>
+            </c:extLst>
           </c:dPt>
           <c:dPt>
             <c:idx val="4"/>
+            <c:invertIfNegative val="1"/>
+            <c:bubble3D val="0"/>
             <c:spPr>
               <a:solidFill>
                 <a:srgbClr val="D7D8D6"/>
               </a:solidFill>
             </c:spPr>
+            <c:extLst>
+              <c:ext xmlns:c16="http://schemas.microsoft.com/office/drawing/2014/chart" uri="{C3380CC4-5D6E-409C-BE32-E72D297353CC}">
+                <c16:uniqueId val="{00000009-FAAE-CF4B-BED2-A5A35363A5F8}"/>
+              </c:ext>
+            </c:extLst>
           </c:dPt>
           <c:dPt>
             <c:idx val="5"/>
+            <c:invertIfNegative val="1"/>
+            <c:bubble3D val="0"/>
             <c:spPr>
               <a:solidFill>
                 <a:srgbClr val="DB0011"/>
               </a:solidFill>
             </c:spPr>
+            <c:extLst>
+              <c:ext xmlns:c16="http://schemas.microsoft.com/office/drawing/2014/chart" uri="{C3380CC4-5D6E-409C-BE32-E72D297353CC}">
+                <c16:uniqueId val="{0000000B-FAAE-CF4B-BED2-A5A35363A5F8}"/>
+              </c:ext>
+            </c:extLst>
           </c:dPt>
+          <c:dLbls>
+            <c:numFmt formatCode="0.0&quot;%&quot;" sourceLinked="0"/>
+            <c:spPr>
+              <a:noFill/>
+              <a:ln>
+                <a:noFill/>
+              </a:ln>
+              <a:effectLst/>
+            </c:spPr>
+            <c:txPr>
+              <a:bodyPr/>
+              <a:lstStyle/>
+              <a:p>
+                <a:pPr>
+                  <a:defRPr sz="800" b="1">
+                    <a:solidFill>
+                      <a:srgbClr val="000000"/>
+                    </a:solidFill>
+                    <a:latin typeface="Arial"/>
+                  </a:defRPr>
+                </a:pPr>
+                <a:endParaRPr lang="en-US"/>
+              </a:p>
+            </c:txPr>
+            <c:dLblPos val="outEnd"/>
+            <c:showLegendKey val="0"/>
+            <c:showVal val="1"/>
+            <c:showCatName val="0"/>
+            <c:showSerName val="0"/>
+            <c:showPercent val="0"/>
+            <c:showBubbleSize val="0"/>
+            <c:showLeaderLines val="0"/>
+            <c:extLst>
+              <c:ext xmlns:c15="http://schemas.microsoft.com/office/drawing/2012/chart" uri="{CE6537A1-D6FC-4f65-9D91-7224C49458BB}">
+                <c15:showLeaderLines val="0"/>
+              </c:ext>
+            </c:extLst>
+          </c:dLbls>
           <c:cat>
             <c:strRef>
               <c:f>Sheet1!$A$2:$A$7</c:f>
@@ -6558,23 +3697,13 @@
               </c:numCache>
             </c:numRef>
           </c:val>
+          <c:extLst>
+            <c:ext xmlns:c16="http://schemas.microsoft.com/office/drawing/2014/chart" uri="{C3380CC4-5D6E-409C-BE32-E72D297353CC}">
+              <c16:uniqueId val="{0000000C-FAAE-CF4B-BED2-A5A35363A5F8}"/>
+            </c:ext>
+          </c:extLst>
         </c:ser>
         <c:dLbls>
-          <c:numFmt formatCode="0.0&quot;%&quot;" sourceLinked="0"/>
-          <c:txPr>
-            <a:bodyPr/>
-            <a:lstStyle/>
-            <a:p>
-              <a:pPr>
-                <a:defRPr sz="800" b="1">
-                  <a:solidFill>
-                    <a:srgbClr val="000000"/>
-                  </a:solidFill>
-                  <a:latin typeface="Arial"/>
-                </a:defRPr>
-              </a:pPr>
-            </a:p>
-          </c:txPr>
           <c:dLblPos val="outEnd"/>
           <c:showLegendKey val="0"/>
           <c:showVal val="1"/>
@@ -6582,7 +3711,6 @@
           <c:showSerName val="0"/>
           <c:showPercent val="0"/>
           <c:showBubbleSize val="0"/>
-          <c:showLeaderLines val="1"/>
         </c:dLbls>
         <c:gapWidth val="55"/>
         <c:axId val="-2068027336"/>
@@ -6595,6 +3723,7 @@
         </c:scaling>
         <c:delete val="0"/>
         <c:axPos val="l"/>
+        <c:numFmt formatCode="General" sourceLinked="0"/>
         <c:majorTickMark val="none"/>
         <c:minorTickMark val="none"/>
         <c:tickLblPos val="nextTo"/>
@@ -6617,6 +3746,7 @@
                 <a:latin typeface="Arial"/>
               </a:defRPr>
             </a:pPr>
+            <a:endParaRPr lang="en-US"/>
           </a:p>
         </c:txPr>
         <c:crossAx val="-2113994440"/>
@@ -6629,18 +3759,23 @@
       <c:valAx>
         <c:axId val="-2113994440"/>
         <c:scaling>
-          <c:max val="58.0"/>
+          <c:orientation val="minMax"/>
+          <c:max val="58"/>
         </c:scaling>
-        <c:delete/>
+        <c:delete val="1"/>
         <c:axPos val="b"/>
+        <c:numFmt formatCode="General" sourceLinked="1"/>
         <c:majorTickMark val="out"/>
         <c:minorTickMark val="none"/>
         <c:tickLblPos val="nextTo"/>
         <c:crossAx val="-2068027336"/>
         <c:crosses val="autoZero"/>
+        <c:crossBetween val="between"/>
       </c:valAx>
     </c:plotArea>
+    <c:plotVisOnly val="1"/>
     <c:dispBlanksAs val="gap"/>
+    <c:showDLblsOverMax val="1"/>
   </c:chart>
   <c:txPr>
     <a:bodyPr/>
@@ -6659,14 +3794,19 @@
 </file>
 
 <file path=ppt/charts/chart3.xml><?xml version="1.0" encoding="utf-8"?>
-<c:chartSpace xmlns:c="http://schemas.openxmlformats.org/drawingml/2006/chart" xmlns:a="http://schemas.openxmlformats.org/drawingml/2006/main" xmlns:r="http://schemas.openxmlformats.org/officeDocument/2006/relationships">
+<c:chartSpace xmlns:c="http://schemas.openxmlformats.org/drawingml/2006/chart" xmlns:a="http://schemas.openxmlformats.org/drawingml/2006/main" xmlns:r="http://schemas.openxmlformats.org/officeDocument/2006/relationships" xmlns:c16r2="http://schemas.microsoft.com/office/drawing/2015/06/chart">
   <c:date1904 val="0"/>
+  <c:lang val="en-GB"/>
+  <c:roundedCorners val="1"/>
+  <c:style val="2"/>
   <c:chart>
     <c:autoTitleDeleted val="1"/>
     <c:plotArea>
+      <c:layout/>
       <c:barChart>
         <c:barDir val="col"/>
         <c:grouping val="clustered"/>
+        <c:varyColors val="1"/>
         <c:ser>
           <c:idx val="0"/>
           <c:order val="0"/>
@@ -6686,38 +3826,105 @@
               <a:noFill/>
             </a:ln>
           </c:spPr>
+          <c:invertIfNegative val="1"/>
           <c:dPt>
             <c:idx val="0"/>
+            <c:invertIfNegative val="1"/>
+            <c:bubble3D val="0"/>
             <c:spPr>
               <a:solidFill>
                 <a:srgbClr val="DB0011"/>
               </a:solidFill>
             </c:spPr>
+            <c:extLst>
+              <c:ext xmlns:c16="http://schemas.microsoft.com/office/drawing/2014/chart" uri="{C3380CC4-5D6E-409C-BE32-E72D297353CC}">
+                <c16:uniqueId val="{00000001-3BA2-2344-B3EF-E746EA7590D6}"/>
+              </c:ext>
+            </c:extLst>
           </c:dPt>
           <c:dPt>
             <c:idx val="1"/>
+            <c:invertIfNegative val="1"/>
+            <c:bubble3D val="0"/>
             <c:spPr>
               <a:solidFill>
                 <a:srgbClr val="D7D8D6"/>
               </a:solidFill>
             </c:spPr>
+            <c:extLst>
+              <c:ext xmlns:c16="http://schemas.microsoft.com/office/drawing/2014/chart" uri="{C3380CC4-5D6E-409C-BE32-E72D297353CC}">
+                <c16:uniqueId val="{00000003-3BA2-2344-B3EF-E746EA7590D6}"/>
+              </c:ext>
+            </c:extLst>
           </c:dPt>
           <c:dPt>
             <c:idx val="2"/>
+            <c:invertIfNegative val="1"/>
+            <c:bubble3D val="0"/>
             <c:spPr>
               <a:solidFill>
                 <a:srgbClr val="D7D8D6"/>
               </a:solidFill>
             </c:spPr>
+            <c:extLst>
+              <c:ext xmlns:c16="http://schemas.microsoft.com/office/drawing/2014/chart" uri="{C3380CC4-5D6E-409C-BE32-E72D297353CC}">
+                <c16:uniqueId val="{00000005-3BA2-2344-B3EF-E746EA7590D6}"/>
+              </c:ext>
+            </c:extLst>
           </c:dPt>
           <c:dPt>
             <c:idx val="3"/>
+            <c:invertIfNegative val="1"/>
+            <c:bubble3D val="0"/>
             <c:spPr>
               <a:solidFill>
                 <a:srgbClr val="D7D8D6"/>
               </a:solidFill>
             </c:spPr>
+            <c:extLst>
+              <c:ext xmlns:c16="http://schemas.microsoft.com/office/drawing/2014/chart" uri="{C3380CC4-5D6E-409C-BE32-E72D297353CC}">
+                <c16:uniqueId val="{00000007-3BA2-2344-B3EF-E746EA7590D6}"/>
+              </c:ext>
+            </c:extLst>
           </c:dPt>
+          <c:dLbls>
+            <c:numFmt formatCode="0.0&quot;%&quot;" sourceLinked="0"/>
+            <c:spPr>
+              <a:noFill/>
+              <a:ln>
+                <a:noFill/>
+              </a:ln>
+              <a:effectLst/>
+            </c:spPr>
+            <c:txPr>
+              <a:bodyPr/>
+              <a:lstStyle/>
+              <a:p>
+                <a:pPr>
+                  <a:defRPr sz="1000">
+                    <a:solidFill>
+                      <a:srgbClr val="000000"/>
+                    </a:solidFill>
+                    <a:latin typeface="Arial"/>
+                  </a:defRPr>
+                </a:pPr>
+                <a:endParaRPr lang="en-US"/>
+              </a:p>
+            </c:txPr>
+            <c:dLblPos val="outEnd"/>
+            <c:showLegendKey val="0"/>
+            <c:showVal val="1"/>
+            <c:showCatName val="0"/>
+            <c:showSerName val="0"/>
+            <c:showPercent val="0"/>
+            <c:showBubbleSize val="0"/>
+            <c:showLeaderLines val="0"/>
+            <c:extLst>
+              <c:ext xmlns:c15="http://schemas.microsoft.com/office/drawing/2012/chart" uri="{CE6537A1-D6FC-4f65-9D91-7224C49458BB}">
+                <c15:showLeaderLines val="0"/>
+              </c:ext>
+            </c:extLst>
+          </c:dLbls>
           <c:cat>
             <c:strRef>
               <c:f>Sheet1!$A$2:$A$5</c:f>
@@ -6749,7 +3956,7 @@
                 <c:formatCode>General</c:formatCode>
                 <c:ptCount val="4"/>
                 <c:pt idx="0">
-                  <c:v>2.0</c:v>
+                  <c:v>2</c:v>
                 </c:pt>
                 <c:pt idx="1">
                   <c:v>3.5</c:v>
@@ -6763,23 +3970,13 @@
               </c:numCache>
             </c:numRef>
           </c:val>
+          <c:extLst>
+            <c:ext xmlns:c16="http://schemas.microsoft.com/office/drawing/2014/chart" uri="{C3380CC4-5D6E-409C-BE32-E72D297353CC}">
+              <c16:uniqueId val="{00000008-3BA2-2344-B3EF-E746EA7590D6}"/>
+            </c:ext>
+          </c:extLst>
         </c:ser>
         <c:dLbls>
-          <c:numFmt formatCode="0.0&quot;%&quot;" sourceLinked="0"/>
-          <c:txPr>
-            <a:bodyPr/>
-            <a:lstStyle/>
-            <a:p>
-              <a:pPr>
-                <a:defRPr sz="1000">
-                  <a:solidFill>
-                    <a:srgbClr val="000000"/>
-                  </a:solidFill>
-                  <a:latin typeface="Arial"/>
-                </a:defRPr>
-              </a:pPr>
-            </a:p>
-          </c:txPr>
           <c:dLblPos val="outEnd"/>
           <c:showLegendKey val="0"/>
           <c:showVal val="1"/>
@@ -6787,7 +3984,6 @@
           <c:showSerName val="0"/>
           <c:showPercent val="0"/>
           <c:showBubbleSize val="0"/>
-          <c:showLeaderLines val="1"/>
         </c:dLbls>
         <c:gapWidth val="60"/>
         <c:axId val="-2068027336"/>
@@ -6800,6 +3996,7 @@
         </c:scaling>
         <c:delete val="0"/>
         <c:axPos val="b"/>
+        <c:numFmt formatCode="General" sourceLinked="0"/>
         <c:majorTickMark val="none"/>
         <c:minorTickMark val="none"/>
         <c:tickLblPos val="nextTo"/>
@@ -6822,6 +4019,7 @@
                 <a:latin typeface="Arial"/>
               </a:defRPr>
             </a:pPr>
+            <a:endParaRPr lang="en-US"/>
           </a:p>
         </c:txPr>
         <c:crossAx val="-2113994440"/>
@@ -6834,19 +4032,24 @@
       <c:valAx>
         <c:axId val="-2113994440"/>
         <c:scaling>
-          <c:max val="4.6"/>
-          <c:min val="0.0"/>
+          <c:orientation val="minMax"/>
+          <c:max val="4.5999999999999996"/>
+          <c:min val="0"/>
         </c:scaling>
-        <c:delete/>
+        <c:delete val="1"/>
         <c:axPos val="l"/>
+        <c:numFmt formatCode="General" sourceLinked="1"/>
         <c:majorTickMark val="out"/>
         <c:minorTickMark val="none"/>
         <c:tickLblPos val="nextTo"/>
         <c:crossAx val="-2068027336"/>
         <c:crosses val="autoZero"/>
+        <c:crossBetween val="between"/>
       </c:valAx>
     </c:plotArea>
+    <c:plotVisOnly val="1"/>
     <c:dispBlanksAs val="gap"/>
+    <c:showDLblsOverMax val="1"/>
   </c:chart>
   <c:txPr>
     <a:bodyPr/>
@@ -6902,10 +4105,9 @@
           <a:lstStyle/>
           <a:p>
             <a:r>
-              <a:rPr lang="en-US" smtClean="0"/>
+              <a:rPr lang="en-US"/>
               <a:t>Click to edit Master title style</a:t>
             </a:r>
-            <a:endParaRPr lang="en-US"/>
           </a:p>
         </p:txBody>
       </p:sp>
@@ -7021,10 +4223,9 @@
           </a:lstStyle>
           <a:p>
             <a:r>
-              <a:rPr lang="en-US" smtClean="0"/>
+              <a:rPr lang="en-US"/>
               <a:t>Click to edit Master subtitle style</a:t>
             </a:r>
-            <a:endParaRPr lang="en-US"/>
           </a:p>
         </p:txBody>
       </p:sp>
@@ -7045,7 +4246,7 @@
           <a:p>
             <a:fld id="{5BCAD085-E8A6-8845-BD4E-CB4CCA059FC4}" type="datetimeFigureOut">
               <a:rPr lang="en-US" smtClean="0"/>
-              <a:t>1/27/13</a:t>
+              <a:t>8/9/26</a:t>
             </a:fld>
             <a:endParaRPr lang="en-US"/>
           </a:p>
@@ -7139,10 +4340,9 @@
           <a:lstStyle/>
           <a:p>
             <a:r>
-              <a:rPr lang="en-US" smtClean="0"/>
+              <a:rPr lang="en-US"/>
               <a:t>Click to edit Master title style</a:t>
             </a:r>
-            <a:endParaRPr lang="en-US"/>
           </a:p>
         </p:txBody>
       </p:sp>
@@ -7163,38 +4363,37 @@
           <a:p>
             <a:pPr lvl="0"/>
             <a:r>
-              <a:rPr lang="en-US" smtClean="0"/>
+              <a:rPr lang="en-US"/>
               <a:t>Click to edit Master text styles</a:t>
             </a:r>
           </a:p>
           <a:p>
             <a:pPr lvl="1"/>
             <a:r>
-              <a:rPr lang="en-US" smtClean="0"/>
+              <a:rPr lang="en-US"/>
               <a:t>Second level</a:t>
             </a:r>
           </a:p>
           <a:p>
             <a:pPr lvl="2"/>
             <a:r>
-              <a:rPr lang="en-US" smtClean="0"/>
+              <a:rPr lang="en-US"/>
               <a:t>Third level</a:t>
             </a:r>
           </a:p>
           <a:p>
             <a:pPr lvl="3"/>
             <a:r>
-              <a:rPr lang="en-US" smtClean="0"/>
+              <a:rPr lang="en-US"/>
               <a:t>Fourth level</a:t>
             </a:r>
           </a:p>
           <a:p>
             <a:pPr lvl="4"/>
             <a:r>
-              <a:rPr lang="en-US" smtClean="0"/>
+              <a:rPr lang="en-US"/>
               <a:t>Fifth level</a:t>
             </a:r>
-            <a:endParaRPr lang="en-US"/>
           </a:p>
         </p:txBody>
       </p:sp>
@@ -7215,7 +4414,7 @@
           <a:p>
             <a:fld id="{5BCAD085-E8A6-8845-BD4E-CB4CCA059FC4}" type="datetimeFigureOut">
               <a:rPr lang="en-US" smtClean="0"/>
-              <a:t>1/27/13</a:t>
+              <a:t>8/9/26</a:t>
             </a:fld>
             <a:endParaRPr lang="en-US"/>
           </a:p>
@@ -7314,10 +4513,9 @@
           <a:lstStyle/>
           <a:p>
             <a:r>
-              <a:rPr lang="en-US" smtClean="0"/>
+              <a:rPr lang="en-US"/>
               <a:t>Click to edit Master title style</a:t>
             </a:r>
-            <a:endParaRPr lang="en-US"/>
           </a:p>
         </p:txBody>
       </p:sp>
@@ -7343,38 +4541,37 @@
           <a:p>
             <a:pPr lvl="0"/>
             <a:r>
-              <a:rPr lang="en-US" smtClean="0"/>
+              <a:rPr lang="en-US"/>
               <a:t>Click to edit Master text styles</a:t>
             </a:r>
           </a:p>
           <a:p>
             <a:pPr lvl="1"/>
             <a:r>
-              <a:rPr lang="en-US" smtClean="0"/>
+              <a:rPr lang="en-US"/>
               <a:t>Second level</a:t>
             </a:r>
           </a:p>
           <a:p>
             <a:pPr lvl="2"/>
             <a:r>
-              <a:rPr lang="en-US" smtClean="0"/>
+              <a:rPr lang="en-US"/>
               <a:t>Third level</a:t>
             </a:r>
           </a:p>
           <a:p>
             <a:pPr lvl="3"/>
             <a:r>
-              <a:rPr lang="en-US" smtClean="0"/>
+              <a:rPr lang="en-US"/>
               <a:t>Fourth level</a:t>
             </a:r>
           </a:p>
           <a:p>
             <a:pPr lvl="4"/>
             <a:r>
-              <a:rPr lang="en-US" smtClean="0"/>
+              <a:rPr lang="en-US"/>
               <a:t>Fifth level</a:t>
             </a:r>
-            <a:endParaRPr lang="en-US"/>
           </a:p>
         </p:txBody>
       </p:sp>
@@ -7395,7 +4592,7 @@
           <a:p>
             <a:fld id="{5BCAD085-E8A6-8845-BD4E-CB4CCA059FC4}" type="datetimeFigureOut">
               <a:rPr lang="en-US" smtClean="0"/>
-              <a:t>1/27/13</a:t>
+              <a:t>8/9/26</a:t>
             </a:fld>
             <a:endParaRPr lang="en-US"/>
           </a:p>
@@ -7489,10 +4686,9 @@
           <a:lstStyle/>
           <a:p>
             <a:r>
-              <a:rPr lang="en-US" smtClean="0"/>
+              <a:rPr lang="en-US"/>
               <a:t>Click to edit Master title style</a:t>
             </a:r>
-            <a:endParaRPr lang="en-US"/>
           </a:p>
         </p:txBody>
       </p:sp>
@@ -7513,38 +4709,37 @@
           <a:p>
             <a:pPr lvl="0"/>
             <a:r>
-              <a:rPr lang="en-US" smtClean="0"/>
+              <a:rPr lang="en-US"/>
               <a:t>Click to edit Master text styles</a:t>
             </a:r>
           </a:p>
           <a:p>
             <a:pPr lvl="1"/>
             <a:r>
-              <a:rPr lang="en-US" smtClean="0"/>
+              <a:rPr lang="en-US"/>
               <a:t>Second level</a:t>
             </a:r>
           </a:p>
           <a:p>
             <a:pPr lvl="2"/>
             <a:r>
-              <a:rPr lang="en-US" smtClean="0"/>
+              <a:rPr lang="en-US"/>
               <a:t>Third level</a:t>
             </a:r>
           </a:p>
           <a:p>
             <a:pPr lvl="3"/>
             <a:r>
-              <a:rPr lang="en-US" smtClean="0"/>
+              <a:rPr lang="en-US"/>
               <a:t>Fourth level</a:t>
             </a:r>
           </a:p>
           <a:p>
             <a:pPr lvl="4"/>
             <a:r>
-              <a:rPr lang="en-US" smtClean="0"/>
+              <a:rPr lang="en-US"/>
               <a:t>Fifth level</a:t>
             </a:r>
-            <a:endParaRPr lang="en-US"/>
           </a:p>
         </p:txBody>
       </p:sp>
@@ -7565,7 +4760,7 @@
           <a:p>
             <a:fld id="{5BCAD085-E8A6-8845-BD4E-CB4CCA059FC4}" type="datetimeFigureOut">
               <a:rPr lang="en-US" smtClean="0"/>
-              <a:t>1/27/13</a:t>
+              <a:t>8/9/26</a:t>
             </a:fld>
             <a:endParaRPr lang="en-US"/>
           </a:p>
@@ -7668,10 +4863,9 @@
           </a:lstStyle>
           <a:p>
             <a:r>
-              <a:rPr lang="en-US" smtClean="0"/>
+              <a:rPr lang="en-US"/>
               <a:t>Click to edit Master title style</a:t>
             </a:r>
-            <a:endParaRPr lang="en-US"/>
           </a:p>
         </p:txBody>
       </p:sp>
@@ -7788,7 +4982,7 @@
           <a:p>
             <a:pPr lvl="0"/>
             <a:r>
-              <a:rPr lang="en-US" smtClean="0"/>
+              <a:rPr lang="en-US"/>
               <a:t>Click to edit Master text styles</a:t>
             </a:r>
           </a:p>
@@ -7811,7 +5005,7 @@
           <a:p>
             <a:fld id="{5BCAD085-E8A6-8845-BD4E-CB4CCA059FC4}" type="datetimeFigureOut">
               <a:rPr lang="en-US" smtClean="0"/>
-              <a:t>1/27/13</a:t>
+              <a:t>8/9/26</a:t>
             </a:fld>
             <a:endParaRPr lang="en-US"/>
           </a:p>
@@ -7905,10 +5099,9 @@
           <a:lstStyle/>
           <a:p>
             <a:r>
-              <a:rPr lang="en-US" smtClean="0"/>
+              <a:rPr lang="en-US"/>
               <a:t>Click to edit Master title style</a:t>
             </a:r>
-            <a:endParaRPr lang="en-US"/>
           </a:p>
         </p:txBody>
       </p:sp>
@@ -7962,38 +5155,37 @@
           <a:p>
             <a:pPr lvl="0"/>
             <a:r>
-              <a:rPr lang="en-US" smtClean="0"/>
+              <a:rPr lang="en-US"/>
               <a:t>Click to edit Master text styles</a:t>
             </a:r>
           </a:p>
           <a:p>
             <a:pPr lvl="1"/>
             <a:r>
-              <a:rPr lang="en-US" smtClean="0"/>
+              <a:rPr lang="en-US"/>
               <a:t>Second level</a:t>
             </a:r>
           </a:p>
           <a:p>
             <a:pPr lvl="2"/>
             <a:r>
-              <a:rPr lang="en-US" smtClean="0"/>
+              <a:rPr lang="en-US"/>
               <a:t>Third level</a:t>
             </a:r>
           </a:p>
           <a:p>
             <a:pPr lvl="3"/>
             <a:r>
-              <a:rPr lang="en-US" smtClean="0"/>
+              <a:rPr lang="en-US"/>
               <a:t>Fourth level</a:t>
             </a:r>
           </a:p>
           <a:p>
             <a:pPr lvl="4"/>
             <a:r>
-              <a:rPr lang="en-US" smtClean="0"/>
+              <a:rPr lang="en-US"/>
               <a:t>Fifth level</a:t>
             </a:r>
-            <a:endParaRPr lang="en-US"/>
           </a:p>
         </p:txBody>
       </p:sp>
@@ -8047,38 +5239,37 @@
           <a:p>
             <a:pPr lvl="0"/>
             <a:r>
-              <a:rPr lang="en-US" smtClean="0"/>
+              <a:rPr lang="en-US"/>
               <a:t>Click to edit Master text styles</a:t>
             </a:r>
           </a:p>
           <a:p>
             <a:pPr lvl="1"/>
             <a:r>
-              <a:rPr lang="en-US" smtClean="0"/>
+              <a:rPr lang="en-US"/>
               <a:t>Second level</a:t>
             </a:r>
           </a:p>
           <a:p>
             <a:pPr lvl="2"/>
             <a:r>
-              <a:rPr lang="en-US" smtClean="0"/>
+              <a:rPr lang="en-US"/>
               <a:t>Third level</a:t>
             </a:r>
           </a:p>
           <a:p>
             <a:pPr lvl="3"/>
             <a:r>
-              <a:rPr lang="en-US" smtClean="0"/>
+              <a:rPr lang="en-US"/>
               <a:t>Fourth level</a:t>
             </a:r>
           </a:p>
           <a:p>
             <a:pPr lvl="4"/>
             <a:r>
-              <a:rPr lang="en-US" smtClean="0"/>
+              <a:rPr lang="en-US"/>
               <a:t>Fifth level</a:t>
             </a:r>
-            <a:endParaRPr lang="en-US"/>
           </a:p>
         </p:txBody>
       </p:sp>
@@ -8099,7 +5290,7 @@
           <a:p>
             <a:fld id="{5BCAD085-E8A6-8845-BD4E-CB4CCA059FC4}" type="datetimeFigureOut">
               <a:rPr lang="en-US" smtClean="0"/>
-              <a:t>1/27/13</a:t>
+              <a:t>8/9/26</a:t>
             </a:fld>
             <a:endParaRPr lang="en-US"/>
           </a:p>
@@ -8197,10 +5388,9 @@
           </a:lstStyle>
           <a:p>
             <a:r>
-              <a:rPr lang="en-US" smtClean="0"/>
+              <a:rPr lang="en-US"/>
               <a:t>Click to edit Master title style</a:t>
             </a:r>
-            <a:endParaRPr lang="en-US"/>
           </a:p>
         </p:txBody>
       </p:sp>
@@ -8263,7 +5453,7 @@
           <a:p>
             <a:pPr lvl="0"/>
             <a:r>
-              <a:rPr lang="en-US" smtClean="0"/>
+              <a:rPr lang="en-US"/>
               <a:t>Click to edit Master text styles</a:t>
             </a:r>
           </a:p>
@@ -8319,38 +5509,37 @@
           <a:p>
             <a:pPr lvl="0"/>
             <a:r>
-              <a:rPr lang="en-US" smtClean="0"/>
+              <a:rPr lang="en-US"/>
               <a:t>Click to edit Master text styles</a:t>
             </a:r>
           </a:p>
           <a:p>
             <a:pPr lvl="1"/>
             <a:r>
-              <a:rPr lang="en-US" smtClean="0"/>
+              <a:rPr lang="en-US"/>
               <a:t>Second level</a:t>
             </a:r>
           </a:p>
           <a:p>
             <a:pPr lvl="2"/>
             <a:r>
-              <a:rPr lang="en-US" smtClean="0"/>
+              <a:rPr lang="en-US"/>
               <a:t>Third level</a:t>
             </a:r>
           </a:p>
           <a:p>
             <a:pPr lvl="3"/>
             <a:r>
-              <a:rPr lang="en-US" smtClean="0"/>
+              <a:rPr lang="en-US"/>
               <a:t>Fourth level</a:t>
             </a:r>
           </a:p>
           <a:p>
             <a:pPr lvl="4"/>
             <a:r>
-              <a:rPr lang="en-US" smtClean="0"/>
+              <a:rPr lang="en-US"/>
               <a:t>Fifth level</a:t>
             </a:r>
-            <a:endParaRPr lang="en-US"/>
           </a:p>
         </p:txBody>
       </p:sp>
@@ -8413,7 +5602,7 @@
           <a:p>
             <a:pPr lvl="0"/>
             <a:r>
-              <a:rPr lang="en-US" smtClean="0"/>
+              <a:rPr lang="en-US"/>
               <a:t>Click to edit Master text styles</a:t>
             </a:r>
           </a:p>
@@ -8469,38 +5658,37 @@
           <a:p>
             <a:pPr lvl="0"/>
             <a:r>
-              <a:rPr lang="en-US" smtClean="0"/>
+              <a:rPr lang="en-US"/>
               <a:t>Click to edit Master text styles</a:t>
             </a:r>
           </a:p>
           <a:p>
             <a:pPr lvl="1"/>
             <a:r>
-              <a:rPr lang="en-US" smtClean="0"/>
+              <a:rPr lang="en-US"/>
               <a:t>Second level</a:t>
             </a:r>
           </a:p>
           <a:p>
             <a:pPr lvl="2"/>
             <a:r>
-              <a:rPr lang="en-US" smtClean="0"/>
+              <a:rPr lang="en-US"/>
               <a:t>Third level</a:t>
             </a:r>
           </a:p>
           <a:p>
             <a:pPr lvl="3"/>
             <a:r>
-              <a:rPr lang="en-US" smtClean="0"/>
+              <a:rPr lang="en-US"/>
               <a:t>Fourth level</a:t>
             </a:r>
           </a:p>
           <a:p>
             <a:pPr lvl="4"/>
             <a:r>
-              <a:rPr lang="en-US" smtClean="0"/>
+              <a:rPr lang="en-US"/>
               <a:t>Fifth level</a:t>
             </a:r>
-            <a:endParaRPr lang="en-US"/>
           </a:p>
         </p:txBody>
       </p:sp>
@@ -8521,7 +5709,7 @@
           <a:p>
             <a:fld id="{5BCAD085-E8A6-8845-BD4E-CB4CCA059FC4}" type="datetimeFigureOut">
               <a:rPr lang="en-US" smtClean="0"/>
-              <a:t>1/27/13</a:t>
+              <a:t>8/9/26</a:t>
             </a:fld>
             <a:endParaRPr lang="en-US"/>
           </a:p>
@@ -8615,10 +5803,9 @@
           <a:lstStyle/>
           <a:p>
             <a:r>
-              <a:rPr lang="en-US" smtClean="0"/>
+              <a:rPr lang="en-US"/>
               <a:t>Click to edit Master title style</a:t>
             </a:r>
-            <a:endParaRPr lang="en-US"/>
           </a:p>
         </p:txBody>
       </p:sp>
@@ -8639,7 +5826,7 @@
           <a:p>
             <a:fld id="{5BCAD085-E8A6-8845-BD4E-CB4CCA059FC4}" type="datetimeFigureOut">
               <a:rPr lang="en-US" smtClean="0"/>
-              <a:t>1/27/13</a:t>
+              <a:t>8/9/26</a:t>
             </a:fld>
             <a:endParaRPr lang="en-US"/>
           </a:p>
@@ -8734,7 +5921,7 @@
           <a:p>
             <a:fld id="{5BCAD085-E8A6-8845-BD4E-CB4CCA059FC4}" type="datetimeFigureOut">
               <a:rPr lang="en-US" smtClean="0"/>
-              <a:t>1/27/13</a:t>
+              <a:t>8/9/26</a:t>
             </a:fld>
             <a:endParaRPr lang="en-US"/>
           </a:p>
@@ -8837,10 +6024,9 @@
           </a:lstStyle>
           <a:p>
             <a:r>
-              <a:rPr lang="en-US" smtClean="0"/>
+              <a:rPr lang="en-US"/>
               <a:t>Click to edit Master title style</a:t>
             </a:r>
-            <a:endParaRPr lang="en-US"/>
           </a:p>
         </p:txBody>
       </p:sp>
@@ -8894,38 +6080,37 @@
           <a:p>
             <a:pPr lvl="0"/>
             <a:r>
-              <a:rPr lang="en-US" smtClean="0"/>
+              <a:rPr lang="en-US"/>
               <a:t>Click to edit Master text styles</a:t>
             </a:r>
           </a:p>
           <a:p>
             <a:pPr lvl="1"/>
             <a:r>
-              <a:rPr lang="en-US" smtClean="0"/>
+              <a:rPr lang="en-US"/>
               <a:t>Second level</a:t>
             </a:r>
           </a:p>
           <a:p>
             <a:pPr lvl="2"/>
             <a:r>
-              <a:rPr lang="en-US" smtClean="0"/>
+              <a:rPr lang="en-US"/>
               <a:t>Third level</a:t>
             </a:r>
           </a:p>
           <a:p>
             <a:pPr lvl="3"/>
             <a:r>
-              <a:rPr lang="en-US" smtClean="0"/>
+              <a:rPr lang="en-US"/>
               <a:t>Fourth level</a:t>
             </a:r>
           </a:p>
           <a:p>
             <a:pPr lvl="4"/>
             <a:r>
-              <a:rPr lang="en-US" smtClean="0"/>
+              <a:rPr lang="en-US"/>
               <a:t>Fifth level</a:t>
             </a:r>
-            <a:endParaRPr lang="en-US"/>
           </a:p>
         </p:txBody>
       </p:sp>
@@ -8988,7 +6173,7 @@
           <a:p>
             <a:pPr lvl="0"/>
             <a:r>
-              <a:rPr lang="en-US" smtClean="0"/>
+              <a:rPr lang="en-US"/>
               <a:t>Click to edit Master text styles</a:t>
             </a:r>
           </a:p>
@@ -9011,7 +6196,7 @@
           <a:p>
             <a:fld id="{5BCAD085-E8A6-8845-BD4E-CB4CCA059FC4}" type="datetimeFigureOut">
               <a:rPr lang="en-US" smtClean="0"/>
-              <a:t>1/27/13</a:t>
+              <a:t>8/9/26</a:t>
             </a:fld>
             <a:endParaRPr lang="en-US"/>
           </a:p>
@@ -9114,10 +6299,9 @@
           </a:lstStyle>
           <a:p>
             <a:r>
-              <a:rPr lang="en-US" smtClean="0"/>
+              <a:rPr lang="en-US"/>
               <a:t>Click to edit Master title style</a:t>
             </a:r>
-            <a:endParaRPr lang="en-US"/>
           </a:p>
         </p:txBody>
       </p:sp>
@@ -9241,7 +6425,7 @@
           <a:p>
             <a:pPr lvl="0"/>
             <a:r>
-              <a:rPr lang="en-US" smtClean="0"/>
+              <a:rPr lang="en-US"/>
               <a:t>Click to edit Master text styles</a:t>
             </a:r>
           </a:p>
@@ -9264,7 +6448,7 @@
           <a:p>
             <a:fld id="{5BCAD085-E8A6-8845-BD4E-CB4CCA059FC4}" type="datetimeFigureOut">
               <a:rPr lang="en-US" smtClean="0"/>
-              <a:t>1/27/13</a:t>
+              <a:t>8/9/26</a:t>
             </a:fld>
             <a:endParaRPr lang="en-US"/>
           </a:p>
@@ -9373,10 +6557,9 @@
           <a:lstStyle/>
           <a:p>
             <a:r>
-              <a:rPr lang="en-US" smtClean="0"/>
+              <a:rPr lang="en-US"/>
               <a:t>Click to edit Master title style</a:t>
             </a:r>
-            <a:endParaRPr lang="en-US"/>
           </a:p>
         </p:txBody>
       </p:sp>
@@ -9407,38 +6590,37 @@
           <a:p>
             <a:pPr lvl="0"/>
             <a:r>
-              <a:rPr lang="en-US" smtClean="0"/>
+              <a:rPr lang="en-US"/>
               <a:t>Click to edit Master text styles</a:t>
             </a:r>
           </a:p>
           <a:p>
             <a:pPr lvl="1"/>
             <a:r>
-              <a:rPr lang="en-US" smtClean="0"/>
+              <a:rPr lang="en-US"/>
               <a:t>Second level</a:t>
             </a:r>
           </a:p>
           <a:p>
             <a:pPr lvl="2"/>
             <a:r>
-              <a:rPr lang="en-US" smtClean="0"/>
+              <a:rPr lang="en-US"/>
               <a:t>Third level</a:t>
             </a:r>
           </a:p>
           <a:p>
             <a:pPr lvl="3"/>
             <a:r>
-              <a:rPr lang="en-US" smtClean="0"/>
+              <a:rPr lang="en-US"/>
               <a:t>Fourth level</a:t>
             </a:r>
           </a:p>
           <a:p>
             <a:pPr lvl="4"/>
             <a:r>
-              <a:rPr lang="en-US" smtClean="0"/>
+              <a:rPr lang="en-US"/>
               <a:t>Fifth level</a:t>
             </a:r>
-            <a:endParaRPr lang="en-US"/>
           </a:p>
         </p:txBody>
       </p:sp>
@@ -9477,7 +6659,7 @@
           <a:p>
             <a:fld id="{5BCAD085-E8A6-8845-BD4E-CB4CCA059FC4}" type="datetimeFigureOut">
               <a:rPr lang="en-US" smtClean="0"/>
-              <a:t>1/27/13</a:t>
+              <a:t>8/9/26</a:t>
             </a:fld>
             <a:endParaRPr lang="en-US"/>
           </a:p>
@@ -9836,7 +7018,7 @@
 </file>
 
 <file path=ppt/slides/slide1.xml><?xml version="1.0" encoding="utf-8"?>
-<p:sld xmlns:a="http://schemas.openxmlformats.org/drawingml/2006/main" xmlns:p="http://schemas.openxmlformats.org/presentationml/2006/main" xmlns:r="http://schemas.openxmlformats.org/officeDocument/2006/relationships">
+<p:sld xmlns:a="http://schemas.openxmlformats.org/drawingml/2006/main" xmlns:r="http://schemas.openxmlformats.org/officeDocument/2006/relationships" xmlns:p="http://schemas.openxmlformats.org/presentationml/2006/main">
   <p:cSld>
     <p:spTree>
       <p:nvGrpSpPr>
@@ -9844,7 +7026,14 @@
         <p:cNvGrpSpPr/>
         <p:nvPr/>
       </p:nvGrpSpPr>
-      <p:grpSpPr/>
+      <p:grpSpPr>
+        <a:xfrm>
+          <a:off x="0" y="0"/>
+          <a:ext cx="0" cy="0"/>
+          <a:chOff x="0" y="0"/>
+          <a:chExt cx="0" cy="0"/>
+        </a:xfrm>
+      </p:grpSpPr>
       <p:sp>
         <p:nvSpPr>
           <p:cNvPr id="2" name="TextBox 1"/>
@@ -9862,7 +7051,7 @@
           <a:noFill/>
         </p:spPr>
         <p:txBody>
-          <a:bodyPr wrap="none" lIns="0" rIns="0" tIns="0" bIns="0" anchor="t">
+          <a:bodyPr wrap="none" lIns="0" tIns="0" rIns="0" bIns="0" anchor="t">
             <a:spAutoFit/>
           </a:bodyPr>
           <a:lstStyle/>
@@ -9904,7 +7093,7 @@
           <a:noFill/>
         </p:spPr>
         <p:txBody>
-          <a:bodyPr wrap="square" lIns="0" rIns="0" tIns="0" bIns="0" anchor="t">
+          <a:bodyPr wrap="square" lIns="0" tIns="0" rIns="0" bIns="0" anchor="t">
             <a:spAutoFit/>
           </a:bodyPr>
           <a:lstStyle/>
@@ -9946,7 +7135,7 @@
           <a:noFill/>
         </p:spPr>
         <p:txBody>
-          <a:bodyPr wrap="none" lIns="0" rIns="0" tIns="0" bIns="0" anchor="t">
+          <a:bodyPr wrap="none" lIns="0" tIns="0" rIns="0" bIns="0" anchor="t">
             <a:spAutoFit/>
           </a:bodyPr>
           <a:lstStyle/>
@@ -9977,15 +7166,21 @@
           <p:cNvGraphicFramePr>
             <a:graphicFrameLocks noGrp="1"/>
           </p:cNvGraphicFramePr>
-          <p:nvPr/>
+          <p:nvPr>
+            <p:extLst>
+              <p:ext uri="{D42A27DB-BD31-4B8C-83A1-F6EECF244321}">
+                <p14:modId xmlns:p14="http://schemas.microsoft.com/office/powerpoint/2010/main" val="4042231192"/>
+              </p:ext>
+            </p:extLst>
+          </p:nvPr>
         </p:nvGraphicFramePr>
         <p:xfrm>
-          <a:off x="420624" y="1700784"/>
-          <a:ext cx="3675887" cy="2194560"/>
+          <a:off x="368136" y="1700784"/>
+          <a:ext cx="3728376" cy="2194560"/>
         </p:xfrm>
         <a:graphic>
           <a:graphicData uri="http://schemas.openxmlformats.org/drawingml/2006/chart">
-            <c:chart xmlns:c="http://schemas.openxmlformats.org/drawingml/2006/chart" r:id="rId2"/>
+            <c:chart xmlns:c="http://schemas.openxmlformats.org/drawingml/2006/chart" xmlns:r="http://schemas.openxmlformats.org/officeDocument/2006/relationships" r:id="rId2"/>
           </a:graphicData>
         </a:graphic>
       </p:graphicFrame>
@@ -10028,7 +7223,9 @@
         <p:txBody>
           <a:bodyPr rtlCol="0" anchor="ctr"/>
           <a:lstStyle/>
-          <a:p/>
+          <a:p>
+            <a:endParaRPr/>
+          </a:p>
         </p:txBody>
       </p:sp>
       <p:sp>
@@ -10070,7 +7267,9 @@
         <p:txBody>
           <a:bodyPr rtlCol="0" anchor="ctr"/>
           <a:lstStyle/>
-          <a:p/>
+          <a:p>
+            <a:endParaRPr/>
+          </a:p>
         </p:txBody>
       </p:sp>
       <p:sp>
@@ -10090,7 +7289,7 @@
           <a:noFill/>
         </p:spPr>
         <p:txBody>
-          <a:bodyPr wrap="none" lIns="0" rIns="0" tIns="0" bIns="0" anchor="ctr">
+          <a:bodyPr wrap="none" lIns="0" tIns="0" rIns="0" bIns="0" anchor="ctr">
             <a:spAutoFit/>
           </a:bodyPr>
           <a:lstStyle/>
@@ -10132,7 +7331,7 @@
           <a:noFill/>
         </p:spPr>
         <p:txBody>
-          <a:bodyPr wrap="none" lIns="0" rIns="0" tIns="0" bIns="0" anchor="t">
+          <a:bodyPr wrap="none" lIns="0" tIns="0" rIns="0" bIns="0" anchor="t">
             <a:spAutoFit/>
           </a:bodyPr>
           <a:lstStyle/>
@@ -10196,7 +7395,9 @@
         <p:txBody>
           <a:bodyPr rtlCol="0" anchor="ctr"/>
           <a:lstStyle/>
-          <a:p/>
+          <a:p>
+            <a:endParaRPr/>
+          </a:p>
         </p:txBody>
       </p:sp>
       <p:sp>
@@ -10216,7 +7417,7 @@
           <a:noFill/>
         </p:spPr>
         <p:txBody>
-          <a:bodyPr wrap="none" lIns="0" rIns="0" tIns="0" bIns="0" anchor="ctr">
+          <a:bodyPr wrap="none" lIns="0" tIns="0" rIns="0" bIns="0" anchor="ctr">
             <a:spAutoFit/>
           </a:bodyPr>
           <a:lstStyle/>
@@ -10280,7 +7481,9 @@
         <p:txBody>
           <a:bodyPr rtlCol="0" anchor="ctr"/>
           <a:lstStyle/>
-          <a:p/>
+          <a:p>
+            <a:endParaRPr/>
+          </a:p>
         </p:txBody>
       </p:sp>
       <p:sp>
@@ -10300,7 +7503,7 @@
           <a:noFill/>
         </p:spPr>
         <p:txBody>
-          <a:bodyPr wrap="none" lIns="0" rIns="0" tIns="0" bIns="0" anchor="ctr">
+          <a:bodyPr wrap="none" lIns="0" tIns="0" rIns="0" bIns="0" anchor="ctr">
             <a:spAutoFit/>
           </a:bodyPr>
           <a:lstStyle/>
@@ -10342,7 +7545,7 @@
           <a:noFill/>
         </p:spPr>
         <p:txBody>
-          <a:bodyPr wrap="none" lIns="0" rIns="0" tIns="0" bIns="0" anchor="t">
+          <a:bodyPr wrap="none" lIns="0" tIns="0" rIns="0" bIns="0" anchor="t">
             <a:spAutoFit/>
           </a:bodyPr>
           <a:lstStyle/>
@@ -10356,7 +7559,7 @@
               </a:spcAft>
             </a:pPr>
             <a:r>
-              <a:rPr sz="600" b="0" i="0">
+              <a:rPr sz="600" b="0" i="0" dirty="0">
                 <a:solidFill>
                   <a:srgbClr val="767576"/>
                 </a:solidFill>
@@ -10406,7 +7609,9 @@
         <p:txBody>
           <a:bodyPr rtlCol="0" anchor="ctr"/>
           <a:lstStyle/>
-          <a:p/>
+          <a:p>
+            <a:endParaRPr/>
+          </a:p>
         </p:txBody>
       </p:sp>
       <p:sp>
@@ -10426,7 +7631,7 @@
           <a:noFill/>
         </p:spPr>
         <p:txBody>
-          <a:bodyPr wrap="none" lIns="0" rIns="0" tIns="0" bIns="0" anchor="t">
+          <a:bodyPr wrap="none" lIns="0" tIns="0" rIns="0" bIns="0" anchor="t">
             <a:spAutoFit/>
           </a:bodyPr>
           <a:lstStyle/>
@@ -10468,7 +7673,7 @@
           <a:noFill/>
         </p:spPr>
         <p:txBody>
-          <a:bodyPr wrap="none" lIns="0" rIns="0" tIns="0" bIns="0" anchor="t">
+          <a:bodyPr wrap="none" lIns="0" tIns="0" rIns="0" bIns="0" anchor="t">
             <a:spAutoFit/>
           </a:bodyPr>
           <a:lstStyle/>
@@ -10482,7 +7687,7 @@
               </a:spcAft>
             </a:pPr>
             <a:r>
-              <a:rPr sz="800" b="0" i="0">
+              <a:rPr sz="800" b="0" i="0" dirty="0">
                 <a:solidFill>
                   <a:srgbClr val="767576"/>
                 </a:solidFill>
@@ -10510,7 +7715,7 @@
           <a:noFill/>
         </p:spPr>
         <p:txBody>
-          <a:bodyPr wrap="none" lIns="0" rIns="0" tIns="0" bIns="0" anchor="t">
+          <a:bodyPr wrap="none" lIns="0" tIns="0" rIns="0" bIns="0" anchor="t">
             <a:spAutoFit/>
           </a:bodyPr>
           <a:lstStyle/>
@@ -10552,7 +7757,7 @@
           <a:noFill/>
         </p:spPr>
         <p:txBody>
-          <a:bodyPr wrap="none" lIns="0" rIns="0" tIns="0" bIns="0" anchor="t">
+          <a:bodyPr wrap="none" lIns="0" tIns="0" rIns="0" bIns="0" anchor="t">
             <a:spAutoFit/>
           </a:bodyPr>
           <a:lstStyle/>
@@ -10594,7 +7799,7 @@
           <a:noFill/>
         </p:spPr>
         <p:txBody>
-          <a:bodyPr wrap="square" lIns="0" rIns="0" tIns="0" bIns="0" anchor="t">
+          <a:bodyPr wrap="square" lIns="0" tIns="0" rIns="0" bIns="0" anchor="t">
             <a:spAutoFit/>
           </a:bodyPr>
           <a:lstStyle/>
@@ -10636,7 +7841,7 @@
           <a:noFill/>
         </p:spPr>
         <p:txBody>
-          <a:bodyPr wrap="none" lIns="0" rIns="0" tIns="0" bIns="0" anchor="t">
+          <a:bodyPr wrap="none" lIns="0" tIns="0" rIns="0" bIns="0" anchor="t">
             <a:spAutoFit/>
           </a:bodyPr>
           <a:lstStyle/>
@@ -10667,7 +7872,13 @@
           <p:cNvGraphicFramePr>
             <a:graphicFrameLocks noGrp="1"/>
           </p:cNvGraphicFramePr>
-          <p:nvPr/>
+          <p:nvPr>
+            <p:extLst>
+              <p:ext uri="{D42A27DB-BD31-4B8C-83A1-F6EECF244321}">
+                <p14:modId xmlns:p14="http://schemas.microsoft.com/office/powerpoint/2010/main" val="2418641426"/>
+              </p:ext>
+            </p:extLst>
+          </p:nvPr>
         </p:nvGraphicFramePr>
         <p:xfrm>
           <a:off x="4261104" y="1700784"/>
@@ -10675,7 +7886,7 @@
         </p:xfrm>
         <a:graphic>
           <a:graphicData uri="http://schemas.openxmlformats.org/drawingml/2006/chart">
-            <c:chart xmlns:c="http://schemas.openxmlformats.org/drawingml/2006/chart" r:id="rId3"/>
+            <c:chart xmlns:c="http://schemas.openxmlformats.org/drawingml/2006/chart" xmlns:r="http://schemas.openxmlformats.org/officeDocument/2006/relationships" r:id="rId3"/>
           </a:graphicData>
         </a:graphic>
       </p:graphicFrame>
@@ -10696,7 +7907,7 @@
           <a:noFill/>
         </p:spPr>
         <p:txBody>
-          <a:bodyPr wrap="none" lIns="0" rIns="0" tIns="0" bIns="0" anchor="t">
+          <a:bodyPr wrap="none" lIns="0" tIns="0" rIns="0" bIns="0" anchor="t">
             <a:spAutoFit/>
           </a:bodyPr>
           <a:lstStyle/>
@@ -10738,7 +7949,7 @@
           <a:noFill/>
         </p:spPr>
         <p:txBody>
-          <a:bodyPr wrap="none" lIns="0" rIns="0" tIns="0" bIns="0" anchor="t">
+          <a:bodyPr wrap="none" lIns="0" tIns="0" rIns="0" bIns="0" anchor="t">
             <a:spAutoFit/>
           </a:bodyPr>
           <a:lstStyle/>
@@ -10780,7 +7991,7 @@
           <a:noFill/>
         </p:spPr>
         <p:txBody>
-          <a:bodyPr wrap="none" lIns="0" rIns="0" tIns="0" bIns="0" anchor="t">
+          <a:bodyPr wrap="none" lIns="0" tIns="0" rIns="0" bIns="0" anchor="t">
             <a:spAutoFit/>
           </a:bodyPr>
           <a:lstStyle/>
@@ -10822,7 +8033,7 @@
           <a:noFill/>
         </p:spPr>
         <p:txBody>
-          <a:bodyPr wrap="none" lIns="0" rIns="0" tIns="0" bIns="0" anchor="t">
+          <a:bodyPr wrap="none" lIns="0" tIns="0" rIns="0" bIns="0" anchor="t">
             <a:spAutoFit/>
           </a:bodyPr>
           <a:lstStyle/>
@@ -10864,7 +8075,7 @@
           <a:noFill/>
         </p:spPr>
         <p:txBody>
-          <a:bodyPr wrap="square" lIns="0" rIns="0" tIns="0" bIns="0" anchor="t">
+          <a:bodyPr wrap="square" lIns="0" tIns="0" rIns="0" bIns="0" anchor="t">
             <a:spAutoFit/>
           </a:bodyPr>
           <a:lstStyle/>
@@ -10906,7 +8117,7 @@
           <a:noFill/>
         </p:spPr>
         <p:txBody>
-          <a:bodyPr wrap="none" lIns="0" rIns="0" tIns="0" bIns="0" anchor="t">
+          <a:bodyPr wrap="none" lIns="0" tIns="0" rIns="0" bIns="0" anchor="t">
             <a:spAutoFit/>
           </a:bodyPr>
           <a:lstStyle/>
@@ -10937,7 +8148,13 @@
           <p:cNvGraphicFramePr>
             <a:graphicFrameLocks noGrp="1"/>
           </p:cNvGraphicFramePr>
-          <p:nvPr/>
+          <p:nvPr>
+            <p:extLst>
+              <p:ext uri="{D42A27DB-BD31-4B8C-83A1-F6EECF244321}">
+                <p14:modId xmlns:p14="http://schemas.microsoft.com/office/powerpoint/2010/main" val="1941404050"/>
+              </p:ext>
+            </p:extLst>
+          </p:nvPr>
         </p:nvGraphicFramePr>
         <p:xfrm>
           <a:off x="8101583" y="1700784"/>
@@ -10945,7 +8162,7 @@
         </p:xfrm>
         <a:graphic>
           <a:graphicData uri="http://schemas.openxmlformats.org/drawingml/2006/chart">
-            <c:chart xmlns:c="http://schemas.openxmlformats.org/drawingml/2006/chart" r:id="rId4"/>
+            <c:chart xmlns:c="http://schemas.openxmlformats.org/drawingml/2006/chart" xmlns:r="http://schemas.openxmlformats.org/officeDocument/2006/relationships" r:id="rId4"/>
           </a:graphicData>
         </a:graphic>
       </p:graphicFrame>
@@ -10966,7 +8183,7 @@
           <a:noFill/>
         </p:spPr>
         <p:txBody>
-          <a:bodyPr wrap="none" lIns="0" rIns="0" tIns="0" bIns="0" anchor="t">
+          <a:bodyPr wrap="none" lIns="0" tIns="0" rIns="0" bIns="0" anchor="t">
             <a:spAutoFit/>
           </a:bodyPr>
           <a:lstStyle/>
@@ -11008,7 +8225,7 @@
           <a:noFill/>
         </p:spPr>
         <p:txBody>
-          <a:bodyPr wrap="none" lIns="0" rIns="0" tIns="0" bIns="0" anchor="t">
+          <a:bodyPr wrap="none" lIns="0" tIns="0" rIns="0" bIns="0" anchor="t">
             <a:spAutoFit/>
           </a:bodyPr>
           <a:lstStyle/>
@@ -11050,7 +8267,7 @@
           <a:noFill/>
         </p:spPr>
         <p:txBody>
-          <a:bodyPr wrap="none" lIns="0" rIns="0" tIns="0" bIns="0" anchor="t">
+          <a:bodyPr wrap="none" lIns="0" tIns="0" rIns="0" bIns="0" anchor="t">
             <a:spAutoFit/>
           </a:bodyPr>
           <a:lstStyle/>
@@ -11092,7 +8309,7 @@
           <a:noFill/>
         </p:spPr>
         <p:txBody>
-          <a:bodyPr wrap="none" lIns="0" rIns="0" tIns="0" bIns="0" anchor="t">
+          <a:bodyPr wrap="none" lIns="0" tIns="0" rIns="0" bIns="0" anchor="t">
             <a:spAutoFit/>
           </a:bodyPr>
           <a:lstStyle/>
@@ -11125,8 +8342,8 @@
         </p:nvSpPr>
         <p:spPr>
           <a:xfrm>
-            <a:off x="475488" y="4937760"/>
-            <a:ext cx="11247120" cy="1024128"/>
+            <a:off x="475488" y="5193792"/>
+            <a:ext cx="11247120" cy="768096"/>
           </a:xfrm>
           <a:prstGeom prst="rect">
             <a:avLst/>
@@ -11156,7 +8373,9 @@
         <p:txBody>
           <a:bodyPr rtlCol="0" anchor="ctr"/>
           <a:lstStyle/>
-          <a:p/>
+          <a:p>
+            <a:endParaRPr/>
+          </a:p>
         </p:txBody>
       </p:sp>
       <p:sp>
@@ -11167,8 +8386,8 @@
         </p:nvSpPr>
         <p:spPr>
           <a:xfrm>
-            <a:off x="786384" y="5029200"/>
-            <a:ext cx="10625328" cy="877824"/>
+            <a:off x="786384" y="5288697"/>
+            <a:ext cx="10625328" cy="510204"/>
           </a:xfrm>
           <a:prstGeom prst="rect">
             <a:avLst/>
@@ -11176,7 +8395,7 @@
           <a:noFill/>
         </p:spPr>
         <p:txBody>
-          <a:bodyPr wrap="square" lIns="0" rIns="0" tIns="0" bIns="0" anchor="t">
+          <a:bodyPr wrap="square" lIns="0" tIns="0" rIns="0" bIns="0" anchor="t">
             <a:spAutoFit/>
           </a:bodyPr>
           <a:lstStyle/>
@@ -11190,14 +8409,38 @@
               </a:spcAft>
             </a:pPr>
             <a:r>
-              <a:rPr sz="950" b="0" i="0">
+              <a:rPr lang="en-AU" sz="950" dirty="0">
                 <a:solidFill>
                   <a:srgbClr val="000000"/>
                 </a:solidFill>
                 <a:latin typeface="Arial"/>
               </a:rPr>
-              <a:t>Three structural changes are occurring at once: the Bank of Japan is withdrawing after twenty-five years of suppression, a record debt stock must now clear through price-sensitive investors, and the deflationary equilibrium that justified zero yields has ended. Describing this as a fiscal story is a misnomer. The stock accumulated over decades and the fiscal stance has not materially shifted; what changed is who absorbs the issuance. Each factor raises the term premium demanded at the long end, and none of them affects the front end, which the Bank continues to control and is normalising slowly. That combination is a bear steepener.</a:t>
-            </a:r>
+              <a:t>Three structural shifts are driving a bear </a:t>
+            </a:r>
+            <a:r>
+              <a:rPr lang="en-AU" sz="950" dirty="0" err="1">
+                <a:solidFill>
+                  <a:srgbClr val="000000"/>
+                </a:solidFill>
+                <a:latin typeface="Arial"/>
+              </a:rPr>
+              <a:t>steepener</a:t>
+            </a:r>
+            <a:r>
+              <a:rPr lang="en-AU" sz="950" dirty="0">
+                <a:solidFill>
+                  <a:srgbClr val="000000"/>
+                </a:solidFill>
+                <a:latin typeface="Arial"/>
+              </a:rPr>
+              <a:t> here. the BoJ is unwinding 25 years of yield suppression, record JGB supply must increasingly clear through price-sensitive investors, and the deflationary regime that justified zero yields has ended. This is not primarily a fiscal deterioration story, the debt stock was built over decades and the fiscal stance has not materially changed. What has changed is the marginal buyer. Each shift raises the term premium at the long end, while the BoJ still anchors the front end and is normalising only gradually.</a:t>
+            </a:r>
+            <a:endParaRPr sz="950" b="0" i="0" dirty="0">
+              <a:solidFill>
+                <a:srgbClr val="000000"/>
+              </a:solidFill>
+              <a:latin typeface="Arial"/>
+            </a:endParaRPr>
           </a:p>
         </p:txBody>
       </p:sp>
@@ -11218,7 +8461,7 @@
           <a:noFill/>
         </p:spPr>
         <p:txBody>
-          <a:bodyPr wrap="none" lIns="0" rIns="0" tIns="0" bIns="0" anchor="t">
+          <a:bodyPr wrap="none" lIns="0" tIns="0" rIns="0" bIns="0" anchor="t">
             <a:spAutoFit/>
           </a:bodyPr>
           <a:lstStyle/>
@@ -11239,48 +8482,6 @@
                 <a:latin typeface="Arial"/>
               </a:rPr>
               <a:t>Sources: Japan Ministry of Finance, Bank of Japan, FRED</a:t>
-            </a:r>
-          </a:p>
-        </p:txBody>
-      </p:sp>
-      <p:sp>
-        <p:nvSpPr>
-          <p:cNvPr id="37" name="TextBox 36"/>
-          <p:cNvSpPr txBox="1"/>
-          <p:nvPr/>
-        </p:nvSpPr>
-        <p:spPr>
-          <a:xfrm>
-            <a:off x="475488" y="6089904"/>
-            <a:ext cx="11247120" cy="201168"/>
-          </a:xfrm>
-          <a:prstGeom prst="rect">
-            <a:avLst/>
-          </a:prstGeom>
-          <a:noFill/>
-        </p:spPr>
-        <p:txBody>
-          <a:bodyPr wrap="none" lIns="0" rIns="0" tIns="0" bIns="0" anchor="t">
-            <a:spAutoFit/>
-          </a:bodyPr>
-          <a:lstStyle/>
-          <a:p>
-            <a:pPr algn="ctr">
-              <a:lnSpc>
-                <a:spcPct val="100000"/>
-              </a:lnSpc>
-              <a:spcAft>
-                <a:spcPts val="0"/>
-              </a:spcAft>
-            </a:pPr>
-            <a:r>
-              <a:rPr sz="800" b="0" i="0">
-                <a:solidFill>
-                  <a:srgbClr val="BFBFBF"/>
-                </a:solidFill>
-                <a:latin typeface="Arial"/>
-              </a:rPr>
-              <a:t>INTERNAL</a:t>
             </a:r>
           </a:p>
         </p:txBody>
